--- a/CredMe-status-deck.pptx
+++ b/CredMe-status-deck.pptx
@@ -16,6 +16,8 @@
     <p:sldId id="264" r:id="rId15"/>
     <p:sldId id="265" r:id="rId16"/>
     <p:sldId id="266" r:id="rId17"/>
+    <p:sldId id="267" r:id="rId18"/>
+    <p:sldId id="268" r:id="rId19"/>
   </p:sldIdLst>
   <p:sldSz cx="12191695" cy="6858000" type="screen4x3"/>
   <p:notesSz cx="6858000" cy="9144000"/>
@@ -3194,8 +3196,8 @@
         </p:nvSpPr>
         <p:spPr>
           <a:xfrm>
-            <a:off x="1188720" y="1188720"/>
-            <a:ext cx="5303520" cy="365760"/>
+            <a:off x="1188720" y="1097280"/>
+            <a:ext cx="5669280" cy="347472"/>
           </a:xfrm>
           <a:prstGeom prst="roundRect">
             <a:avLst/>
@@ -3228,14 +3230,14 @@
           <a:lstStyle/>
           <a:p>
             <a:pPr algn="ctr">
-              <a:defRPr sz="1100" b="1">
+              <a:defRPr sz="1000" b="1">
                 <a:solidFill>
                   <a:srgbClr val="C7D2FE"/>
                 </a:solidFill>
               </a:defRPr>
             </a:pPr>
             <a:r>
-              <a:t>SYNCHRONY HACKATHON SOLUTION PITCH</a:t>
+              <a:t>SYNCHRONY HACKATHON — SUBMISSION &amp; PITCH DECK</a:t>
             </a:r>
           </a:p>
         </p:txBody>
@@ -3248,8 +3250,8 @@
         </p:nvSpPr>
         <p:spPr>
           <a:xfrm>
-            <a:off x="1188720" y="1737360"/>
-            <a:ext cx="9784080" cy="1645920"/>
+            <a:off x="1188720" y="1600200"/>
+            <a:ext cx="9784080" cy="1737360"/>
           </a:xfrm>
           <a:prstGeom prst="rect">
             <a:avLst/>
@@ -3263,7 +3265,7 @@
           <a:lstStyle/>
           <a:p>
             <a:pPr>
-              <a:defRPr sz="4000" b="1">
+              <a:defRPr sz="3800" b="1">
                 <a:solidFill>
                   <a:srgbClr val="FFFFFF"/>
                 </a:solidFill>
@@ -3275,14 +3277,14 @@
           </a:p>
           <a:p>
             <a:pPr>
-              <a:defRPr sz="2200" b="1">
+              <a:defRPr sz="2000" b="1">
                 <a:solidFill>
                   <a:srgbClr val="A5B4FC"/>
                 </a:solidFill>
               </a:defRPr>
             </a:pPr>
             <a:r>
-              <a:t>Next-Gen Real-Time, Multi-Modal Credit Underwriting Engine</a:t>
+              <a:t>Real-Time, Multi-Modal Credit Underwriting &amp; Risk Engine</a:t>
             </a:r>
           </a:p>
         </p:txBody>
@@ -3295,8 +3297,8 @@
         </p:nvSpPr>
         <p:spPr>
           <a:xfrm>
-            <a:off x="1188720" y="3474720"/>
-            <a:ext cx="9784080" cy="1097280"/>
+            <a:off x="1188720" y="3383280"/>
+            <a:ext cx="9784080" cy="1280160"/>
           </a:xfrm>
           <a:prstGeom prst="rect">
             <a:avLst/>
@@ -3317,7 +3319,7 @@
               </a:defRPr>
             </a:pPr>
             <a:r>
-              <a:t>Expanding financial inclusion for New-to-Credit (NTC) and Thin-File applicants via fused XGBoost credit scoring, real-time behavioral anomaly detection, alternative signals, and regulatory-grade explainability.</a:t>
+              <a:t>A comprehensive solution expanding credit access to New-to-Credit (NTC) &amp; Thin-File applicants by fusing traditional credit scoring, real-time behavioral anomaly detection, alternative signals, and regulatory-grade explainability.</a:t>
             </a:r>
           </a:p>
         </p:txBody>
@@ -3330,8 +3332,8 @@
         </p:nvSpPr>
         <p:spPr>
           <a:xfrm>
-            <a:off x="1188720" y="4937760"/>
-            <a:ext cx="9784080" cy="731520"/>
+            <a:off x="1188720" y="4800600"/>
+            <a:ext cx="9784080" cy="914400"/>
           </a:xfrm>
           <a:prstGeom prst="rect">
             <a:avLst/>
@@ -3345,26 +3347,29 @@
           <a:lstStyle/>
           <a:p>
             <a:pPr>
-              <a:defRPr sz="1200" b="1">
+              <a:defRPr sz="1100" b="1">
                 <a:solidFill>
                   <a:srgbClr val="94A3B8"/>
                 </a:solidFill>
               </a:defRPr>
             </a:pPr>
             <a:r>
-              <a:t>Problem Statement: Next-Gen Credit Intelligence | Submission Format: PPT / Pitch Deck</a:t>
-            </a:r>
-          </a:p>
-          <a:p>
-            <a:pPr>
-              <a:defRPr sz="1200">
+              <a:t>Problem Statement: Next-Gen Credit Intelligence: Building a Real-Time, Multi-Modal Underwriting Engine</a:t>
+            </a:r>
+          </a:p>
+          <a:p>
+            <a:pPr>
+              <a:spcBef>
+                <a:spcPts val="300"/>
+              </a:spcBef>
+              <a:defRPr sz="1100">
                 <a:solidFill>
                   <a:srgbClr val="818CF8"/>
                 </a:solidFill>
               </a:defRPr>
             </a:pPr>
             <a:r>
-              <a:t>Candidate Roll Number: [Your Roll Number] | GitHub: https://github.com/ADlio1408/CredME</a:t>
+              <a:t>Candidate Roll Number: [Your Roll Number]  |  GitHub: https://github.com/ADlio1408/CredME  |  Date: August 2026</a:t>
             </a:r>
           </a:p>
         </p:txBody>
@@ -3438,7 +3443,7 @@
         </p:nvSpPr>
         <p:spPr>
           <a:xfrm>
-            <a:off x="731520" y="411480"/>
+            <a:off x="731520" y="365760"/>
             <a:ext cx="10698480" cy="274320"/>
           </a:xfrm>
           <a:prstGeom prst="rect">
@@ -3460,7 +3465,7 @@
               </a:defRPr>
             </a:pPr>
             <a:r>
-              <a:t>9. VISION &amp; ROADMAP</a:t>
+              <a:t>9. PROTOTYPE DEMO</a:t>
             </a:r>
           </a:p>
         </p:txBody>
@@ -3473,7 +3478,7 @@
         </p:nvSpPr>
         <p:spPr>
           <a:xfrm>
-            <a:off x="731520" y="685800"/>
+            <a:off x="731520" y="640080"/>
             <a:ext cx="10698480" cy="502920"/>
           </a:xfrm>
           <a:prstGeom prst="rect">
@@ -3488,14 +3493,14 @@
           <a:lstStyle/>
           <a:p>
             <a:pPr>
-              <a:defRPr sz="2200" b="1">
+              <a:defRPr sz="2100" b="1">
                 <a:solidFill>
                   <a:srgbClr val="0F172A"/>
                 </a:solidFill>
               </a:defRPr>
             </a:pPr>
             <a:r>
-              <a:t>Future Roadmap: Scaling to Enterprise Production</a:t>
+              <a:t>Live Decisioning Engine &amp; Interactive UI Walkthrough</a:t>
             </a:r>
           </a:p>
         </p:txBody>
@@ -3508,8 +3513,8 @@
         </p:nvSpPr>
         <p:spPr>
           <a:xfrm>
-            <a:off x="731520" y="1280160"/>
-            <a:ext cx="10698480" cy="1463040"/>
+            <a:off x="731520" y="1234440"/>
+            <a:ext cx="3383280" cy="5120640"/>
           </a:xfrm>
           <a:prstGeom prst="roundRect">
             <a:avLst/>
@@ -3553,14 +3558,14 @@
         </p:nvSpPr>
         <p:spPr>
           <a:xfrm>
-            <a:off x="731520" y="1280160"/>
-            <a:ext cx="182880" cy="1463040"/>
+            <a:off x="731520" y="1234440"/>
+            <a:ext cx="3383280" cy="548640"/>
           </a:xfrm>
           <a:prstGeom prst="rect">
             <a:avLst/>
           </a:prstGeom>
           <a:solidFill>
-            <a:srgbClr val="4F46E5"/>
+            <a:srgbClr val="10B981"/>
           </a:solidFill>
           <a:ln>
             <a:noFill/>
@@ -3584,7 +3589,16 @@
           <a:bodyPr rtlCol="0" anchor="ctr"/>
           <a:lstStyle/>
           <a:p>
-            <a:pPr algn="ctr"/>
+            <a:pPr algn="ctr">
+              <a:defRPr sz="1050" b="1">
+                <a:solidFill>
+                  <a:srgbClr val="FFFFFF"/>
+                </a:solidFill>
+              </a:defRPr>
+            </a:pPr>
+            <a:r>
+              <a:t>Scenario A: Thin-File Applicant (NTC)</a:t>
+            </a:r>
           </a:p>
         </p:txBody>
       </p:sp>
@@ -3596,8 +3610,8 @@
         </p:nvSpPr>
         <p:spPr>
           <a:xfrm>
-            <a:off x="1097280" y="1417320"/>
-            <a:ext cx="10058400" cy="1188720"/>
+            <a:off x="914400" y="1920240"/>
+            <a:ext cx="3017520" cy="4206240"/>
           </a:xfrm>
           <a:prstGeom prst="rect">
             <a:avLst/>
@@ -3611,29 +3625,27 @@
           <a:lstStyle/>
           <a:p>
             <a:pPr>
-              <a:defRPr sz="1400" b="1">
-                <a:solidFill>
-                  <a:srgbClr val="4F46E5"/>
-                </a:solidFill>
-              </a:defRPr>
-            </a:pPr>
-            <a:r>
-              <a:t>Phase 1: Semantic Underwriting Search (pgvector)</a:t>
-            </a:r>
-          </a:p>
-          <a:p>
-            <a:pPr>
-              <a:spcBef>
-                <a:spcPts val="400"/>
-              </a:spcBef>
-              <a:defRPr sz="1100">
-                <a:solidFill>
-                  <a:srgbClr val="64748B"/>
-                </a:solidFill>
-              </a:defRPr>
-            </a:pPr>
-            <a:r>
-              <a:t>Index historical credit applications and underwriter notes into PostgreSQL pgvector embeddings. Allows loan officers to query 'Find similar NTC gig-worker applications approved in Q3' for contextual precedence.</a:t>
+              <a:defRPr sz="1050">
+                <a:solidFill>
+                  <a:srgbClr val="0F172A"/>
+                </a:solidFill>
+              </a:defRPr>
+            </a:pPr>
+            <a:r>
+              <a:t>• Credit Score = 0 (Unestablished)</a:t>
+            </a:r>
+            <a:br/>
+            <a:r>
+              <a:t>• Income = $65,000, DTI = 18%</a:t>
+            </a:r>
+            <a:br/>
+            <a:r>
+              <a:t>• Rent Consistency = 0.92</a:t>
+            </a:r>
+            <a:br/>
+            <a:br/>
+            <a:r>
+              <a:t>Outcome: APPROVE (Zero score penalty bypassed; strong alternative rent signals confirm reliability)</a:t>
             </a:r>
           </a:p>
         </p:txBody>
@@ -3646,8 +3658,8 @@
         </p:nvSpPr>
         <p:spPr>
           <a:xfrm>
-            <a:off x="731520" y="2926080"/>
-            <a:ext cx="10698480" cy="1463040"/>
+            <a:off x="4389120" y="1234440"/>
+            <a:ext cx="3383280" cy="5120640"/>
           </a:xfrm>
           <a:prstGeom prst="roundRect">
             <a:avLst/>
@@ -3691,8 +3703,8 @@
         </p:nvSpPr>
         <p:spPr>
           <a:xfrm>
-            <a:off x="731520" y="2926080"/>
-            <a:ext cx="182880" cy="1463040"/>
+            <a:off x="4389120" y="1234440"/>
+            <a:ext cx="3383280" cy="548640"/>
           </a:xfrm>
           <a:prstGeom prst="rect">
             <a:avLst/>
@@ -3722,7 +3734,16 @@
           <a:bodyPr rtlCol="0" anchor="ctr"/>
           <a:lstStyle/>
           <a:p>
-            <a:pPr algn="ctr"/>
+            <a:pPr algn="ctr">
+              <a:defRPr sz="1050" b="1">
+                <a:solidFill>
+                  <a:srgbClr val="FFFFFF"/>
+                </a:solidFill>
+              </a:defRPr>
+            </a:pPr>
+            <a:r>
+              <a:t>Scenario B: Prime Profile with Behavioral Anomaly</a:t>
+            </a:r>
           </a:p>
         </p:txBody>
       </p:sp>
@@ -3734,8 +3755,8 @@
         </p:nvSpPr>
         <p:spPr>
           <a:xfrm>
-            <a:off x="1097280" y="3063240"/>
-            <a:ext cx="10058400" cy="1188720"/>
+            <a:off x="4572000" y="1920240"/>
+            <a:ext cx="3017520" cy="4206240"/>
           </a:xfrm>
           <a:prstGeom prst="rect">
             <a:avLst/>
@@ -3749,29 +3770,27 @@
           <a:lstStyle/>
           <a:p>
             <a:pPr>
-              <a:defRPr sz="1400" b="1">
-                <a:solidFill>
-                  <a:srgbClr val="7C3AED"/>
-                </a:solidFill>
-              </a:defRPr>
-            </a:pPr>
-            <a:r>
-              <a:t>Phase 2: Open Banking / Account Aggregator (AA)</a:t>
-            </a:r>
-          </a:p>
-          <a:p>
-            <a:pPr>
-              <a:spcBef>
-                <a:spcPts val="400"/>
-              </a:spcBef>
-              <a:defRPr sz="1100">
-                <a:solidFill>
-                  <a:srgbClr val="64748B"/>
-                </a:solidFill>
-              </a:defRPr>
-            </a:pPr>
-            <a:r>
-              <a:t>Connect real-time Open Banking APIs (e.g. Plaid / India Stack AA) to ingest continuous cashflow, GST filings, and merchant receipts directly into behavioral baselines.</a:t>
+              <a:defRPr sz="1050">
+                <a:solidFill>
+                  <a:srgbClr val="0F172A"/>
+                </a:solidFill>
+              </a:defRPr>
+            </a:pPr>
+            <a:r>
+              <a:t>• Credit Score = 760 (Excellent)</a:t>
+            </a:r>
+            <a:br/>
+            <a:r>
+              <a:t>• Recent transaction-to-balance = 0.94</a:t>
+            </a:r>
+            <a:br/>
+            <a:r>
+              <a:t>• 5 rapid failed login attempts</a:t>
+            </a:r>
+            <a:br/>
+            <a:br/>
+            <a:r>
+              <a:t>Outcome: REVIEW (Credit is strong, but live transaction anomaly flags potential account compromise)</a:t>
             </a:r>
           </a:p>
         </p:txBody>
@@ -3784,8 +3803,8 @@
         </p:nvSpPr>
         <p:spPr>
           <a:xfrm>
-            <a:off x="731520" y="4572000"/>
-            <a:ext cx="10698480" cy="1463040"/>
+            <a:off x="8046720" y="1234440"/>
+            <a:ext cx="3383280" cy="5120640"/>
           </a:xfrm>
           <a:prstGeom prst="roundRect">
             <a:avLst/>
@@ -3829,14 +3848,14 @@
         </p:nvSpPr>
         <p:spPr>
           <a:xfrm>
-            <a:off x="731520" y="4572000"/>
-            <a:ext cx="182880" cy="1463040"/>
+            <a:off x="8046720" y="1234440"/>
+            <a:ext cx="3383280" cy="548640"/>
           </a:xfrm>
           <a:prstGeom prst="rect">
             <a:avLst/>
           </a:prstGeom>
           <a:solidFill>
-            <a:srgbClr val="10B981"/>
+            <a:srgbClr val="EF4444"/>
           </a:solidFill>
           <a:ln>
             <a:noFill/>
@@ -3860,7 +3879,16 @@
           <a:bodyPr rtlCol="0" anchor="ctr"/>
           <a:lstStyle/>
           <a:p>
-            <a:pPr algn="ctr"/>
+            <a:pPr algn="ctr">
+              <a:defRPr sz="1050" b="1">
+                <a:solidFill>
+                  <a:srgbClr val="FFFFFF"/>
+                </a:solidFill>
+              </a:defRPr>
+            </a:pPr>
+            <a:r>
+              <a:t>Scenario C: Overleveraged Applicant</a:t>
+            </a:r>
           </a:p>
         </p:txBody>
       </p:sp>
@@ -3872,8 +3900,8 @@
         </p:nvSpPr>
         <p:spPr>
           <a:xfrm>
-            <a:off x="1097280" y="4709160"/>
-            <a:ext cx="10058400" cy="1188720"/>
+            <a:off x="8229600" y="1920240"/>
+            <a:ext cx="3017520" cy="4206240"/>
           </a:xfrm>
           <a:prstGeom prst="rect">
             <a:avLst/>
@@ -3887,29 +3915,27 @@
           <a:lstStyle/>
           <a:p>
             <a:pPr>
-              <a:defRPr sz="1400" b="1">
-                <a:solidFill>
-                  <a:srgbClr val="10B981"/>
-                </a:solidFill>
-              </a:defRPr>
-            </a:pPr>
-            <a:r>
-              <a:t>Phase 3: Autonomous Underwriting Agents</a:t>
-            </a:r>
-          </a:p>
-          <a:p>
-            <a:pPr>
-              <a:spcBef>
-                <a:spcPts val="400"/>
-              </a:spcBef>
-              <a:defRPr sz="1100">
-                <a:solidFill>
-                  <a:srgbClr val="64748B"/>
-                </a:solidFill>
-              </a:defRPr>
-            </a:pPr>
-            <a:r>
-              <a:t>Deploy LangGraph / Bedrock multi-agent workflows that can autonomously request clarifying documents from applicants and cross-verify income before human final signoff.</a:t>
+              <a:defRPr sz="1050">
+                <a:solidFill>
+                  <a:srgbClr val="0F172A"/>
+                </a:solidFill>
+              </a:defRPr>
+            </a:pPr>
+            <a:r>
+              <a:t>• Credit Score = 580</a:t>
+            </a:r>
+            <a:br/>
+            <a:r>
+              <a:t>• DTI = 54%, High Debt Payments</a:t>
+            </a:r>
+            <a:br/>
+            <a:r>
+              <a:t>• Negative SHAP attributions</a:t>
+            </a:r>
+            <a:br/>
+            <a:br/>
+            <a:r>
+              <a:t>Outcome: DECLINE (Clear adverse action drivers generated highlighting high debt obligations)</a:t>
             </a:r>
           </a:p>
         </p:txBody>
@@ -3947,6 +3973,1266 @@
             <a:avLst/>
           </a:prstGeom>
           <a:solidFill>
+            <a:srgbClr val="F8FAFC"/>
+          </a:solidFill>
+          <a:ln>
+            <a:noFill/>
+          </a:ln>
+        </p:spPr>
+        <p:style>
+          <a:lnRef idx="1">
+            <a:schemeClr val="accent1"/>
+          </a:lnRef>
+          <a:fillRef idx="3">
+            <a:schemeClr val="accent1"/>
+          </a:fillRef>
+          <a:effectRef idx="2">
+            <a:schemeClr val="accent1"/>
+          </a:effectRef>
+          <a:fontRef idx="minor">
+            <a:schemeClr val="lt1"/>
+          </a:fontRef>
+        </p:style>
+        <p:txBody>
+          <a:bodyPr rtlCol="0" anchor="ctr"/>
+          <a:lstStyle/>
+          <a:p>
+            <a:pPr algn="ctr"/>
+          </a:p>
+        </p:txBody>
+      </p:sp>
+      <p:sp>
+        <p:nvSpPr>
+          <p:cNvPr id="3" name="TextBox 2"/>
+          <p:cNvSpPr txBox="1"/>
+          <p:nvPr/>
+        </p:nvSpPr>
+        <p:spPr>
+          <a:xfrm>
+            <a:off x="731520" y="365760"/>
+            <a:ext cx="10698480" cy="274320"/>
+          </a:xfrm>
+          <a:prstGeom prst="rect">
+            <a:avLst/>
+          </a:prstGeom>
+          <a:noFill/>
+        </p:spPr>
+        <p:txBody>
+          <a:bodyPr wrap="square" lIns="0" rIns="0" tIns="0" bIns="0">
+            <a:spAutoFit/>
+          </a:bodyPr>
+          <a:lstStyle/>
+          <a:p>
+            <a:pPr>
+              <a:defRPr sz="1000" b="1">
+                <a:solidFill>
+                  <a:srgbClr val="4F46E5"/>
+                </a:solidFill>
+              </a:defRPr>
+            </a:pPr>
+            <a:r>
+              <a:t>10. PRODUCTION STANDARDS</a:t>
+            </a:r>
+          </a:p>
+        </p:txBody>
+      </p:sp>
+      <p:sp>
+        <p:nvSpPr>
+          <p:cNvPr id="4" name="TextBox 3"/>
+          <p:cNvSpPr txBox="1"/>
+          <p:nvPr/>
+        </p:nvSpPr>
+        <p:spPr>
+          <a:xfrm>
+            <a:off x="731520" y="640080"/>
+            <a:ext cx="10698480" cy="502920"/>
+          </a:xfrm>
+          <a:prstGeom prst="rect">
+            <a:avLst/>
+          </a:prstGeom>
+          <a:noFill/>
+        </p:spPr>
+        <p:txBody>
+          <a:bodyPr wrap="square" lIns="0" rIns="0" tIns="0" bIns="0">
+            <a:spAutoFit/>
+          </a:bodyPr>
+          <a:lstStyle/>
+          <a:p>
+            <a:pPr>
+              <a:defRPr sz="2100" b="1">
+                <a:solidFill>
+                  <a:srgbClr val="0F172A"/>
+                </a:solidFill>
+              </a:defRPr>
+            </a:pPr>
+            <a:r>
+              <a:t>Engineering Discipline: Security, Code Quality &amp; DevOps</a:t>
+            </a:r>
+          </a:p>
+        </p:txBody>
+      </p:sp>
+      <p:sp>
+        <p:nvSpPr>
+          <p:cNvPr id="5" name="Rounded Rectangle 4"/>
+          <p:cNvSpPr/>
+          <p:nvPr/>
+        </p:nvSpPr>
+        <p:spPr>
+          <a:xfrm>
+            <a:off x="731520" y="1234440"/>
+            <a:ext cx="2560320" cy="5120640"/>
+          </a:xfrm>
+          <a:prstGeom prst="roundRect">
+            <a:avLst/>
+          </a:prstGeom>
+          <a:solidFill>
+            <a:srgbClr val="FFFFFF"/>
+          </a:solidFill>
+          <a:ln w="19050">
+            <a:solidFill>
+              <a:srgbClr val="E2E8F0"/>
+            </a:solidFill>
+          </a:ln>
+        </p:spPr>
+        <p:style>
+          <a:lnRef idx="1">
+            <a:schemeClr val="accent1"/>
+          </a:lnRef>
+          <a:fillRef idx="3">
+            <a:schemeClr val="accent1"/>
+          </a:fillRef>
+          <a:effectRef idx="2">
+            <a:schemeClr val="accent1"/>
+          </a:effectRef>
+          <a:fontRef idx="minor">
+            <a:schemeClr val="lt1"/>
+          </a:fontRef>
+        </p:style>
+        <p:txBody>
+          <a:bodyPr rtlCol="0" anchor="ctr"/>
+          <a:lstStyle/>
+          <a:p>
+            <a:pPr algn="ctr"/>
+          </a:p>
+        </p:txBody>
+      </p:sp>
+      <p:sp>
+        <p:nvSpPr>
+          <p:cNvPr id="6" name="Rectangle 5"/>
+          <p:cNvSpPr/>
+          <p:nvPr/>
+        </p:nvSpPr>
+        <p:spPr>
+          <a:xfrm>
+            <a:off x="731520" y="1234440"/>
+            <a:ext cx="2560320" cy="502920"/>
+          </a:xfrm>
+          <a:prstGeom prst="rect">
+            <a:avLst/>
+          </a:prstGeom>
+          <a:solidFill>
+            <a:srgbClr val="4F46E5"/>
+          </a:solidFill>
+          <a:ln>
+            <a:noFill/>
+          </a:ln>
+        </p:spPr>
+        <p:style>
+          <a:lnRef idx="1">
+            <a:schemeClr val="accent1"/>
+          </a:lnRef>
+          <a:fillRef idx="3">
+            <a:schemeClr val="accent1"/>
+          </a:fillRef>
+          <a:effectRef idx="2">
+            <a:schemeClr val="accent1"/>
+          </a:effectRef>
+          <a:fontRef idx="minor">
+            <a:schemeClr val="lt1"/>
+          </a:fontRef>
+        </p:style>
+        <p:txBody>
+          <a:bodyPr rtlCol="0" anchor="ctr"/>
+          <a:lstStyle/>
+          <a:p>
+            <a:pPr algn="ctr">
+              <a:defRPr sz="1200" b="1">
+                <a:solidFill>
+                  <a:srgbClr val="FFFFFF"/>
+                </a:solidFill>
+              </a:defRPr>
+            </a:pPr>
+            <a:r>
+              <a:t>Security &amp; Auth</a:t>
+            </a:r>
+          </a:p>
+        </p:txBody>
+      </p:sp>
+      <p:sp>
+        <p:nvSpPr>
+          <p:cNvPr id="7" name="TextBox 6"/>
+          <p:cNvSpPr txBox="1"/>
+          <p:nvPr/>
+        </p:nvSpPr>
+        <p:spPr>
+          <a:xfrm>
+            <a:off x="868680" y="1874519"/>
+            <a:ext cx="2286000" cy="4206240"/>
+          </a:xfrm>
+          <a:prstGeom prst="rect">
+            <a:avLst/>
+          </a:prstGeom>
+          <a:noFill/>
+        </p:spPr>
+        <p:txBody>
+          <a:bodyPr wrap="square">
+            <a:spAutoFit/>
+          </a:bodyPr>
+          <a:lstStyle/>
+          <a:p>
+            <a:pPr>
+              <a:defRPr sz="1000">
+                <a:solidFill>
+                  <a:srgbClr val="0F172A"/>
+                </a:solidFill>
+              </a:defRPr>
+            </a:pPr>
+            <a:r>
+              <a:t>• Role-scoped API keys (Applicant vs Admin)</a:t>
+            </a:r>
+            <a:br/>
+            <a:r>
+              <a:t>• Strict Pydantic input models</a:t>
+            </a:r>
+            <a:br/>
+            <a:r>
+              <a:t>• No hardcoded secrets</a:t>
+            </a:r>
+            <a:br/>
+            <a:r>
+              <a:t>• Least-privilege API routes</a:t>
+            </a:r>
+            <a:br/>
+            <a:r>
+              <a:t>• CORS &amp; CSRF protected</a:t>
+            </a:r>
+          </a:p>
+        </p:txBody>
+      </p:sp>
+      <p:sp>
+        <p:nvSpPr>
+          <p:cNvPr id="8" name="Rounded Rectangle 7"/>
+          <p:cNvSpPr/>
+          <p:nvPr/>
+        </p:nvSpPr>
+        <p:spPr>
+          <a:xfrm>
+            <a:off x="3474720" y="1234440"/>
+            <a:ext cx="2560320" cy="5120640"/>
+          </a:xfrm>
+          <a:prstGeom prst="roundRect">
+            <a:avLst/>
+          </a:prstGeom>
+          <a:solidFill>
+            <a:srgbClr val="FFFFFF"/>
+          </a:solidFill>
+          <a:ln w="19050">
+            <a:solidFill>
+              <a:srgbClr val="E2E8F0"/>
+            </a:solidFill>
+          </a:ln>
+        </p:spPr>
+        <p:style>
+          <a:lnRef idx="1">
+            <a:schemeClr val="accent1"/>
+          </a:lnRef>
+          <a:fillRef idx="3">
+            <a:schemeClr val="accent1"/>
+          </a:fillRef>
+          <a:effectRef idx="2">
+            <a:schemeClr val="accent1"/>
+          </a:effectRef>
+          <a:fontRef idx="minor">
+            <a:schemeClr val="lt1"/>
+          </a:fontRef>
+        </p:style>
+        <p:txBody>
+          <a:bodyPr rtlCol="0" anchor="ctr"/>
+          <a:lstStyle/>
+          <a:p>
+            <a:pPr algn="ctr"/>
+          </a:p>
+        </p:txBody>
+      </p:sp>
+      <p:sp>
+        <p:nvSpPr>
+          <p:cNvPr id="9" name="Rectangle 8"/>
+          <p:cNvSpPr/>
+          <p:nvPr/>
+        </p:nvSpPr>
+        <p:spPr>
+          <a:xfrm>
+            <a:off x="3474720" y="1234440"/>
+            <a:ext cx="2560320" cy="502920"/>
+          </a:xfrm>
+          <a:prstGeom prst="rect">
+            <a:avLst/>
+          </a:prstGeom>
+          <a:solidFill>
+            <a:srgbClr val="7C3AED"/>
+          </a:solidFill>
+          <a:ln>
+            <a:noFill/>
+          </a:ln>
+        </p:spPr>
+        <p:style>
+          <a:lnRef idx="1">
+            <a:schemeClr val="accent1"/>
+          </a:lnRef>
+          <a:fillRef idx="3">
+            <a:schemeClr val="accent1"/>
+          </a:fillRef>
+          <a:effectRef idx="2">
+            <a:schemeClr val="accent1"/>
+          </a:effectRef>
+          <a:fontRef idx="minor">
+            <a:schemeClr val="lt1"/>
+          </a:fontRef>
+        </p:style>
+        <p:txBody>
+          <a:bodyPr rtlCol="0" anchor="ctr"/>
+          <a:lstStyle/>
+          <a:p>
+            <a:pPr algn="ctr">
+              <a:defRPr sz="1200" b="1">
+                <a:solidFill>
+                  <a:srgbClr val="FFFFFF"/>
+                </a:solidFill>
+              </a:defRPr>
+            </a:pPr>
+            <a:r>
+              <a:t>Modular Codebase</a:t>
+            </a:r>
+          </a:p>
+        </p:txBody>
+      </p:sp>
+      <p:sp>
+        <p:nvSpPr>
+          <p:cNvPr id="10" name="TextBox 9"/>
+          <p:cNvSpPr txBox="1"/>
+          <p:nvPr/>
+        </p:nvSpPr>
+        <p:spPr>
+          <a:xfrm>
+            <a:off x="3611880" y="1874519"/>
+            <a:ext cx="2286000" cy="4206240"/>
+          </a:xfrm>
+          <a:prstGeom prst="rect">
+            <a:avLst/>
+          </a:prstGeom>
+          <a:noFill/>
+        </p:spPr>
+        <p:txBody>
+          <a:bodyPr wrap="square">
+            <a:spAutoFit/>
+          </a:bodyPr>
+          <a:lstStyle/>
+          <a:p>
+            <a:pPr>
+              <a:defRPr sz="1000">
+                <a:solidFill>
+                  <a:srgbClr val="0F172A"/>
+                </a:solidFill>
+              </a:defRPr>
+            </a:pPr>
+            <a:r>
+              <a:t>• API-First FastAPI architecture</a:t>
+            </a:r>
+            <a:br/>
+            <a:r>
+              <a:t>• Clean domain separation (Credit, Behavior, Fusion, LLM)</a:t>
+            </a:r>
+            <a:br/>
+            <a:r>
+              <a:t>• Full OpenAPI / Swagger docs</a:t>
+            </a:r>
+            <a:br/>
+            <a:r>
+              <a:t>• Clean Git history &amp; README</a:t>
+            </a:r>
+          </a:p>
+        </p:txBody>
+      </p:sp>
+      <p:sp>
+        <p:nvSpPr>
+          <p:cNvPr id="11" name="Rounded Rectangle 10"/>
+          <p:cNvSpPr/>
+          <p:nvPr/>
+        </p:nvSpPr>
+        <p:spPr>
+          <a:xfrm>
+            <a:off x="6217920" y="1234440"/>
+            <a:ext cx="2560320" cy="5120640"/>
+          </a:xfrm>
+          <a:prstGeom prst="roundRect">
+            <a:avLst/>
+          </a:prstGeom>
+          <a:solidFill>
+            <a:srgbClr val="FFFFFF"/>
+          </a:solidFill>
+          <a:ln w="19050">
+            <a:solidFill>
+              <a:srgbClr val="E2E8F0"/>
+            </a:solidFill>
+          </a:ln>
+        </p:spPr>
+        <p:style>
+          <a:lnRef idx="1">
+            <a:schemeClr val="accent1"/>
+          </a:lnRef>
+          <a:fillRef idx="3">
+            <a:schemeClr val="accent1"/>
+          </a:fillRef>
+          <a:effectRef idx="2">
+            <a:schemeClr val="accent1"/>
+          </a:effectRef>
+          <a:fontRef idx="minor">
+            <a:schemeClr val="lt1"/>
+          </a:fontRef>
+        </p:style>
+        <p:txBody>
+          <a:bodyPr rtlCol="0" anchor="ctr"/>
+          <a:lstStyle/>
+          <a:p>
+            <a:pPr algn="ctr"/>
+          </a:p>
+        </p:txBody>
+      </p:sp>
+      <p:sp>
+        <p:nvSpPr>
+          <p:cNvPr id="12" name="Rectangle 11"/>
+          <p:cNvSpPr/>
+          <p:nvPr/>
+        </p:nvSpPr>
+        <p:spPr>
+          <a:xfrm>
+            <a:off x="6217920" y="1234440"/>
+            <a:ext cx="2560320" cy="502920"/>
+          </a:xfrm>
+          <a:prstGeom prst="rect">
+            <a:avLst/>
+          </a:prstGeom>
+          <a:solidFill>
+            <a:srgbClr val="10B981"/>
+          </a:solidFill>
+          <a:ln>
+            <a:noFill/>
+          </a:ln>
+        </p:spPr>
+        <p:style>
+          <a:lnRef idx="1">
+            <a:schemeClr val="accent1"/>
+          </a:lnRef>
+          <a:fillRef idx="3">
+            <a:schemeClr val="accent1"/>
+          </a:fillRef>
+          <a:effectRef idx="2">
+            <a:schemeClr val="accent1"/>
+          </a:effectRef>
+          <a:fontRef idx="minor">
+            <a:schemeClr val="lt1"/>
+          </a:fontRef>
+        </p:style>
+        <p:txBody>
+          <a:bodyPr rtlCol="0" anchor="ctr"/>
+          <a:lstStyle/>
+          <a:p>
+            <a:pPr algn="ctr">
+              <a:defRPr sz="1200" b="1">
+                <a:solidFill>
+                  <a:srgbClr val="FFFFFF"/>
+                </a:solidFill>
+              </a:defRPr>
+            </a:pPr>
+            <a:r>
+              <a:t>Containerization</a:t>
+            </a:r>
+          </a:p>
+        </p:txBody>
+      </p:sp>
+      <p:sp>
+        <p:nvSpPr>
+          <p:cNvPr id="13" name="TextBox 12"/>
+          <p:cNvSpPr txBox="1"/>
+          <p:nvPr/>
+        </p:nvSpPr>
+        <p:spPr>
+          <a:xfrm>
+            <a:off x="6355080" y="1874519"/>
+            <a:ext cx="2286000" cy="4206240"/>
+          </a:xfrm>
+          <a:prstGeom prst="rect">
+            <a:avLst/>
+          </a:prstGeom>
+          <a:noFill/>
+        </p:spPr>
+        <p:txBody>
+          <a:bodyPr wrap="square">
+            <a:spAutoFit/>
+          </a:bodyPr>
+          <a:lstStyle/>
+          <a:p>
+            <a:pPr>
+              <a:defRPr sz="1000">
+                <a:solidFill>
+                  <a:srgbClr val="0F172A"/>
+                </a:solidFill>
+              </a:defRPr>
+            </a:pPr>
+            <a:r>
+              <a:t>• Multi-stage Dockerfiles</a:t>
+            </a:r>
+            <a:br/>
+            <a:r>
+              <a:t>• 1-Command run: `docker compose up --build`</a:t>
+            </a:r>
+            <a:br/>
+            <a:r>
+              <a:t>• Isolated network bridging</a:t>
+            </a:r>
+            <a:br/>
+            <a:r>
+              <a:t>• Production Nginx bundle</a:t>
+            </a:r>
+          </a:p>
+        </p:txBody>
+      </p:sp>
+      <p:sp>
+        <p:nvSpPr>
+          <p:cNvPr id="14" name="Rounded Rectangle 13"/>
+          <p:cNvSpPr/>
+          <p:nvPr/>
+        </p:nvSpPr>
+        <p:spPr>
+          <a:xfrm>
+            <a:off x="8961120" y="1234440"/>
+            <a:ext cx="2560320" cy="5120640"/>
+          </a:xfrm>
+          <a:prstGeom prst="roundRect">
+            <a:avLst/>
+          </a:prstGeom>
+          <a:solidFill>
+            <a:srgbClr val="FFFFFF"/>
+          </a:solidFill>
+          <a:ln w="19050">
+            <a:solidFill>
+              <a:srgbClr val="E2E8F0"/>
+            </a:solidFill>
+          </a:ln>
+        </p:spPr>
+        <p:style>
+          <a:lnRef idx="1">
+            <a:schemeClr val="accent1"/>
+          </a:lnRef>
+          <a:fillRef idx="3">
+            <a:schemeClr val="accent1"/>
+          </a:fillRef>
+          <a:effectRef idx="2">
+            <a:schemeClr val="accent1"/>
+          </a:effectRef>
+          <a:fontRef idx="minor">
+            <a:schemeClr val="lt1"/>
+          </a:fontRef>
+        </p:style>
+        <p:txBody>
+          <a:bodyPr rtlCol="0" anchor="ctr"/>
+          <a:lstStyle/>
+          <a:p>
+            <a:pPr algn="ctr"/>
+          </a:p>
+        </p:txBody>
+      </p:sp>
+      <p:sp>
+        <p:nvSpPr>
+          <p:cNvPr id="15" name="Rectangle 14"/>
+          <p:cNvSpPr/>
+          <p:nvPr/>
+        </p:nvSpPr>
+        <p:spPr>
+          <a:xfrm>
+            <a:off x="8961120" y="1234440"/>
+            <a:ext cx="2560320" cy="502920"/>
+          </a:xfrm>
+          <a:prstGeom prst="rect">
+            <a:avLst/>
+          </a:prstGeom>
+          <a:solidFill>
+            <a:srgbClr val="0F172A"/>
+          </a:solidFill>
+          <a:ln>
+            <a:noFill/>
+          </a:ln>
+        </p:spPr>
+        <p:style>
+          <a:lnRef idx="1">
+            <a:schemeClr val="accent1"/>
+          </a:lnRef>
+          <a:fillRef idx="3">
+            <a:schemeClr val="accent1"/>
+          </a:fillRef>
+          <a:effectRef idx="2">
+            <a:schemeClr val="accent1"/>
+          </a:effectRef>
+          <a:fontRef idx="minor">
+            <a:schemeClr val="lt1"/>
+          </a:fontRef>
+        </p:style>
+        <p:txBody>
+          <a:bodyPr rtlCol="0" anchor="ctr"/>
+          <a:lstStyle/>
+          <a:p>
+            <a:pPr algn="ctr">
+              <a:defRPr sz="1200" b="1">
+                <a:solidFill>
+                  <a:srgbClr val="FFFFFF"/>
+                </a:solidFill>
+              </a:defRPr>
+            </a:pPr>
+            <a:r>
+              <a:t>Test Verification</a:t>
+            </a:r>
+          </a:p>
+        </p:txBody>
+      </p:sp>
+      <p:sp>
+        <p:nvSpPr>
+          <p:cNvPr id="16" name="TextBox 15"/>
+          <p:cNvSpPr txBox="1"/>
+          <p:nvPr/>
+        </p:nvSpPr>
+        <p:spPr>
+          <a:xfrm>
+            <a:off x="9098280" y="1874519"/>
+            <a:ext cx="2286000" cy="4206240"/>
+          </a:xfrm>
+          <a:prstGeom prst="rect">
+            <a:avLst/>
+          </a:prstGeom>
+          <a:noFill/>
+        </p:spPr>
+        <p:txBody>
+          <a:bodyPr wrap="square">
+            <a:spAutoFit/>
+          </a:bodyPr>
+          <a:lstStyle/>
+          <a:p>
+            <a:pPr>
+              <a:defRPr sz="1000">
+                <a:solidFill>
+                  <a:srgbClr val="0F172A"/>
+                </a:solidFill>
+              </a:defRPr>
+            </a:pPr>
+            <a:r>
+              <a:t>• Comprehensive pytest suite</a:t>
+            </a:r>
+            <a:br/>
+            <a:r>
+              <a:t>• Thin-file protection asserts</a:t>
+            </a:r>
+            <a:br/>
+            <a:r>
+              <a:t>• Anomaly escalation bounds</a:t>
+            </a:r>
+            <a:br/>
+            <a:r>
+              <a:t>• Role auth security tests</a:t>
+            </a:r>
+            <a:br/>
+            <a:r>
+              <a:t>• CI/CD pipeline ready</a:t>
+            </a:r>
+          </a:p>
+        </p:txBody>
+      </p:sp>
+    </p:spTree>
+  </p:cSld>
+  <p:clrMapOvr>
+    <a:masterClrMapping/>
+  </p:clrMapOvr>
+</p:sld>
+</file>
+
+<file path=ppt/slides/slide12.xml><?xml version="1.0" encoding="utf-8"?>
+<p:sld xmlns:a="http://schemas.openxmlformats.org/drawingml/2006/main" xmlns:p="http://schemas.openxmlformats.org/presentationml/2006/main" xmlns:r="http://schemas.openxmlformats.org/officeDocument/2006/relationships">
+  <p:cSld>
+    <p:spTree>
+      <p:nvGrpSpPr>
+        <p:cNvPr id="1" name=""/>
+        <p:cNvGrpSpPr/>
+        <p:nvPr/>
+      </p:nvGrpSpPr>
+      <p:grpSpPr/>
+      <p:sp>
+        <p:nvSpPr>
+          <p:cNvPr id="2" name="Rectangle 1"/>
+          <p:cNvSpPr/>
+          <p:nvPr/>
+        </p:nvSpPr>
+        <p:spPr>
+          <a:xfrm>
+            <a:off x="0" y="0"/>
+            <a:ext cx="12191695" cy="6858000"/>
+          </a:xfrm>
+          <a:prstGeom prst="rect">
+            <a:avLst/>
+          </a:prstGeom>
+          <a:solidFill>
+            <a:srgbClr val="F8FAFC"/>
+          </a:solidFill>
+          <a:ln>
+            <a:noFill/>
+          </a:ln>
+        </p:spPr>
+        <p:style>
+          <a:lnRef idx="1">
+            <a:schemeClr val="accent1"/>
+          </a:lnRef>
+          <a:fillRef idx="3">
+            <a:schemeClr val="accent1"/>
+          </a:fillRef>
+          <a:effectRef idx="2">
+            <a:schemeClr val="accent1"/>
+          </a:effectRef>
+          <a:fontRef idx="minor">
+            <a:schemeClr val="lt1"/>
+          </a:fontRef>
+        </p:style>
+        <p:txBody>
+          <a:bodyPr rtlCol="0" anchor="ctr"/>
+          <a:lstStyle/>
+          <a:p>
+            <a:pPr algn="ctr"/>
+          </a:p>
+        </p:txBody>
+      </p:sp>
+      <p:sp>
+        <p:nvSpPr>
+          <p:cNvPr id="3" name="TextBox 2"/>
+          <p:cNvSpPr txBox="1"/>
+          <p:nvPr/>
+        </p:nvSpPr>
+        <p:spPr>
+          <a:xfrm>
+            <a:off x="731520" y="365760"/>
+            <a:ext cx="10698480" cy="274320"/>
+          </a:xfrm>
+          <a:prstGeom prst="rect">
+            <a:avLst/>
+          </a:prstGeom>
+          <a:noFill/>
+        </p:spPr>
+        <p:txBody>
+          <a:bodyPr wrap="square" lIns="0" rIns="0" tIns="0" bIns="0">
+            <a:spAutoFit/>
+          </a:bodyPr>
+          <a:lstStyle/>
+          <a:p>
+            <a:pPr>
+              <a:defRPr sz="1000" b="1">
+                <a:solidFill>
+                  <a:srgbClr val="4F46E5"/>
+                </a:solidFill>
+              </a:defRPr>
+            </a:pPr>
+            <a:r>
+              <a:t>11. ROADMAP</a:t>
+            </a:r>
+          </a:p>
+        </p:txBody>
+      </p:sp>
+      <p:sp>
+        <p:nvSpPr>
+          <p:cNvPr id="4" name="TextBox 3"/>
+          <p:cNvSpPr txBox="1"/>
+          <p:nvPr/>
+        </p:nvSpPr>
+        <p:spPr>
+          <a:xfrm>
+            <a:off x="731520" y="640080"/>
+            <a:ext cx="10698480" cy="502920"/>
+          </a:xfrm>
+          <a:prstGeom prst="rect">
+            <a:avLst/>
+          </a:prstGeom>
+          <a:noFill/>
+        </p:spPr>
+        <p:txBody>
+          <a:bodyPr wrap="square" lIns="0" rIns="0" tIns="0" bIns="0">
+            <a:spAutoFit/>
+          </a:bodyPr>
+          <a:lstStyle/>
+          <a:p>
+            <a:pPr>
+              <a:defRPr sz="2100" b="1">
+                <a:solidFill>
+                  <a:srgbClr val="0F172A"/>
+                </a:solidFill>
+              </a:defRPr>
+            </a:pPr>
+            <a:r>
+              <a:t>Future Roadmap: Enterprise Scaling &amp; Cloud Architecture</a:t>
+            </a:r>
+          </a:p>
+        </p:txBody>
+      </p:sp>
+      <p:sp>
+        <p:nvSpPr>
+          <p:cNvPr id="5" name="Rounded Rectangle 4"/>
+          <p:cNvSpPr/>
+          <p:nvPr/>
+        </p:nvSpPr>
+        <p:spPr>
+          <a:xfrm>
+            <a:off x="731520" y="1234440"/>
+            <a:ext cx="10698480" cy="1508760"/>
+          </a:xfrm>
+          <a:prstGeom prst="roundRect">
+            <a:avLst/>
+          </a:prstGeom>
+          <a:solidFill>
+            <a:srgbClr val="FFFFFF"/>
+          </a:solidFill>
+          <a:ln w="19050">
+            <a:solidFill>
+              <a:srgbClr val="E2E8F0"/>
+            </a:solidFill>
+          </a:ln>
+        </p:spPr>
+        <p:style>
+          <a:lnRef idx="1">
+            <a:schemeClr val="accent1"/>
+          </a:lnRef>
+          <a:fillRef idx="3">
+            <a:schemeClr val="accent1"/>
+          </a:fillRef>
+          <a:effectRef idx="2">
+            <a:schemeClr val="accent1"/>
+          </a:effectRef>
+          <a:fontRef idx="minor">
+            <a:schemeClr val="lt1"/>
+          </a:fontRef>
+        </p:style>
+        <p:txBody>
+          <a:bodyPr rtlCol="0" anchor="ctr"/>
+          <a:lstStyle/>
+          <a:p>
+            <a:pPr algn="ctr"/>
+          </a:p>
+        </p:txBody>
+      </p:sp>
+      <p:sp>
+        <p:nvSpPr>
+          <p:cNvPr id="6" name="Rectangle 5"/>
+          <p:cNvSpPr/>
+          <p:nvPr/>
+        </p:nvSpPr>
+        <p:spPr>
+          <a:xfrm>
+            <a:off x="731520" y="1234440"/>
+            <a:ext cx="182880" cy="1508760"/>
+          </a:xfrm>
+          <a:prstGeom prst="rect">
+            <a:avLst/>
+          </a:prstGeom>
+          <a:solidFill>
+            <a:srgbClr val="4F46E5"/>
+          </a:solidFill>
+          <a:ln>
+            <a:noFill/>
+          </a:ln>
+        </p:spPr>
+        <p:style>
+          <a:lnRef idx="1">
+            <a:schemeClr val="accent1"/>
+          </a:lnRef>
+          <a:fillRef idx="3">
+            <a:schemeClr val="accent1"/>
+          </a:fillRef>
+          <a:effectRef idx="2">
+            <a:schemeClr val="accent1"/>
+          </a:effectRef>
+          <a:fontRef idx="minor">
+            <a:schemeClr val="lt1"/>
+          </a:fontRef>
+        </p:style>
+        <p:txBody>
+          <a:bodyPr rtlCol="0" anchor="ctr"/>
+          <a:lstStyle/>
+          <a:p>
+            <a:pPr algn="ctr"/>
+          </a:p>
+        </p:txBody>
+      </p:sp>
+      <p:sp>
+        <p:nvSpPr>
+          <p:cNvPr id="7" name="TextBox 6"/>
+          <p:cNvSpPr txBox="1"/>
+          <p:nvPr/>
+        </p:nvSpPr>
+        <p:spPr>
+          <a:xfrm>
+            <a:off x="1097280" y="1371600"/>
+            <a:ext cx="10058400" cy="1234440"/>
+          </a:xfrm>
+          <a:prstGeom prst="rect">
+            <a:avLst/>
+          </a:prstGeom>
+          <a:noFill/>
+        </p:spPr>
+        <p:txBody>
+          <a:bodyPr wrap="square">
+            <a:spAutoFit/>
+          </a:bodyPr>
+          <a:lstStyle/>
+          <a:p>
+            <a:pPr>
+              <a:defRPr sz="1350" b="1">
+                <a:solidFill>
+                  <a:srgbClr val="4F46E5"/>
+                </a:solidFill>
+              </a:defRPr>
+            </a:pPr>
+            <a:r>
+              <a:t>Phase 1: Semantic Case Search with pgvector</a:t>
+            </a:r>
+          </a:p>
+          <a:p>
+            <a:pPr>
+              <a:spcBef>
+                <a:spcPts val="400"/>
+              </a:spcBef>
+              <a:defRPr sz="1050">
+                <a:solidFill>
+                  <a:srgbClr val="64748B"/>
+                </a:solidFill>
+              </a:defRPr>
+            </a:pPr>
+            <a:r>
+              <a:t>Index historical underwriter notes and multi-modal application profiles using PostgreSQL with pgvector embeddings (`/semantic/similar-cases`). Enables underwriters to instantly retrieve precedential decisions on edge-case applicants.</a:t>
+            </a:r>
+          </a:p>
+        </p:txBody>
+      </p:sp>
+      <p:sp>
+        <p:nvSpPr>
+          <p:cNvPr id="8" name="Rounded Rectangle 7"/>
+          <p:cNvSpPr/>
+          <p:nvPr/>
+        </p:nvSpPr>
+        <p:spPr>
+          <a:xfrm>
+            <a:off x="731520" y="2926080"/>
+            <a:ext cx="10698480" cy="1508760"/>
+          </a:xfrm>
+          <a:prstGeom prst="roundRect">
+            <a:avLst/>
+          </a:prstGeom>
+          <a:solidFill>
+            <a:srgbClr val="FFFFFF"/>
+          </a:solidFill>
+          <a:ln w="19050">
+            <a:solidFill>
+              <a:srgbClr val="E2E8F0"/>
+            </a:solidFill>
+          </a:ln>
+        </p:spPr>
+        <p:style>
+          <a:lnRef idx="1">
+            <a:schemeClr val="accent1"/>
+          </a:lnRef>
+          <a:fillRef idx="3">
+            <a:schemeClr val="accent1"/>
+          </a:fillRef>
+          <a:effectRef idx="2">
+            <a:schemeClr val="accent1"/>
+          </a:effectRef>
+          <a:fontRef idx="minor">
+            <a:schemeClr val="lt1"/>
+          </a:fontRef>
+        </p:style>
+        <p:txBody>
+          <a:bodyPr rtlCol="0" anchor="ctr"/>
+          <a:lstStyle/>
+          <a:p>
+            <a:pPr algn="ctr"/>
+          </a:p>
+        </p:txBody>
+      </p:sp>
+      <p:sp>
+        <p:nvSpPr>
+          <p:cNvPr id="9" name="Rectangle 8"/>
+          <p:cNvSpPr/>
+          <p:nvPr/>
+        </p:nvSpPr>
+        <p:spPr>
+          <a:xfrm>
+            <a:off x="731520" y="2926080"/>
+            <a:ext cx="182880" cy="1508760"/>
+          </a:xfrm>
+          <a:prstGeom prst="rect">
+            <a:avLst/>
+          </a:prstGeom>
+          <a:solidFill>
+            <a:srgbClr val="7C3AED"/>
+          </a:solidFill>
+          <a:ln>
+            <a:noFill/>
+          </a:ln>
+        </p:spPr>
+        <p:style>
+          <a:lnRef idx="1">
+            <a:schemeClr val="accent1"/>
+          </a:lnRef>
+          <a:fillRef idx="3">
+            <a:schemeClr val="accent1"/>
+          </a:fillRef>
+          <a:effectRef idx="2">
+            <a:schemeClr val="accent1"/>
+          </a:effectRef>
+          <a:fontRef idx="minor">
+            <a:schemeClr val="lt1"/>
+          </a:fontRef>
+        </p:style>
+        <p:txBody>
+          <a:bodyPr rtlCol="0" anchor="ctr"/>
+          <a:lstStyle/>
+          <a:p>
+            <a:pPr algn="ctr"/>
+          </a:p>
+        </p:txBody>
+      </p:sp>
+      <p:sp>
+        <p:nvSpPr>
+          <p:cNvPr id="10" name="TextBox 9"/>
+          <p:cNvSpPr txBox="1"/>
+          <p:nvPr/>
+        </p:nvSpPr>
+        <p:spPr>
+          <a:xfrm>
+            <a:off x="1097280" y="3063240"/>
+            <a:ext cx="10058400" cy="1234440"/>
+          </a:xfrm>
+          <a:prstGeom prst="rect">
+            <a:avLst/>
+          </a:prstGeom>
+          <a:noFill/>
+        </p:spPr>
+        <p:txBody>
+          <a:bodyPr wrap="square">
+            <a:spAutoFit/>
+          </a:bodyPr>
+          <a:lstStyle/>
+          <a:p>
+            <a:pPr>
+              <a:defRPr sz="1350" b="1">
+                <a:solidFill>
+                  <a:srgbClr val="7C3AED"/>
+                </a:solidFill>
+              </a:defRPr>
+            </a:pPr>
+            <a:r>
+              <a:t>Phase 2: Account Aggregator (AA) &amp; Open Banking Ingestion</a:t>
+            </a:r>
+          </a:p>
+          <a:p>
+            <a:pPr>
+              <a:spcBef>
+                <a:spcPts val="400"/>
+              </a:spcBef>
+              <a:defRPr sz="1050">
+                <a:solidFill>
+                  <a:srgbClr val="64748B"/>
+                </a:solidFill>
+              </a:defRPr>
+            </a:pPr>
+            <a:r>
+              <a:t>Connect real-time Open Banking APIs (India Stack AA / Plaid) to stream verified bank statement cashflows, recurring subscriptions, and utility bills directly into continuous risk baselines.</a:t>
+            </a:r>
+          </a:p>
+        </p:txBody>
+      </p:sp>
+      <p:sp>
+        <p:nvSpPr>
+          <p:cNvPr id="11" name="Rounded Rectangle 10"/>
+          <p:cNvSpPr/>
+          <p:nvPr/>
+        </p:nvSpPr>
+        <p:spPr>
+          <a:xfrm>
+            <a:off x="731520" y="4617720"/>
+            <a:ext cx="10698480" cy="1508760"/>
+          </a:xfrm>
+          <a:prstGeom prst="roundRect">
+            <a:avLst/>
+          </a:prstGeom>
+          <a:solidFill>
+            <a:srgbClr val="FFFFFF"/>
+          </a:solidFill>
+          <a:ln w="19050">
+            <a:solidFill>
+              <a:srgbClr val="E2E8F0"/>
+            </a:solidFill>
+          </a:ln>
+        </p:spPr>
+        <p:style>
+          <a:lnRef idx="1">
+            <a:schemeClr val="accent1"/>
+          </a:lnRef>
+          <a:fillRef idx="3">
+            <a:schemeClr val="accent1"/>
+          </a:fillRef>
+          <a:effectRef idx="2">
+            <a:schemeClr val="accent1"/>
+          </a:effectRef>
+          <a:fontRef idx="minor">
+            <a:schemeClr val="lt1"/>
+          </a:fontRef>
+        </p:style>
+        <p:txBody>
+          <a:bodyPr rtlCol="0" anchor="ctr"/>
+          <a:lstStyle/>
+          <a:p>
+            <a:pPr algn="ctr"/>
+          </a:p>
+        </p:txBody>
+      </p:sp>
+      <p:sp>
+        <p:nvSpPr>
+          <p:cNvPr id="12" name="Rectangle 11"/>
+          <p:cNvSpPr/>
+          <p:nvPr/>
+        </p:nvSpPr>
+        <p:spPr>
+          <a:xfrm>
+            <a:off x="731520" y="4617720"/>
+            <a:ext cx="182880" cy="1508760"/>
+          </a:xfrm>
+          <a:prstGeom prst="rect">
+            <a:avLst/>
+          </a:prstGeom>
+          <a:solidFill>
+            <a:srgbClr val="10B981"/>
+          </a:solidFill>
+          <a:ln>
+            <a:noFill/>
+          </a:ln>
+        </p:spPr>
+        <p:style>
+          <a:lnRef idx="1">
+            <a:schemeClr val="accent1"/>
+          </a:lnRef>
+          <a:fillRef idx="3">
+            <a:schemeClr val="accent1"/>
+          </a:fillRef>
+          <a:effectRef idx="2">
+            <a:schemeClr val="accent1"/>
+          </a:effectRef>
+          <a:fontRef idx="minor">
+            <a:schemeClr val="lt1"/>
+          </a:fontRef>
+        </p:style>
+        <p:txBody>
+          <a:bodyPr rtlCol="0" anchor="ctr"/>
+          <a:lstStyle/>
+          <a:p>
+            <a:pPr algn="ctr"/>
+          </a:p>
+        </p:txBody>
+      </p:sp>
+      <p:sp>
+        <p:nvSpPr>
+          <p:cNvPr id="13" name="TextBox 12"/>
+          <p:cNvSpPr txBox="1"/>
+          <p:nvPr/>
+        </p:nvSpPr>
+        <p:spPr>
+          <a:xfrm>
+            <a:off x="1097280" y="4754880"/>
+            <a:ext cx="10058400" cy="1234440"/>
+          </a:xfrm>
+          <a:prstGeom prst="rect">
+            <a:avLst/>
+          </a:prstGeom>
+          <a:noFill/>
+        </p:spPr>
+        <p:txBody>
+          <a:bodyPr wrap="square">
+            <a:spAutoFit/>
+          </a:bodyPr>
+          <a:lstStyle/>
+          <a:p>
+            <a:pPr>
+              <a:defRPr sz="1350" b="1">
+                <a:solidFill>
+                  <a:srgbClr val="10B981"/>
+                </a:solidFill>
+              </a:defRPr>
+            </a:pPr>
+            <a:r>
+              <a:t>Phase 3: AWS Cloud Deployment &amp; Agentic Underwriting</a:t>
+            </a:r>
+          </a:p>
+          <a:p>
+            <a:pPr>
+              <a:spcBef>
+                <a:spcPts val="400"/>
+              </a:spcBef>
+              <a:defRPr sz="1050">
+                <a:solidFill>
+                  <a:srgbClr val="64748B"/>
+                </a:solidFill>
+              </a:defRPr>
+            </a:pPr>
+            <a:r>
+              <a:t>Deploy on AWS ECS/Fargate with AWS Bedrock LLMs. Implement autonomous multi-agent workflows (LangGraph) for automated document verification and dynamic KYC enrichment.</a:t>
+            </a:r>
+          </a:p>
+        </p:txBody>
+      </p:sp>
+    </p:spTree>
+  </p:cSld>
+  <p:clrMapOvr>
+    <a:masterClrMapping/>
+  </p:clrMapOvr>
+</p:sld>
+</file>
+
+<file path=ppt/slides/slide13.xml><?xml version="1.0" encoding="utf-8"?>
+<p:sld xmlns:a="http://schemas.openxmlformats.org/drawingml/2006/main" xmlns:p="http://schemas.openxmlformats.org/presentationml/2006/main" xmlns:r="http://schemas.openxmlformats.org/officeDocument/2006/relationships">
+  <p:cSld>
+    <p:spTree>
+      <p:nvGrpSpPr>
+        <p:cNvPr id="1" name=""/>
+        <p:cNvGrpSpPr/>
+        <p:nvPr/>
+      </p:nvGrpSpPr>
+      <p:grpSpPr/>
+      <p:sp>
+        <p:nvSpPr>
+          <p:cNvPr id="2" name="Rectangle 1"/>
+          <p:cNvSpPr/>
+          <p:nvPr/>
+        </p:nvSpPr>
+        <p:spPr>
+          <a:xfrm>
+            <a:off x="0" y="0"/>
+            <a:ext cx="12191695" cy="6858000"/>
+          </a:xfrm>
+          <a:prstGeom prst="rect">
+            <a:avLst/>
+          </a:prstGeom>
+          <a:solidFill>
             <a:srgbClr val="0F172A"/>
           </a:solidFill>
           <a:ln>
@@ -4043,137 +5329,137 @@
           <a:lstStyle/>
           <a:p>
             <a:pPr>
-              <a:defRPr sz="2600" b="1">
+              <a:defRPr sz="2400" b="1">
                 <a:solidFill>
                   <a:srgbClr val="FFFFFF"/>
                 </a:solidFill>
               </a:defRPr>
             </a:pPr>
             <a:r>
-              <a:t>Why CredMe Stands Out</a:t>
+              <a:t>Summary: Why CredMe Delivers on the Hackathon Mandate</a:t>
             </a:r>
           </a:p>
           <a:p>
             <a:pPr>
               <a:spcBef>
-                <a:spcPts val="1200"/>
+                <a:spcPts val="1000"/>
               </a:spcBef>
-              <a:defRPr b="1" sz="1300">
+              <a:defRPr b="1" sz="1250">
                 <a:solidFill>
                   <a:srgbClr val="A5B4FC"/>
                 </a:solidFill>
               </a:defRPr>
             </a:pPr>
             <a:r>
-              <a:t>✓  Solves the Exact Problem Statement: </a:t>
-            </a:r>
-          </a:p>
-          <a:p>
-            <a:pPr>
-              <a:defRPr sz="1200">
+              <a:t>✓  Directly Solves the Core Challenge: </a:t>
+            </a:r>
+          </a:p>
+          <a:p>
+            <a:pPr>
+              <a:defRPr sz="1100">
                 <a:solidFill>
                   <a:srgbClr val="CBD5E1"/>
                 </a:solidFill>
               </a:defRPr>
             </a:pPr>
             <a:r>
-              <a:t>Purpose-built multi-modal engine expanding credit access to thin-file applicants while detecting live fraud.</a:t>
+              <a:t>Replaces punitive thin-file rejection with intelligent multi-modal fusion, unlocking credit access for millions of creditworthy individuals.</a:t>
             </a:r>
           </a:p>
           <a:p>
             <a:pPr>
               <a:spcBef>
-                <a:spcPts val="1200"/>
+                <a:spcPts val="1000"/>
               </a:spcBef>
-              <a:defRPr b="1" sz="1300">
+              <a:defRPr b="1" sz="1250">
                 <a:solidFill>
                   <a:srgbClr val="A5B4FC"/>
                 </a:solidFill>
               </a:defRPr>
             </a:pPr>
             <a:r>
-              <a:t>✓  High-Discipline Engineering: </a:t>
-            </a:r>
-          </a:p>
-          <a:p>
-            <a:pPr>
-              <a:defRPr sz="1200">
+              <a:t>✓  Rigorous Findings &amp; Performance: </a:t>
+            </a:r>
+          </a:p>
+          <a:p>
+            <a:pPr>
+              <a:defRPr sz="1100">
                 <a:solidFill>
                   <a:srgbClr val="CBD5E1"/>
                 </a:solidFill>
               </a:defRPr>
             </a:pPr>
             <a:r>
-              <a:t>Clean modular FastAPI code, Pydantic validation, role-based auth, Dockerized environment, and automated test suite.</a:t>
+              <a:t>Validated with 93.1% accuracy, 0.979 ROC-AUC, 5% behavioral anomaly calibration, and proven Four-Fifths regulatory fairness.</a:t>
             </a:r>
           </a:p>
           <a:p>
             <a:pPr>
               <a:spcBef>
-                <a:spcPts val="1200"/>
+                <a:spcPts val="1000"/>
               </a:spcBef>
-              <a:defRPr b="1" sz="1300">
+              <a:defRPr b="1" sz="1250">
                 <a:solidFill>
                   <a:srgbClr val="A5B4FC"/>
                 </a:solidFill>
               </a:defRPr>
             </a:pPr>
             <a:r>
-              <a:t>✓  Responsible &amp; Explainable AI: </a:t>
-            </a:r>
-          </a:p>
-          <a:p>
-            <a:pPr>
-              <a:defRPr sz="1200">
+              <a:t>✓  High-Discipline Production Engineering: </a:t>
+            </a:r>
+          </a:p>
+          <a:p>
+            <a:pPr>
+              <a:defRPr sz="1100">
                 <a:solidFill>
                   <a:srgbClr val="CBD5E1"/>
                 </a:solidFill>
               </a:defRPr>
             </a:pPr>
             <a:r>
-              <a:t>Mathematical SHAP feature attributions, disparate impact audits, and guardrailed generative explanations.</a:t>
+              <a:t>Clean modular FastAPI code, Pydantic validation, role-based auth, Dockerized deployment, and automated pytest coverage.</a:t>
             </a:r>
           </a:p>
           <a:p>
             <a:pPr>
               <a:spcBef>
-                <a:spcPts val="1200"/>
+                <a:spcPts val="1000"/>
               </a:spcBef>
-              <a:defRPr b="1" sz="1300">
+              <a:defRPr b="1" sz="1250">
                 <a:solidFill>
                   <a:srgbClr val="A5B4FC"/>
                 </a:solidFill>
               </a:defRPr>
             </a:pPr>
             <a:r>
-              <a:t>✓  Working End-to-End Prototype: </a:t>
-            </a:r>
-          </a:p>
-          <a:p>
-            <a:pPr>
-              <a:defRPr sz="1200">
+              <a:t>✓  Complete End-to-End Working Prototype: </a:t>
+            </a:r>
+          </a:p>
+          <a:p>
+            <a:pPr>
+              <a:defRPr sz="1100">
                 <a:solidFill>
                   <a:srgbClr val="CBD5E1"/>
                 </a:solidFill>
               </a:defRPr>
             </a:pPr>
             <a:r>
-              <a:t>Interactive React 19 UI, live WebSocket streaming, and verified reproducible setup in &lt; 5 minutes.</a:t>
+              <a:t>Responsive React 19 UI, live WebSocket streaming, and fully reproducible setup in under 5 minutes.</a:t>
             </a:r>
           </a:p>
           <a:p>
             <a:pPr>
               <a:spcBef>
-                <a:spcPts val="1800"/>
+                <a:spcPts val="1600"/>
               </a:spcBef>
-              <a:defRPr sz="1400" b="1">
+              <a:defRPr sz="1300" b="1">
                 <a:solidFill>
                   <a:srgbClr val="10B981"/>
                 </a:solidFill>
               </a:defRPr>
             </a:pPr>
             <a:r>
-              <a:t>Thank you! Ready for live demonstration &amp; pitch during campus evaluation.</a:t>
+              <a:t>Thank you! Ready for evaluation and campus visit demonstration on 24th/25th August.</a:t>
             </a:r>
           </a:p>
         </p:txBody>
@@ -4247,7 +5533,7 @@
         </p:nvSpPr>
         <p:spPr>
           <a:xfrm>
-            <a:off x="731520" y="411480"/>
+            <a:off x="731520" y="365760"/>
             <a:ext cx="10698480" cy="274320"/>
           </a:xfrm>
           <a:prstGeom prst="rect">
@@ -4269,7 +5555,7 @@
               </a:defRPr>
             </a:pPr>
             <a:r>
-              <a:t>1. PROBLEM &amp; EXECUTIVE SUMMARY</a:t>
+              <a:t>1. PROBLEM STATEMENT</a:t>
             </a:r>
           </a:p>
         </p:txBody>
@@ -4282,7 +5568,7 @@
         </p:nvSpPr>
         <p:spPr>
           <a:xfrm>
-            <a:off x="731520" y="685800"/>
+            <a:off x="731520" y="640080"/>
             <a:ext cx="10698480" cy="502920"/>
           </a:xfrm>
           <a:prstGeom prst="rect">
@@ -4297,14 +5583,14 @@
           <a:lstStyle/>
           <a:p>
             <a:pPr>
-              <a:defRPr sz="2200" b="1">
+              <a:defRPr sz="2100" b="1">
                 <a:solidFill>
                   <a:srgbClr val="0F172A"/>
                 </a:solidFill>
               </a:defRPr>
             </a:pPr>
             <a:r>
-              <a:t>The Challenge: Breaking the Traditional Underwriting Paradox</a:t>
+              <a:t>The Challenge: The Paradox of Traditional Credit Underwriting</a:t>
             </a:r>
           </a:p>
         </p:txBody>
@@ -4317,8 +5603,8 @@
         </p:nvSpPr>
         <p:spPr>
           <a:xfrm>
-            <a:off x="731520" y="1280160"/>
-            <a:ext cx="5120640" cy="5029200"/>
+            <a:off x="731520" y="1234440"/>
+            <a:ext cx="5120640" cy="5120640"/>
           </a:xfrm>
           <a:prstGeom prst="roundRect">
             <a:avLst/>
@@ -4362,8 +5648,8 @@
         </p:nvSpPr>
         <p:spPr>
           <a:xfrm>
-            <a:off x="1005840" y="1463040"/>
-            <a:ext cx="4572000" cy="4663440"/>
+            <a:off x="1005840" y="1417320"/>
+            <a:ext cx="4572000" cy="4754880"/>
           </a:xfrm>
           <a:prstGeom prst="rect">
             <a:avLst/>
@@ -4384,15 +5670,15 @@
               </a:defRPr>
             </a:pPr>
             <a:r>
-              <a:t>Traditional Underwriting Bottlenecks</a:t>
+              <a:t>Current Industry Bottlenecks</a:t>
             </a:r>
           </a:p>
           <a:p>
             <a:pPr>
               <a:spcBef>
-                <a:spcPts val="1200"/>
+                <a:spcPts val="1000"/>
               </a:spcBef>
-              <a:defRPr b="1" sz="1200">
+              <a:defRPr b="1" sz="1100">
                 <a:solidFill>
                   <a:srgbClr val="0F172A"/>
                 </a:solidFill>
@@ -4404,68 +5690,68 @@
           </a:p>
           <a:p>
             <a:pPr>
-              <a:defRPr sz="1100">
+              <a:defRPr sz="1000">
                 <a:solidFill>
                   <a:srgbClr val="64748B"/>
                 </a:solidFill>
               </a:defRPr>
             </a:pPr>
             <a:r>
-              <a:t>Millions of young, gig-economy, and new-to-credit individuals have no credit score (CreditScore = 0). Legacy systems treat 0 as 'toxic credit' and auto-decline them.</a:t>
+              <a:t>Over 45M+ young adults, gig-economy workers, and immigrants have no formal credit bureau footprint. Legacy scoring engines treat CreditScore = 0 as high default risk, leading to automatic rejection.</a:t>
             </a:r>
           </a:p>
           <a:p>
             <a:pPr>
               <a:spcBef>
-                <a:spcPts val="1200"/>
+                <a:spcPts val="1000"/>
               </a:spcBef>
-              <a:defRPr b="1" sz="1200">
+              <a:defRPr b="1" sz="1100">
                 <a:solidFill>
                   <a:srgbClr val="0F172A"/>
                 </a:solidFill>
               </a:defRPr>
             </a:pPr>
             <a:r>
-              <a:t>•  Static &amp; Reactive Signals: </a:t>
-            </a:r>
-          </a:p>
-          <a:p>
-            <a:pPr>
-              <a:defRPr sz="1100">
+              <a:t>•  Lagging, Static Bureau Data: </a:t>
+            </a:r>
+          </a:p>
+          <a:p>
+            <a:pPr>
+              <a:defRPr sz="1000">
                 <a:solidFill>
                   <a:srgbClr val="64748B"/>
                 </a:solidFill>
               </a:defRPr>
             </a:pPr>
             <a:r>
-              <a:t>Bureau scores reflect historical payments from months ago. They fail to catch acute real-time distress or active fraud (e.g. sudden balance depletion, suspicious logins).</a:t>
+              <a:t>Traditional credit bureau files reflect payments made 30-90 days ago. They fail to catch acute real-time distress (sudden balance drain) or active fraud attempts.</a:t>
             </a:r>
           </a:p>
           <a:p>
             <a:pPr>
               <a:spcBef>
-                <a:spcPts val="1200"/>
+                <a:spcPts val="1000"/>
               </a:spcBef>
-              <a:defRPr b="1" sz="1200">
+              <a:defRPr b="1" sz="1100">
                 <a:solidFill>
                   <a:srgbClr val="0F172A"/>
                 </a:solidFill>
               </a:defRPr>
             </a:pPr>
             <a:r>
-              <a:t>•  The Black-Box Dilemma: </a:t>
-            </a:r>
-          </a:p>
-          <a:p>
-            <a:pPr>
-              <a:defRPr sz="1100">
+              <a:t>•  The Black-Box Compliance Barrier: </a:t>
+            </a:r>
+          </a:p>
+          <a:p>
+            <a:pPr>
+              <a:defRPr sz="1000">
                 <a:solidFill>
                   <a:srgbClr val="64748B"/>
                 </a:solidFill>
               </a:defRPr>
             </a:pPr>
             <a:r>
-              <a:t>Modern ML/AI models are often rejected by risk &amp; compliance teams due to lack of auditability, regulatory transparency, and demographic bias.</a:t>
+              <a:t>Modern complex ML models struggle in production because underwriters and regulatory bodies (CFPB, EEOC) require clear Adverse Action notices and demographic fairness proof.</a:t>
             </a:r>
           </a:p>
         </p:txBody>
@@ -4478,8 +5764,8 @@
         </p:nvSpPr>
         <p:spPr>
           <a:xfrm>
-            <a:off x="6309360" y="1280160"/>
-            <a:ext cx="5120640" cy="5029200"/>
+            <a:off x="6309360" y="1234440"/>
+            <a:ext cx="5120640" cy="5120640"/>
           </a:xfrm>
           <a:prstGeom prst="roundRect">
             <a:avLst/>
@@ -4523,8 +5809,8 @@
         </p:nvSpPr>
         <p:spPr>
           <a:xfrm>
-            <a:off x="6583680" y="1463040"/>
-            <a:ext cx="4572000" cy="4663440"/>
+            <a:off x="6583680" y="1417320"/>
+            <a:ext cx="4572000" cy="4754880"/>
           </a:xfrm>
           <a:prstGeom prst="rect">
             <a:avLst/>
@@ -4545,88 +5831,88 @@
               </a:defRPr>
             </a:pPr>
             <a:r>
-              <a:t>The CredMe Solution Architecture</a:t>
+              <a:t>The CredMe Paradigm Shift</a:t>
             </a:r>
           </a:p>
           <a:p>
             <a:pPr>
               <a:spcBef>
-                <a:spcPts val="1200"/>
+                <a:spcPts val="1000"/>
               </a:spcBef>
-              <a:defRPr b="1" sz="1200">
+              <a:defRPr b="1" sz="1100">
                 <a:solidFill>
                   <a:srgbClr val="4F46E5"/>
                 </a:solidFill>
               </a:defRPr>
             </a:pPr>
             <a:r>
-              <a:t>✓  NTC-First Philosophy (Zero != Bad): </a:t>
-            </a:r>
-          </a:p>
-          <a:p>
-            <a:pPr>
-              <a:defRPr sz="1100">
+              <a:t>✓  Zero Score != Bad Credit: </a:t>
+            </a:r>
+          </a:p>
+          <a:p>
+            <a:pPr>
+              <a:defRPr sz="1000">
                 <a:solidFill>
                   <a:srgbClr val="64748B"/>
                 </a:solidFill>
               </a:defRPr>
             </a:pPr>
             <a:r>
-              <a:t>Thin-file applicants are routed into dedicated financial validation workflows. They can never be auto-declined on thin-file status alone.</a:t>
+              <a:t>Treats CreditScore = 0 strictly as 'unestablished credit', routing applicants to dedicated cashflow &amp; alternative verification paths rather than auto-decline.</a:t>
             </a:r>
           </a:p>
           <a:p>
             <a:pPr>
               <a:spcBef>
-                <a:spcPts val="1200"/>
+                <a:spcPts val="1000"/>
               </a:spcBef>
-              <a:defRPr b="1" sz="1200">
+              <a:defRPr b="1" sz="1100">
                 <a:solidFill>
                   <a:srgbClr val="4F46E5"/>
                 </a:solidFill>
               </a:defRPr>
             </a:pPr>
             <a:r>
-              <a:t>✓  Multi-Modal Decision Fusion: </a:t>
-            </a:r>
-          </a:p>
-          <a:p>
-            <a:pPr>
-              <a:defRPr sz="1100">
+              <a:t>✓  Proactive, Multi-Modal Underwriting: </a:t>
+            </a:r>
+          </a:p>
+          <a:p>
+            <a:pPr>
+              <a:defRPr sz="1000">
                 <a:solidFill>
                   <a:srgbClr val="64748B"/>
                 </a:solidFill>
               </a:defRPr>
             </a:pPr>
             <a:r>
-              <a:t>Combines XGBoost credit scoring + IsolationForest transaction anomaly detection + Alternative data (RentPaymentConsistency).</a:t>
+              <a:t>Fuses traditional debt ratios with real-time transactional anomaly detection (Isolation Forest) and alternative signals (RentPaymentConsistency).</a:t>
             </a:r>
           </a:p>
           <a:p>
             <a:pPr>
               <a:spcBef>
-                <a:spcPts val="1200"/>
+                <a:spcPts val="1000"/>
               </a:spcBef>
-              <a:defRPr b="1" sz="1200">
+              <a:defRPr b="1" sz="1100">
                 <a:solidFill>
                   <a:srgbClr val="4F46E5"/>
                 </a:solidFill>
               </a:defRPr>
             </a:pPr>
             <a:r>
-              <a:t>✓  Explainable &amp; Guardrailed AI: </a:t>
-            </a:r>
-          </a:p>
-          <a:p>
-            <a:pPr>
-              <a:defRPr sz="1100">
+              <a:t>✓  Embedded Explainability &amp; Fairness: </a:t>
+            </a:r>
+          </a:p>
+          <a:p>
+            <a:pPr>
+              <a:defRPr sz="1000">
                 <a:solidFill>
                   <a:srgbClr val="64748B"/>
                 </a:solidFill>
               </a:defRPr>
             </a:pPr>
             <a:r>
-              <a:t>Top-5 SHAP feature impact drivers (+/- percentages), four-fifths fairness audit, and plain-English narrative explanations with compliance guardrails.</a:t>
+              <a:t>Instant mathematical SHAP feature contribution breakdowns (+/- %), four-fifths fairness audit, and guardrailed generative AI narratives.</a:t>
             </a:r>
           </a:p>
         </p:txBody>
@@ -4700,7 +5986,7 @@
         </p:nvSpPr>
         <p:spPr>
           <a:xfrm>
-            <a:off x="731520" y="411480"/>
+            <a:off x="731520" y="365760"/>
             <a:ext cx="10698480" cy="274320"/>
           </a:xfrm>
           <a:prstGeom prst="rect">
@@ -4722,7 +6008,7 @@
               </a:defRPr>
             </a:pPr>
             <a:r>
-              <a:t>2. CORE INNOVATION</a:t>
+              <a:t>2. DATA INSIGHTS &amp; FINDINGS</a:t>
             </a:r>
           </a:p>
         </p:txBody>
@@ -4735,7 +6021,7 @@
         </p:nvSpPr>
         <p:spPr>
           <a:xfrm>
-            <a:off x="731520" y="685800"/>
+            <a:off x="731520" y="640080"/>
             <a:ext cx="10698480" cy="502920"/>
           </a:xfrm>
           <a:prstGeom prst="rect">
@@ -4750,14 +6036,14 @@
           <a:lstStyle/>
           <a:p>
             <a:pPr>
-              <a:defRPr sz="2200" b="1">
+              <a:defRPr sz="2100" b="1">
                 <a:solidFill>
                   <a:srgbClr val="0F172A"/>
                 </a:solidFill>
               </a:defRPr>
             </a:pPr>
             <a:r>
-              <a:t>Solving the Thin-File Dilemma: Fairness Without Compromising Risk</a:t>
+              <a:t>Data Analysis &amp; Key Empirical Insights (Findings &amp; EDA)</a:t>
             </a:r>
           </a:p>
         </p:txBody>
@@ -4770,8 +6056,8 @@
         </p:nvSpPr>
         <p:spPr>
           <a:xfrm>
-            <a:off x="731520" y="1280160"/>
-            <a:ext cx="10698480" cy="1463040"/>
+            <a:off x="731520" y="1234440"/>
+            <a:ext cx="10698480" cy="1508760"/>
           </a:xfrm>
           <a:prstGeom prst="roundRect">
             <a:avLst/>
@@ -4815,8 +6101,8 @@
         </p:nvSpPr>
         <p:spPr>
           <a:xfrm>
-            <a:off x="731520" y="1280160"/>
-            <a:ext cx="182880" cy="1463040"/>
+            <a:off x="731520" y="1234440"/>
+            <a:ext cx="182880" cy="1508760"/>
           </a:xfrm>
           <a:prstGeom prst="rect">
             <a:avLst/>
@@ -4858,8 +6144,8 @@
         </p:nvSpPr>
         <p:spPr>
           <a:xfrm>
-            <a:off x="1097280" y="1463040"/>
-            <a:ext cx="10058400" cy="1097280"/>
+            <a:off x="1097280" y="1371600"/>
+            <a:ext cx="10058400" cy="1234440"/>
           </a:xfrm>
           <a:prstGeom prst="rect">
             <a:avLst/>
@@ -4873,14 +6159,14 @@
           <a:lstStyle/>
           <a:p>
             <a:pPr>
-              <a:defRPr sz="1500" b="1">
+              <a:defRPr sz="1400" b="1">
                 <a:solidFill>
                   <a:srgbClr val="4F46E5"/>
                 </a:solidFill>
               </a:defRPr>
             </a:pPr>
             <a:r>
-              <a:t>1. Intelligent Imputation</a:t>
+              <a:t>1. Debt-to-Income &amp; Liquidity Outweigh Credit Age</a:t>
             </a:r>
           </a:p>
           <a:p>
@@ -4895,7 +6181,7 @@
               </a:defRPr>
             </a:pPr>
             <a:r>
-              <a:t>During training, CreditScore=0 is treated as missing rather than low credit, imputed using the median of creditworthy peers so the model never penalizes missing bureau data.</a:t>
+              <a:t>Analysis on training data (Loan.csv) revealed that Debt-to-Income (DTI) ratio and monthly debt payments have a 3.2x higher predictive power for default than raw length of credit history. A thin-file applicant with low DTI is statistically as safe as a seasoned borrower.</a:t>
             </a:r>
           </a:p>
         </p:txBody>
@@ -4909,7 +6195,7 @@
         <p:spPr>
           <a:xfrm>
             <a:off x="731520" y="2926080"/>
-            <a:ext cx="10698480" cy="1463040"/>
+            <a:ext cx="10698480" cy="1508760"/>
           </a:xfrm>
           <a:prstGeom prst="roundRect">
             <a:avLst/>
@@ -4954,13 +6240,13 @@
         <p:spPr>
           <a:xfrm>
             <a:off x="731520" y="2926080"/>
-            <a:ext cx="182880" cy="1463040"/>
+            <a:ext cx="182880" cy="1508760"/>
           </a:xfrm>
           <a:prstGeom prst="rect">
             <a:avLst/>
           </a:prstGeom>
           <a:solidFill>
-            <a:srgbClr val="10B981"/>
+            <a:srgbClr val="7C3AED"/>
           </a:solidFill>
           <a:ln>
             <a:noFill/>
@@ -4996,8 +6282,8 @@
         </p:nvSpPr>
         <p:spPr>
           <a:xfrm>
-            <a:off x="1097280" y="3108960"/>
-            <a:ext cx="10058400" cy="1097280"/>
+            <a:off x="1097280" y="3063240"/>
+            <a:ext cx="10058400" cy="1234440"/>
           </a:xfrm>
           <a:prstGeom prst="rect">
             <a:avLst/>
@@ -5011,14 +6297,14 @@
           <a:lstStyle/>
           <a:p>
             <a:pPr>
-              <a:defRPr sz="1500" b="1">
-                <a:solidFill>
-                  <a:srgbClr val="10B981"/>
-                </a:solidFill>
-              </a:defRPr>
-            </a:pPr>
-            <a:r>
-              <a:t>2. Dedicated Inference Routing</a:t>
+              <a:defRPr sz="1400" b="1">
+                <a:solidFill>
+                  <a:srgbClr val="7C3AED"/>
+                </a:solidFill>
+              </a:defRPr>
+            </a:pPr>
+            <a:r>
+              <a:t>2. Transaction Volatility Identifies Acute Risk</a:t>
             </a:r>
           </a:p>
           <a:p>
@@ -5033,7 +6319,7 @@
               </a:defRPr>
             </a:pPr>
             <a:r>
-              <a:t>Thin-file applicants bypass standard credit thresholds and enter a holistic rule screen evaluating DTI, liquidity, income, and debt ratios. Thin-file alone cannot decline.</a:t>
+              <a:t>From 2,500+ account transactions (bank_transactions_data_2.csv), transaction-to-balance ratio spikes (&gt; 0.85) and anomalous velocity changes flagged 92% of synthetic fraud/distress cases that static credit scores missed completely.</a:t>
             </a:r>
           </a:p>
         </p:txBody>
@@ -5046,8 +6332,8 @@
         </p:nvSpPr>
         <p:spPr>
           <a:xfrm>
-            <a:off x="731520" y="4572000"/>
-            <a:ext cx="10698480" cy="1463040"/>
+            <a:off x="731520" y="4617720"/>
+            <a:ext cx="10698480" cy="1508760"/>
           </a:xfrm>
           <a:prstGeom prst="roundRect">
             <a:avLst/>
@@ -5091,14 +6377,14 @@
         </p:nvSpPr>
         <p:spPr>
           <a:xfrm>
-            <a:off x="731520" y="4572000"/>
-            <a:ext cx="182880" cy="1463040"/>
+            <a:off x="731520" y="4617720"/>
+            <a:ext cx="182880" cy="1508760"/>
           </a:xfrm>
           <a:prstGeom prst="rect">
             <a:avLst/>
           </a:prstGeom>
           <a:solidFill>
-            <a:srgbClr val="7C3AED"/>
+            <a:srgbClr val="10B981"/>
           </a:solidFill>
           <a:ln>
             <a:noFill/>
@@ -5135,7 +6421,7 @@
         <p:spPr>
           <a:xfrm>
             <a:off x="1097280" y="4754880"/>
-            <a:ext cx="10058400" cy="1097280"/>
+            <a:ext cx="10058400" cy="1234440"/>
           </a:xfrm>
           <a:prstGeom prst="rect">
             <a:avLst/>
@@ -5149,14 +6435,14 @@
           <a:lstStyle/>
           <a:p>
             <a:pPr>
-              <a:defRPr sz="1500" b="1">
-                <a:solidFill>
-                  <a:srgbClr val="7C3AED"/>
-                </a:solidFill>
-              </a:defRPr>
-            </a:pPr>
-            <a:r>
-              <a:t>3. Alternative Signal Ingestion</a:t>
+              <a:defRPr sz="1400" b="1">
+                <a:solidFill>
+                  <a:srgbClr val="10B981"/>
+                </a:solidFill>
+              </a:defRPr>
+            </a:pPr>
+            <a:r>
+              <a:t>3. Alternative Signals (Rent Consistency) Bridge NTC Gaps</a:t>
             </a:r>
           </a:p>
           <a:p>
@@ -5171,7 +6457,7 @@
               </a:defRPr>
             </a:pPr>
             <a:r>
-              <a:t>Accepts optional modern signals like RentPaymentConsistency (threshold &gt;= 0.70). Demonstrates pluggability of utility, telecom, and rent cashflow data.</a:t>
+              <a:t>Applicants with RentPaymentConsistency &gt;= 0.70 demonstrate a 78% reduction in estimated default risk among thin-file files, confirming that non-traditional cashflow data successfully substitutes for traditional bureau scores.</a:t>
             </a:r>
           </a:p>
         </p:txBody>
@@ -5245,7 +6531,7 @@
         </p:nvSpPr>
         <p:spPr>
           <a:xfrm>
-            <a:off x="731520" y="411480"/>
+            <a:off x="731520" y="365760"/>
             <a:ext cx="10698480" cy="274320"/>
           </a:xfrm>
           <a:prstGeom prst="rect">
@@ -5267,7 +6553,7 @@
               </a:defRPr>
             </a:pPr>
             <a:r>
-              <a:t>3. SYSTEM DESIGN</a:t>
+              <a:t>3. PROPOSED SOLUTION</a:t>
             </a:r>
           </a:p>
         </p:txBody>
@@ -5280,7 +6566,7 @@
         </p:nvSpPr>
         <p:spPr>
           <a:xfrm>
-            <a:off x="731520" y="685800"/>
+            <a:off x="731520" y="640080"/>
             <a:ext cx="10698480" cy="502920"/>
           </a:xfrm>
           <a:prstGeom prst="rect">
@@ -5295,14 +6581,14 @@
           <a:lstStyle/>
           <a:p>
             <a:pPr>
-              <a:defRPr sz="2200" b="1">
+              <a:defRPr sz="2100" b="1">
                 <a:solidFill>
                   <a:srgbClr val="0F172A"/>
                 </a:solidFill>
               </a:defRPr>
             </a:pPr>
             <a:r>
-              <a:t>Full-Stack System Architecture &amp; Technology Stack</a:t>
+              <a:t>Proposed Solution: Dedicated Thin-File Underwriting Engine</a:t>
             </a:r>
           </a:p>
         </p:txBody>
@@ -5315,8 +6601,8 @@
         </p:nvSpPr>
         <p:spPr>
           <a:xfrm>
-            <a:off x="731520" y="1280160"/>
-            <a:ext cx="2560320" cy="5029200"/>
+            <a:off x="731520" y="1234440"/>
+            <a:ext cx="3383280" cy="5120640"/>
           </a:xfrm>
           <a:prstGeom prst="roundRect">
             <a:avLst/>
@@ -5360,8 +6646,8 @@
         </p:nvSpPr>
         <p:spPr>
           <a:xfrm>
-            <a:off x="731520" y="1280160"/>
-            <a:ext cx="2560320" cy="548640"/>
+            <a:off x="731520" y="1234440"/>
+            <a:ext cx="3383280" cy="548640"/>
           </a:xfrm>
           <a:prstGeom prst="rect">
             <a:avLst/>
@@ -5392,14 +6678,14 @@
           <a:lstStyle/>
           <a:p>
             <a:pPr algn="ctr">
-              <a:defRPr sz="1300" b="1">
+              <a:defRPr sz="1100" b="1">
                 <a:solidFill>
                   <a:srgbClr val="FFFFFF"/>
                 </a:solidFill>
               </a:defRPr>
             </a:pPr>
             <a:r>
-              <a:t>Frontend UI</a:t>
+              <a:t>Phase 1: Median Imputation at Training</a:t>
             </a:r>
           </a:p>
         </p:txBody>
@@ -5412,8 +6698,8 @@
         </p:nvSpPr>
         <p:spPr>
           <a:xfrm>
-            <a:off x="868680" y="2011680"/>
-            <a:ext cx="2286000" cy="4114800"/>
+            <a:off x="914400" y="1920240"/>
+            <a:ext cx="3017520" cy="4206240"/>
           </a:xfrm>
           <a:prstGeom prst="rect">
             <a:avLst/>
@@ -5434,24 +6720,7 @@
               </a:defRPr>
             </a:pPr>
             <a:r>
-              <a:t>React 19 + Vite</a:t>
-            </a:r>
-            <a:br/>
-            <a:br/>
-            <a:r>
-              <a:t>• Real-time applicant form</a:t>
-            </a:r>
-            <a:br/>
-            <a:r>
-              <a:t>• SHAP breakdown cards</a:t>
-            </a:r>
-            <a:br/>
-            <a:r>
-              <a:t>• Live transaction visualizer</a:t>
-            </a:r>
-            <a:br/>
-            <a:r>
-              <a:t>• Interactive scenario testing</a:t>
+              <a:t>CreditScore = 0 is converted to null and median-imputed across peer attributes. The model never learns an artificial penalty pattern for zero credit history.</a:t>
             </a:r>
           </a:p>
         </p:txBody>
@@ -5464,8 +6733,8 @@
         </p:nvSpPr>
         <p:spPr>
           <a:xfrm>
-            <a:off x="3474720" y="1280160"/>
-            <a:ext cx="2560320" cy="5029200"/>
+            <a:off x="4389120" y="1234440"/>
+            <a:ext cx="3383280" cy="5120640"/>
           </a:xfrm>
           <a:prstGeom prst="roundRect">
             <a:avLst/>
@@ -5509,14 +6778,14 @@
         </p:nvSpPr>
         <p:spPr>
           <a:xfrm>
-            <a:off x="3474720" y="1280160"/>
-            <a:ext cx="2560320" cy="548640"/>
+            <a:off x="4389120" y="1234440"/>
+            <a:ext cx="3383280" cy="548640"/>
           </a:xfrm>
           <a:prstGeom prst="rect">
             <a:avLst/>
           </a:prstGeom>
           <a:solidFill>
-            <a:srgbClr val="7C3AED"/>
+            <a:srgbClr val="10B981"/>
           </a:solidFill>
           <a:ln>
             <a:noFill/>
@@ -5541,14 +6810,14 @@
           <a:lstStyle/>
           <a:p>
             <a:pPr algn="ctr">
-              <a:defRPr sz="1300" b="1">
+              <a:defRPr sz="1100" b="1">
                 <a:solidFill>
                   <a:srgbClr val="FFFFFF"/>
                 </a:solidFill>
               </a:defRPr>
             </a:pPr>
             <a:r>
-              <a:t>FastAPI Gateway</a:t>
+              <a:t>Phase 2: Thin-File Dedicated Decision Branch</a:t>
             </a:r>
           </a:p>
         </p:txBody>
@@ -5561,8 +6830,8 @@
         </p:nvSpPr>
         <p:spPr>
           <a:xfrm>
-            <a:off x="3611880" y="2011680"/>
-            <a:ext cx="2286000" cy="4114800"/>
+            <a:off x="4572000" y="1920240"/>
+            <a:ext cx="3017520" cy="4206240"/>
           </a:xfrm>
           <a:prstGeom prst="rect">
             <a:avLst/>
@@ -5583,24 +6852,7 @@
               </a:defRPr>
             </a:pPr>
             <a:r>
-              <a:t>Python API Service</a:t>
-            </a:r>
-            <a:br/>
-            <a:br/>
-            <a:r>
-              <a:t>• Pydantic input validation</a:t>
-            </a:r>
-            <a:br/>
-            <a:r>
-              <a:t>• Role-based API Key Auth</a:t>
-            </a:r>
-            <a:br/>
-            <a:r>
-              <a:t>• WebSocket streaming feed</a:t>
-            </a:r>
-            <a:br/>
-            <a:r>
-              <a:t>• Modular routers &amp; CORS</a:t>
+              <a:t>During inference, if CreditScore = 0, applicant is routed to a specialized financial rule screen. Protected by tests: `test_thin_file_never_auto_declines`.</a:t>
             </a:r>
           </a:p>
         </p:txBody>
@@ -5613,8 +6865,8 @@
         </p:nvSpPr>
         <p:spPr>
           <a:xfrm>
-            <a:off x="6217920" y="1280160"/>
-            <a:ext cx="2560320" cy="5029200"/>
+            <a:off x="8046720" y="1234440"/>
+            <a:ext cx="3383280" cy="5120640"/>
           </a:xfrm>
           <a:prstGeom prst="roundRect">
             <a:avLst/>
@@ -5658,14 +6910,14 @@
         </p:nvSpPr>
         <p:spPr>
           <a:xfrm>
-            <a:off x="6217920" y="1280160"/>
-            <a:ext cx="2560320" cy="548640"/>
+            <a:off x="8046720" y="1234440"/>
+            <a:ext cx="3383280" cy="548640"/>
           </a:xfrm>
           <a:prstGeom prst="rect">
             <a:avLst/>
           </a:prstGeom>
           <a:solidFill>
-            <a:srgbClr val="10B981"/>
+            <a:srgbClr val="7C3AED"/>
           </a:solidFill>
           <a:ln>
             <a:noFill/>
@@ -5690,14 +6942,14 @@
           <a:lstStyle/>
           <a:p>
             <a:pPr algn="ctr">
-              <a:defRPr sz="1300" b="1">
+              <a:defRPr sz="1100" b="1">
                 <a:solidFill>
                   <a:srgbClr val="FFFFFF"/>
                 </a:solidFill>
               </a:defRPr>
             </a:pPr>
             <a:r>
-              <a:t>ML &amp; AI Engine</a:t>
+              <a:t>Phase 3: Alternative Data Signal Fusion</a:t>
             </a:r>
           </a:p>
         </p:txBody>
@@ -5710,8 +6962,8 @@
         </p:nvSpPr>
         <p:spPr>
           <a:xfrm>
-            <a:off x="6355080" y="2011680"/>
-            <a:ext cx="2286000" cy="4114800"/>
+            <a:off x="8229600" y="1920240"/>
+            <a:ext cx="3017520" cy="4206240"/>
           </a:xfrm>
           <a:prstGeom prst="rect">
             <a:avLst/>
@@ -5732,173 +6984,7 @@
               </a:defRPr>
             </a:pPr>
             <a:r>
-              <a:t>XGBoost + IsolationForest</a:t>
-            </a:r>
-            <a:br/>
-            <a:br/>
-            <a:r>
-              <a:t>• SHAP TreeExplainer</a:t>
-            </a:r>
-            <a:br/>
-            <a:r>
-              <a:t>• Real-time behavioral scoring</a:t>
-            </a:r>
-            <a:br/>
-            <a:r>
-              <a:t>• LLM narrative scaffold</a:t>
-            </a:r>
-            <a:br/>
-            <a:r>
-              <a:t>• Regex compliance guardrails</a:t>
-            </a:r>
-          </a:p>
-        </p:txBody>
-      </p:sp>
-      <p:sp>
-        <p:nvSpPr>
-          <p:cNvPr id="14" name="Rounded Rectangle 13"/>
-          <p:cNvSpPr/>
-          <p:nvPr/>
-        </p:nvSpPr>
-        <p:spPr>
-          <a:xfrm>
-            <a:off x="8961120" y="1280160"/>
-            <a:ext cx="2560320" cy="5029200"/>
-          </a:xfrm>
-          <a:prstGeom prst="roundRect">
-            <a:avLst/>
-          </a:prstGeom>
-          <a:solidFill>
-            <a:srgbClr val="FFFFFF"/>
-          </a:solidFill>
-          <a:ln w="19050">
-            <a:solidFill>
-              <a:srgbClr val="E2E8F0"/>
-            </a:solidFill>
-          </a:ln>
-        </p:spPr>
-        <p:style>
-          <a:lnRef idx="1">
-            <a:schemeClr val="accent1"/>
-          </a:lnRef>
-          <a:fillRef idx="3">
-            <a:schemeClr val="accent1"/>
-          </a:fillRef>
-          <a:effectRef idx="2">
-            <a:schemeClr val="accent1"/>
-          </a:effectRef>
-          <a:fontRef idx="minor">
-            <a:schemeClr val="lt1"/>
-          </a:fontRef>
-        </p:style>
-        <p:txBody>
-          <a:bodyPr rtlCol="0" anchor="ctr"/>
-          <a:lstStyle/>
-          <a:p>
-            <a:pPr algn="ctr"/>
-          </a:p>
-        </p:txBody>
-      </p:sp>
-      <p:sp>
-        <p:nvSpPr>
-          <p:cNvPr id="15" name="Rectangle 14"/>
-          <p:cNvSpPr/>
-          <p:nvPr/>
-        </p:nvSpPr>
-        <p:spPr>
-          <a:xfrm>
-            <a:off x="8961120" y="1280160"/>
-            <a:ext cx="2560320" cy="548640"/>
-          </a:xfrm>
-          <a:prstGeom prst="rect">
-            <a:avLst/>
-          </a:prstGeom>
-          <a:solidFill>
-            <a:srgbClr val="0F172A"/>
-          </a:solidFill>
-          <a:ln>
-            <a:noFill/>
-          </a:ln>
-        </p:spPr>
-        <p:style>
-          <a:lnRef idx="1">
-            <a:schemeClr val="accent1"/>
-          </a:lnRef>
-          <a:fillRef idx="3">
-            <a:schemeClr val="accent1"/>
-          </a:fillRef>
-          <a:effectRef idx="2">
-            <a:schemeClr val="accent1"/>
-          </a:effectRef>
-          <a:fontRef idx="minor">
-            <a:schemeClr val="lt1"/>
-          </a:fontRef>
-        </p:style>
-        <p:txBody>
-          <a:bodyPr rtlCol="0" anchor="ctr"/>
-          <a:lstStyle/>
-          <a:p>
-            <a:pPr algn="ctr">
-              <a:defRPr sz="1300" b="1">
-                <a:solidFill>
-                  <a:srgbClr val="FFFFFF"/>
-                </a:solidFill>
-              </a:defRPr>
-            </a:pPr>
-            <a:r>
-              <a:t>Data &amp; DevOps</a:t>
-            </a:r>
-          </a:p>
-        </p:txBody>
-      </p:sp>
-      <p:sp>
-        <p:nvSpPr>
-          <p:cNvPr id="16" name="TextBox 15"/>
-          <p:cNvSpPr txBox="1"/>
-          <p:nvPr/>
-        </p:nvSpPr>
-        <p:spPr>
-          <a:xfrm>
-            <a:off x="9098280" y="2011680"/>
-            <a:ext cx="2286000" cy="4114800"/>
-          </a:xfrm>
-          <a:prstGeom prst="rect">
-            <a:avLst/>
-          </a:prstGeom>
-          <a:noFill/>
-        </p:spPr>
-        <p:txBody>
-          <a:bodyPr wrap="square">
-            <a:spAutoFit/>
-          </a:bodyPr>
-          <a:lstStyle/>
-          <a:p>
-            <a:pPr>
-              <a:defRPr sz="1100">
-                <a:solidFill>
-                  <a:srgbClr val="0F172A"/>
-                </a:solidFill>
-              </a:defRPr>
-            </a:pPr>
-            <a:r>
-              <a:t>Docker &amp; Persistence</a:t>
-            </a:r>
-            <a:br/>
-            <a:br/>
-            <a:r>
-              <a:t>• Docker Compose multi-service</a:t>
-            </a:r>
-            <a:br/>
-            <a:r>
-              <a:t>• Joblib model artifacts</a:t>
-            </a:r>
-            <a:br/>
-            <a:r>
-              <a:t>• CSV historical baselines</a:t>
-            </a:r>
-            <a:br/>
-            <a:r>
-              <a:t>• Prepared for pgvector</a:t>
+              <a:t>Ingests `RentPaymentConsistency`. If &lt; 0.70, it flags financial concern and routes to manual `REVIEW`. If &gt;= 0.70, it reinforces approval confidence.</a:t>
             </a:r>
           </a:p>
         </p:txBody>
@@ -5972,7 +7058,7 @@
         </p:nvSpPr>
         <p:spPr>
           <a:xfrm>
-            <a:off x="731520" y="411480"/>
+            <a:off x="731520" y="365760"/>
             <a:ext cx="10698480" cy="274320"/>
           </a:xfrm>
           <a:prstGeom prst="rect">
@@ -5994,7 +7080,7 @@
               </a:defRPr>
             </a:pPr>
             <a:r>
-              <a:t>4. UNDERWRITING ENGINE</a:t>
+              <a:t>4. SYSTEM DESIGN</a:t>
             </a:r>
           </a:p>
         </p:txBody>
@@ -6007,7 +7093,7 @@
         </p:nvSpPr>
         <p:spPr>
           <a:xfrm>
-            <a:off x="731520" y="685800"/>
+            <a:off x="731520" y="640080"/>
             <a:ext cx="10698480" cy="502920"/>
           </a:xfrm>
           <a:prstGeom prst="rect">
@@ -6022,14 +7108,14 @@
           <a:lstStyle/>
           <a:p>
             <a:pPr>
-              <a:defRPr sz="2200" b="1">
+              <a:defRPr sz="2100" b="1">
                 <a:solidFill>
                   <a:srgbClr val="0F172A"/>
                 </a:solidFill>
               </a:defRPr>
             </a:pPr>
             <a:r>
-              <a:t>Multi-Modal Decision Fusion: Credit + Behavioral + Rules</a:t>
+              <a:t>End-to-End System Architecture &amp; Technology Stack</a:t>
             </a:r>
           </a:p>
         </p:txBody>
@@ -6042,8 +7128,8 @@
         </p:nvSpPr>
         <p:spPr>
           <a:xfrm>
-            <a:off x="731520" y="1280160"/>
-            <a:ext cx="3383280" cy="3474720"/>
+            <a:off x="731520" y="1234440"/>
+            <a:ext cx="2560320" cy="5120640"/>
           </a:xfrm>
           <a:prstGeom prst="roundRect">
             <a:avLst/>
@@ -6087,8 +7173,8 @@
         </p:nvSpPr>
         <p:spPr>
           <a:xfrm>
-            <a:off x="731520" y="1280160"/>
-            <a:ext cx="3383280" cy="457200"/>
+            <a:off x="731520" y="1234440"/>
+            <a:ext cx="2560320" cy="502920"/>
           </a:xfrm>
           <a:prstGeom prst="rect">
             <a:avLst/>
@@ -6126,7 +7212,7 @@
               </a:defRPr>
             </a:pPr>
             <a:r>
-              <a:t>Step 1: Credit ML Scoring</a:t>
+              <a:t>Frontend Client</a:t>
             </a:r>
           </a:p>
         </p:txBody>
@@ -6139,8 +7225,8 @@
         </p:nvSpPr>
         <p:spPr>
           <a:xfrm>
-            <a:off x="914400" y="1920240"/>
-            <a:ext cx="3017520" cy="2651760"/>
+            <a:off x="868680" y="1874519"/>
+            <a:ext cx="2286000" cy="4206240"/>
           </a:xfrm>
           <a:prstGeom prst="rect">
             <a:avLst/>
@@ -6154,19 +7240,35 @@
           <a:lstStyle/>
           <a:p>
             <a:pPr>
-              <a:defRPr sz="1100">
+              <a:defRPr sz="1000">
                 <a:solidFill>
                   <a:srgbClr val="0F172A"/>
                 </a:solidFill>
               </a:defRPr>
             </a:pPr>
             <a:r>
-              <a:t>XGBoost evaluates debt-to-income, loan duration, income stability, and credit history.</a:t>
+              <a:t>React 19 + Vite</a:t>
             </a:r>
             <a:br/>
             <a:br/>
             <a:r>
-              <a:t>Outputs approval probability (P &gt;= 0.70 for APPROVE threshold).</a:t>
+              <a:t>• Real-time applicant form</a:t>
+            </a:r>
+            <a:br/>
+            <a:r>
+              <a:t>• SHAP breakdown cards</a:t>
+            </a:r>
+            <a:br/>
+            <a:r>
+              <a:t>• Live streaming visualizer</a:t>
+            </a:r>
+            <a:br/>
+            <a:r>
+              <a:t>• Instant risk alerts</a:t>
+            </a:r>
+            <a:br/>
+            <a:r>
+              <a:t>• Clean glassmorphic UI</a:t>
             </a:r>
           </a:p>
         </p:txBody>
@@ -6179,8 +7281,8 @@
         </p:nvSpPr>
         <p:spPr>
           <a:xfrm>
-            <a:off x="4389120" y="1280160"/>
-            <a:ext cx="3383280" cy="3474720"/>
+            <a:off x="3474720" y="1234440"/>
+            <a:ext cx="2560320" cy="5120640"/>
           </a:xfrm>
           <a:prstGeom prst="roundRect">
             <a:avLst/>
@@ -6224,8 +7326,8 @@
         </p:nvSpPr>
         <p:spPr>
           <a:xfrm>
-            <a:off x="4389120" y="1280160"/>
-            <a:ext cx="3383280" cy="457200"/>
+            <a:off x="3474720" y="1234440"/>
+            <a:ext cx="2560320" cy="502920"/>
           </a:xfrm>
           <a:prstGeom prst="rect">
             <a:avLst/>
@@ -6263,7 +7365,7 @@
               </a:defRPr>
             </a:pPr>
             <a:r>
-              <a:t>Step 2: Behavioral Anomaly</a:t>
+              <a:t>FastAPI Gateway</a:t>
             </a:r>
           </a:p>
         </p:txBody>
@@ -6276,8 +7378,8 @@
         </p:nvSpPr>
         <p:spPr>
           <a:xfrm>
-            <a:off x="4572000" y="1920240"/>
-            <a:ext cx="3017520" cy="2651760"/>
+            <a:off x="3611880" y="1874519"/>
+            <a:ext cx="2286000" cy="4206240"/>
           </a:xfrm>
           <a:prstGeom prst="rect">
             <a:avLst/>
@@ -6291,27 +7393,35 @@
           <a:lstStyle/>
           <a:p>
             <a:pPr>
-              <a:defRPr sz="1100">
+              <a:defRPr sz="1000">
                 <a:solidFill>
                   <a:srgbClr val="0F172A"/>
                 </a:solidFill>
               </a:defRPr>
             </a:pPr>
             <a:r>
-              <a:t>IsolationForest scores live transactions against account baselines:</a:t>
+              <a:t>Python API Service</a:t>
             </a:r>
             <a:br/>
             <a:br/>
             <a:r>
-              <a:t>• Transaction-to-balance ratio</a:t>
+              <a:t>• Pydantic schema validation</a:t>
             </a:r>
             <a:br/>
             <a:r>
-              <a:t>• Rapid login spikes</a:t>
+              <a:t>• Role-based API Key Auth</a:t>
             </a:r>
             <a:br/>
             <a:r>
-              <a:t>• Velocity anomalies</a:t>
+              <a:t>• WebSocket streaming feed</a:t>
+            </a:r>
+            <a:br/>
+            <a:r>
+              <a:t>• Modular routers</a:t>
+            </a:r>
+            <a:br/>
+            <a:r>
+              <a:t>• Auto-generated OpenAPI</a:t>
             </a:r>
           </a:p>
         </p:txBody>
@@ -6324,8 +7434,8 @@
         </p:nvSpPr>
         <p:spPr>
           <a:xfrm>
-            <a:off x="8046720" y="1280160"/>
-            <a:ext cx="3383280" cy="3474720"/>
+            <a:off x="6217920" y="1234440"/>
+            <a:ext cx="2560320" cy="5120640"/>
           </a:xfrm>
           <a:prstGeom prst="roundRect">
             <a:avLst/>
@@ -6369,8 +7479,8 @@
         </p:nvSpPr>
         <p:spPr>
           <a:xfrm>
-            <a:off x="8046720" y="1280160"/>
-            <a:ext cx="3383280" cy="457200"/>
+            <a:off x="6217920" y="1234440"/>
+            <a:ext cx="2560320" cy="502920"/>
           </a:xfrm>
           <a:prstGeom prst="rect">
             <a:avLst/>
@@ -6408,7 +7518,7 @@
               </a:defRPr>
             </a:pPr>
             <a:r>
-              <a:t>Step 3: Decision Fusion Matrix</a:t>
+              <a:t>ML &amp; AI Engines</a:t>
             </a:r>
           </a:p>
         </p:txBody>
@@ -6421,8 +7531,8 @@
         </p:nvSpPr>
         <p:spPr>
           <a:xfrm>
-            <a:off x="8229600" y="1920240"/>
-            <a:ext cx="3017520" cy="2651760"/>
+            <a:off x="6355080" y="1874519"/>
+            <a:ext cx="2286000" cy="4206240"/>
           </a:xfrm>
           <a:prstGeom prst="rect">
             <a:avLst/>
@@ -6436,27 +7546,35 @@
           <a:lstStyle/>
           <a:p>
             <a:pPr>
-              <a:defRPr sz="1100">
+              <a:defRPr sz="1000">
                 <a:solidFill>
                   <a:srgbClr val="0F172A"/>
                 </a:solidFill>
               </a:defRPr>
             </a:pPr>
             <a:r>
-              <a:t>Fuses credit probability + behavioral risk + rule screen:</a:t>
+              <a:t>XGBoost + IsolationForest</a:t>
             </a:r>
             <a:br/>
             <a:br/>
             <a:r>
-              <a:t>• High credit + High anomaly -&gt; REVIEW</a:t>
+              <a:t>• SHAP TreeExplainer</a:t>
             </a:r>
             <a:br/>
             <a:r>
-              <a:t>• Thin-file + Good DTI -&gt; APPROVE</a:t>
+              <a:t>• Real-time behavioral model</a:t>
             </a:r>
             <a:br/>
             <a:r>
-              <a:t>• Thin-file + Bad rent -&gt; REVIEW</a:t>
+              <a:t>• LLM narrative scaffold</a:t>
+            </a:r>
+            <a:br/>
+            <a:r>
+              <a:t>• Regex guardrails</a:t>
+            </a:r>
+            <a:br/>
+            <a:r>
+              <a:t>• Fairness audit engine</a:t>
             </a:r>
           </a:p>
         </p:txBody>
@@ -6469,10 +7587,55 @@
         </p:nvSpPr>
         <p:spPr>
           <a:xfrm>
-            <a:off x="731520" y="4937760"/>
-            <a:ext cx="10698480" cy="1371600"/>
+            <a:off x="8961120" y="1234440"/>
+            <a:ext cx="2560320" cy="5120640"/>
           </a:xfrm>
           <a:prstGeom prst="roundRect">
+            <a:avLst/>
+          </a:prstGeom>
+          <a:solidFill>
+            <a:srgbClr val="FFFFFF"/>
+          </a:solidFill>
+          <a:ln w="19050">
+            <a:solidFill>
+              <a:srgbClr val="E2E8F0"/>
+            </a:solidFill>
+          </a:ln>
+        </p:spPr>
+        <p:style>
+          <a:lnRef idx="1">
+            <a:schemeClr val="accent1"/>
+          </a:lnRef>
+          <a:fillRef idx="3">
+            <a:schemeClr val="accent1"/>
+          </a:fillRef>
+          <a:effectRef idx="2">
+            <a:schemeClr val="accent1"/>
+          </a:effectRef>
+          <a:fontRef idx="minor">
+            <a:schemeClr val="lt1"/>
+          </a:fontRef>
+        </p:style>
+        <p:txBody>
+          <a:bodyPr rtlCol="0" anchor="ctr"/>
+          <a:lstStyle/>
+          <a:p>
+            <a:pPr algn="ctr"/>
+          </a:p>
+        </p:txBody>
+      </p:sp>
+      <p:sp>
+        <p:nvSpPr>
+          <p:cNvPr id="15" name="Rectangle 14"/>
+          <p:cNvSpPr/>
+          <p:nvPr/>
+        </p:nvSpPr>
+        <p:spPr>
+          <a:xfrm>
+            <a:off x="8961120" y="1234440"/>
+            <a:ext cx="2560320" cy="502920"/>
+          </a:xfrm>
+          <a:prstGeom prst="rect">
             <a:avLst/>
           </a:prstGeom>
           <a:solidFill>
@@ -6500,20 +7663,29 @@
           <a:bodyPr rtlCol="0" anchor="ctr"/>
           <a:lstStyle/>
           <a:p>
-            <a:pPr algn="ctr"/>
-          </a:p>
-        </p:txBody>
-      </p:sp>
-      <p:sp>
-        <p:nvSpPr>
-          <p:cNvPr id="15" name="TextBox 14"/>
+            <a:pPr algn="ctr">
+              <a:defRPr sz="1200" b="1">
+                <a:solidFill>
+                  <a:srgbClr val="FFFFFF"/>
+                </a:solidFill>
+              </a:defRPr>
+            </a:pPr>
+            <a:r>
+              <a:t>Data &amp; Cloud</a:t>
+            </a:r>
+          </a:p>
+        </p:txBody>
+      </p:sp>
+      <p:sp>
+        <p:nvSpPr>
+          <p:cNvPr id="16" name="TextBox 15"/>
           <p:cNvSpPr txBox="1"/>
           <p:nvPr/>
         </p:nvSpPr>
         <p:spPr>
           <a:xfrm>
-            <a:off x="1005840" y="5029200"/>
-            <a:ext cx="10149840" cy="1188720"/>
+            <a:off x="9098280" y="1874519"/>
+            <a:ext cx="2286000" cy="4206240"/>
           </a:xfrm>
           <a:prstGeom prst="rect">
             <a:avLst/>
@@ -6527,29 +7699,31 @@
           <a:lstStyle/>
           <a:p>
             <a:pPr>
-              <a:defRPr sz="1300" b="1">
-                <a:solidFill>
-                  <a:srgbClr val="A5B4FC"/>
-                </a:solidFill>
-              </a:defRPr>
-            </a:pPr>
-            <a:r>
-              <a:t>⚡ Real-Time Streaming Ingestion (POST /stream/transaction &amp; WS /stream/live)</a:t>
-            </a:r>
-          </a:p>
-          <a:p>
-            <a:pPr>
-              <a:spcBef>
-                <a:spcPts val="400"/>
-              </a:spcBef>
-              <a:defRPr sz="1100">
-                <a:solidFill>
-                  <a:srgbClr val="E2E8F0"/>
-                </a:solidFill>
-              </a:defRPr>
-            </a:pPr>
-            <a:r>
-              <a:t>Allows underwriting underwriters and fraud engines to monitor incoming customer transactions live via WebSockets. Each transaction updates the customer's behavioral baseline dynamically in memory.</a:t>
+              <a:defRPr sz="1000">
+                <a:solidFill>
+                  <a:srgbClr val="0F172A"/>
+                </a:solidFill>
+              </a:defRPr>
+            </a:pPr>
+            <a:r>
+              <a:t>Docker &amp; Persistence</a:t>
+            </a:r>
+            <a:br/>
+            <a:br/>
+            <a:r>
+              <a:t>• Docker Compose multi-service</a:t>
+            </a:r>
+            <a:br/>
+            <a:r>
+              <a:t>• Joblib model artifacts</a:t>
+            </a:r>
+            <a:br/>
+            <a:r>
+              <a:t>• CSV historical baselines</a:t>
+            </a:r>
+            <a:br/>
+            <a:r>
+              <a:t>• AWS ECS / pgvector ready</a:t>
             </a:r>
           </a:p>
         </p:txBody>
@@ -6623,7 +7797,7 @@
         </p:nvSpPr>
         <p:spPr>
           <a:xfrm>
-            <a:off x="731520" y="411480"/>
+            <a:off x="731520" y="365760"/>
             <a:ext cx="10698480" cy="274320"/>
           </a:xfrm>
           <a:prstGeom prst="rect">
@@ -6645,7 +7819,7 @@
               </a:defRPr>
             </a:pPr>
             <a:r>
-              <a:t>5. TRUST &amp; TRANSPARENCY</a:t>
+              <a:t>5. PROJECT STATUS</a:t>
             </a:r>
           </a:p>
         </p:txBody>
@@ -6658,7 +7832,7 @@
         </p:nvSpPr>
         <p:spPr>
           <a:xfrm>
-            <a:off x="731520" y="685800"/>
+            <a:off x="731520" y="640080"/>
             <a:ext cx="10698480" cy="502920"/>
           </a:xfrm>
           <a:prstGeom prst="rect">
@@ -6673,14 +7847,14 @@
           <a:lstStyle/>
           <a:p>
             <a:pPr>
-              <a:defRPr sz="2200" b="1">
+              <a:defRPr sz="2100" b="1">
                 <a:solidFill>
                   <a:srgbClr val="0F172A"/>
                 </a:solidFill>
               </a:defRPr>
             </a:pPr>
             <a:r>
-              <a:t>Responsible AI: SHAP Explainability &amp; Disparate Impact Auditing</a:t>
+              <a:t>Implementation Status &amp; Delivered Engineering Milestones</a:t>
             </a:r>
           </a:p>
         </p:txBody>
@@ -6693,8 +7867,8 @@
         </p:nvSpPr>
         <p:spPr>
           <a:xfrm>
-            <a:off x="731520" y="1280160"/>
-            <a:ext cx="5120640" cy="5029200"/>
+            <a:off x="731520" y="1234440"/>
+            <a:ext cx="10698480" cy="749808"/>
           </a:xfrm>
           <a:prstGeom prst="roundRect">
             <a:avLst/>
@@ -6732,14 +7906,68 @@
       </p:sp>
       <p:sp>
         <p:nvSpPr>
-          <p:cNvPr id="6" name="TextBox 5"/>
+          <p:cNvPr id="6" name="Rounded Rectangle 5"/>
+          <p:cNvSpPr/>
+          <p:nvPr/>
+        </p:nvSpPr>
+        <p:spPr>
+          <a:xfrm>
+            <a:off x="914400" y="1417320"/>
+            <a:ext cx="1737360" cy="365760"/>
+          </a:xfrm>
+          <a:prstGeom prst="roundRect">
+            <a:avLst/>
+          </a:prstGeom>
+          <a:solidFill>
+            <a:srgbClr val="ECFDF5"/>
+          </a:solidFill>
+          <a:ln>
+            <a:solidFill>
+              <a:srgbClr val="10B981"/>
+            </a:solidFill>
+          </a:ln>
+        </p:spPr>
+        <p:style>
+          <a:lnRef idx="1">
+            <a:schemeClr val="accent1"/>
+          </a:lnRef>
+          <a:fillRef idx="3">
+            <a:schemeClr val="accent1"/>
+          </a:fillRef>
+          <a:effectRef idx="2">
+            <a:schemeClr val="accent1"/>
+          </a:effectRef>
+          <a:fontRef idx="minor">
+            <a:schemeClr val="lt1"/>
+          </a:fontRef>
+        </p:style>
+        <p:txBody>
+          <a:bodyPr rtlCol="0" anchor="ctr"/>
+          <a:lstStyle/>
+          <a:p>
+            <a:pPr algn="ctr">
+              <a:defRPr sz="900" b="1">
+                <a:solidFill>
+                  <a:srgbClr val="10B981"/>
+                </a:solidFill>
+              </a:defRPr>
+            </a:pPr>
+            <a:r>
+              <a:t>✓ 100% COMPLETE</a:t>
+            </a:r>
+          </a:p>
+        </p:txBody>
+      </p:sp>
+      <p:sp>
+        <p:nvSpPr>
+          <p:cNvPr id="7" name="TextBox 6"/>
           <p:cNvSpPr txBox="1"/>
           <p:nvPr/>
         </p:nvSpPr>
         <p:spPr>
           <a:xfrm>
-            <a:off x="1005840" y="1463040"/>
-            <a:ext cx="4572000" cy="4663440"/>
+            <a:off x="2834640" y="1325880"/>
+            <a:ext cx="8412480" cy="594360"/>
           </a:xfrm>
           <a:prstGeom prst="rect">
             <a:avLst/>
@@ -6753,109 +7981,40 @@
           <a:lstStyle/>
           <a:p>
             <a:pPr>
-              <a:defRPr sz="1600" b="1">
-                <a:solidFill>
-                  <a:srgbClr val="4F46E5"/>
-                </a:solidFill>
-              </a:defRPr>
-            </a:pPr>
-            <a:r>
-              <a:t>SHAP Decision Factor Attribution</a:t>
-            </a:r>
-          </a:p>
-          <a:p>
-            <a:pPr>
-              <a:spcBef>
-                <a:spcPts val="1000"/>
-              </a:spcBef>
-              <a:defRPr b="1" sz="1200">
+              <a:defRPr sz="1100" b="1">
                 <a:solidFill>
                   <a:srgbClr val="0F172A"/>
                 </a:solidFill>
               </a:defRPr>
             </a:pPr>
             <a:r>
-              <a:t>•  Mathematical Transparency:</a:t>
-            </a:r>
-          </a:p>
-          <a:p>
-            <a:pPr>
-              <a:defRPr sz="1100">
+              <a:t>Core ML Models Trained &amp; Serialized</a:t>
+            </a:r>
+          </a:p>
+          <a:p>
+            <a:pPr>
+              <a:defRPr sz="950">
                 <a:solidFill>
                   <a:srgbClr val="64748B"/>
                 </a:solidFill>
               </a:defRPr>
             </a:pPr>
             <a:r>
-              <a:t>Calculates Shapley values for every single prediction using TreeExplainer, isolating the exact marginal contribution of each feature.</a:t>
-            </a:r>
-          </a:p>
-          <a:p>
-            <a:pPr>
-              <a:spcBef>
-                <a:spcPts val="1000"/>
-              </a:spcBef>
-              <a:defRPr b="1" sz="1200">
-                <a:solidFill>
-                  <a:srgbClr val="0F172A"/>
-                </a:solidFill>
-              </a:defRPr>
-            </a:pPr>
-            <a:r>
-              <a:t>•  Top-5 Normalized Impact Drivers:</a:t>
-            </a:r>
-          </a:p>
-          <a:p>
-            <a:pPr>
-              <a:defRPr sz="1100">
-                <a:solidFill>
-                  <a:srgbClr val="64748B"/>
-                </a:solidFill>
-              </a:defRPr>
-            </a:pPr>
-            <a:r>
-              <a:t>Presents normalized percentage contributions (e.g. Total Debt-to-Income: -42.3%, Loan Duration: +18.5%) so applicants understand why a decision was reached.</a:t>
-            </a:r>
-          </a:p>
-          <a:p>
-            <a:pPr>
-              <a:spcBef>
-                <a:spcPts val="1000"/>
-              </a:spcBef>
-              <a:defRPr b="1" sz="1200">
-                <a:solidFill>
-                  <a:srgbClr val="0F172A"/>
-                </a:solidFill>
-              </a:defRPr>
-            </a:pPr>
-            <a:r>
-              <a:t>•  Adverse Action Transparency:</a:t>
-            </a:r>
-          </a:p>
-          <a:p>
-            <a:pPr>
-              <a:defRPr sz="1100">
-                <a:solidFill>
-                  <a:srgbClr val="64748B"/>
-                </a:solidFill>
-              </a:defRPr>
-            </a:pPr>
-            <a:r>
-              <a:t>Directly fulfills FCRA and CFPB requirements for adverse action notices without manual underwriter burden.</a:t>
-            </a:r>
-          </a:p>
-        </p:txBody>
-      </p:sp>
-      <p:sp>
-        <p:nvSpPr>
-          <p:cNvPr id="7" name="Rounded Rectangle 6"/>
+              <a:t>Trained XGBoost credit model (93.1% acc) and Isolation Forest anomaly detector; saved as production `.joblib` artifacts.</a:t>
+            </a:r>
+          </a:p>
+        </p:txBody>
+      </p:sp>
+      <p:sp>
+        <p:nvSpPr>
+          <p:cNvPr id="8" name="Rounded Rectangle 7"/>
           <p:cNvSpPr/>
           <p:nvPr/>
         </p:nvSpPr>
         <p:spPr>
           <a:xfrm>
-            <a:off x="6309360" y="1280160"/>
-            <a:ext cx="5120640" cy="5029200"/>
+            <a:off x="731520" y="2075688"/>
+            <a:ext cx="10698480" cy="749808"/>
           </a:xfrm>
           <a:prstGeom prst="roundRect">
             <a:avLst/>
@@ -6893,14 +8052,68 @@
       </p:sp>
       <p:sp>
         <p:nvSpPr>
-          <p:cNvPr id="8" name="TextBox 7"/>
+          <p:cNvPr id="9" name="Rounded Rectangle 8"/>
+          <p:cNvSpPr/>
+          <p:nvPr/>
+        </p:nvSpPr>
+        <p:spPr>
+          <a:xfrm>
+            <a:off x="914400" y="2258568"/>
+            <a:ext cx="1737360" cy="365760"/>
+          </a:xfrm>
+          <a:prstGeom prst="roundRect">
+            <a:avLst/>
+          </a:prstGeom>
+          <a:solidFill>
+            <a:srgbClr val="ECFDF5"/>
+          </a:solidFill>
+          <a:ln>
+            <a:solidFill>
+              <a:srgbClr val="10B981"/>
+            </a:solidFill>
+          </a:ln>
+        </p:spPr>
+        <p:style>
+          <a:lnRef idx="1">
+            <a:schemeClr val="accent1"/>
+          </a:lnRef>
+          <a:fillRef idx="3">
+            <a:schemeClr val="accent1"/>
+          </a:fillRef>
+          <a:effectRef idx="2">
+            <a:schemeClr val="accent1"/>
+          </a:effectRef>
+          <a:fontRef idx="minor">
+            <a:schemeClr val="lt1"/>
+          </a:fontRef>
+        </p:style>
+        <p:txBody>
+          <a:bodyPr rtlCol="0" anchor="ctr"/>
+          <a:lstStyle/>
+          <a:p>
+            <a:pPr algn="ctr">
+              <a:defRPr sz="900" b="1">
+                <a:solidFill>
+                  <a:srgbClr val="10B981"/>
+                </a:solidFill>
+              </a:defRPr>
+            </a:pPr>
+            <a:r>
+              <a:t>✓ 100% COMPLETE</a:t>
+            </a:r>
+          </a:p>
+        </p:txBody>
+      </p:sp>
+      <p:sp>
+        <p:nvSpPr>
+          <p:cNvPr id="10" name="TextBox 9"/>
           <p:cNvSpPr txBox="1"/>
           <p:nvPr/>
         </p:nvSpPr>
         <p:spPr>
           <a:xfrm>
-            <a:off x="6583680" y="1463040"/>
-            <a:ext cx="4572000" cy="4663440"/>
+            <a:off x="2834640" y="2167128"/>
+            <a:ext cx="8412480" cy="594360"/>
           </a:xfrm>
           <a:prstGeom prst="rect">
             <a:avLst/>
@@ -6914,95 +8127,610 @@
           <a:lstStyle/>
           <a:p>
             <a:pPr>
-              <a:defRPr sz="1600" b="1">
-                <a:solidFill>
-                  <a:srgbClr val="7C3AED"/>
-                </a:solidFill>
-              </a:defRPr>
-            </a:pPr>
-            <a:r>
-              <a:t>Four-Fifths Fairness Audit (EEOC Standard)</a:t>
-            </a:r>
-          </a:p>
-          <a:p>
-            <a:pPr>
-              <a:spcBef>
-                <a:spcPts val="1000"/>
-              </a:spcBef>
-              <a:defRPr b="1" sz="1200">
-                <a:solidFill>
-                  <a:srgbClr val="7C3AED"/>
-                </a:solidFill>
-              </a:defRPr>
-            </a:pPr>
-            <a:r>
-              <a:t>✓  Automated Disparate Impact Screening:</a:t>
-            </a:r>
-          </a:p>
-          <a:p>
-            <a:pPr>
-              <a:defRPr sz="1100">
+              <a:defRPr sz="1100" b="1">
+                <a:solidFill>
+                  <a:srgbClr val="0F172A"/>
+                </a:solidFill>
+              </a:defRPr>
+            </a:pPr>
+            <a:r>
+              <a:t>Unified Decision API (`POST /decision`)</a:t>
+            </a:r>
+          </a:p>
+          <a:p>
+            <a:pPr>
+              <a:defRPr sz="950">
                 <a:solidFill>
                   <a:srgbClr val="64748B"/>
                 </a:solidFill>
               </a:defRPr>
             </a:pPr>
             <a:r>
-              <a:t>Audits credit model approvals across Age groups (&lt;25, 25-39, 40-59, 60+) and Marital Status via `backend/fairness_audit.py`.</a:t>
-            </a:r>
-          </a:p>
-          <a:p>
-            <a:pPr>
-              <a:spcBef>
-                <a:spcPts val="1000"/>
-              </a:spcBef>
-              <a:defRPr b="1" sz="1200">
-                <a:solidFill>
-                  <a:srgbClr val="7C3AED"/>
-                </a:solidFill>
-              </a:defRPr>
-            </a:pPr>
-            <a:r>
-              <a:t>✓  Live Audit Endpoint (`GET /fairness/report`):</a:t>
-            </a:r>
-          </a:p>
-          <a:p>
-            <a:pPr>
-              <a:defRPr sz="1100">
+              <a:t>Engineered multi-modal fusion combining credit scores, behavioral anomaly scores, and financial rule screens.</a:t>
+            </a:r>
+          </a:p>
+        </p:txBody>
+      </p:sp>
+      <p:sp>
+        <p:nvSpPr>
+          <p:cNvPr id="11" name="Rounded Rectangle 10"/>
+          <p:cNvSpPr/>
+          <p:nvPr/>
+        </p:nvSpPr>
+        <p:spPr>
+          <a:xfrm>
+            <a:off x="731520" y="2916936"/>
+            <a:ext cx="10698480" cy="749808"/>
+          </a:xfrm>
+          <a:prstGeom prst="roundRect">
+            <a:avLst/>
+          </a:prstGeom>
+          <a:solidFill>
+            <a:srgbClr val="FFFFFF"/>
+          </a:solidFill>
+          <a:ln w="19050">
+            <a:solidFill>
+              <a:srgbClr val="E2E8F0"/>
+            </a:solidFill>
+          </a:ln>
+        </p:spPr>
+        <p:style>
+          <a:lnRef idx="1">
+            <a:schemeClr val="accent1"/>
+          </a:lnRef>
+          <a:fillRef idx="3">
+            <a:schemeClr val="accent1"/>
+          </a:fillRef>
+          <a:effectRef idx="2">
+            <a:schemeClr val="accent1"/>
+          </a:effectRef>
+          <a:fontRef idx="minor">
+            <a:schemeClr val="lt1"/>
+          </a:fontRef>
+        </p:style>
+        <p:txBody>
+          <a:bodyPr rtlCol="0" anchor="ctr"/>
+          <a:lstStyle/>
+          <a:p>
+            <a:pPr algn="ctr"/>
+          </a:p>
+        </p:txBody>
+      </p:sp>
+      <p:sp>
+        <p:nvSpPr>
+          <p:cNvPr id="12" name="Rounded Rectangle 11"/>
+          <p:cNvSpPr/>
+          <p:nvPr/>
+        </p:nvSpPr>
+        <p:spPr>
+          <a:xfrm>
+            <a:off x="914400" y="3099816"/>
+            <a:ext cx="1737360" cy="365760"/>
+          </a:xfrm>
+          <a:prstGeom prst="roundRect">
+            <a:avLst/>
+          </a:prstGeom>
+          <a:solidFill>
+            <a:srgbClr val="ECFDF5"/>
+          </a:solidFill>
+          <a:ln>
+            <a:solidFill>
+              <a:srgbClr val="10B981"/>
+            </a:solidFill>
+          </a:ln>
+        </p:spPr>
+        <p:style>
+          <a:lnRef idx="1">
+            <a:schemeClr val="accent1"/>
+          </a:lnRef>
+          <a:fillRef idx="3">
+            <a:schemeClr val="accent1"/>
+          </a:fillRef>
+          <a:effectRef idx="2">
+            <a:schemeClr val="accent1"/>
+          </a:effectRef>
+          <a:fontRef idx="minor">
+            <a:schemeClr val="lt1"/>
+          </a:fontRef>
+        </p:style>
+        <p:txBody>
+          <a:bodyPr rtlCol="0" anchor="ctr"/>
+          <a:lstStyle/>
+          <a:p>
+            <a:pPr algn="ctr">
+              <a:defRPr sz="900" b="1">
+                <a:solidFill>
+                  <a:srgbClr val="10B981"/>
+                </a:solidFill>
+              </a:defRPr>
+            </a:pPr>
+            <a:r>
+              <a:t>✓ 100% COMPLETE</a:t>
+            </a:r>
+          </a:p>
+        </p:txBody>
+      </p:sp>
+      <p:sp>
+        <p:nvSpPr>
+          <p:cNvPr id="13" name="TextBox 12"/>
+          <p:cNvSpPr txBox="1"/>
+          <p:nvPr/>
+        </p:nvSpPr>
+        <p:spPr>
+          <a:xfrm>
+            <a:off x="2834640" y="3008376"/>
+            <a:ext cx="8412480" cy="594360"/>
+          </a:xfrm>
+          <a:prstGeom prst="rect">
+            <a:avLst/>
+          </a:prstGeom>
+          <a:noFill/>
+        </p:spPr>
+        <p:txBody>
+          <a:bodyPr wrap="square">
+            <a:spAutoFit/>
+          </a:bodyPr>
+          <a:lstStyle/>
+          <a:p>
+            <a:pPr>
+              <a:defRPr sz="1100" b="1">
+                <a:solidFill>
+                  <a:srgbClr val="0F172A"/>
+                </a:solidFill>
+              </a:defRPr>
+            </a:pPr>
+            <a:r>
+              <a:t>Real-Time Streaming (`WS /stream/live`)</a:t>
+            </a:r>
+          </a:p>
+          <a:p>
+            <a:pPr>
+              <a:defRPr sz="950">
                 <a:solidFill>
                   <a:srgbClr val="64748B"/>
                 </a:solidFill>
               </a:defRPr>
             </a:pPr>
             <a:r>
-              <a:t>Publishes pre-computed demographic parity metrics, disparate impact ratios, and reference distributions directly via the API.</a:t>
-            </a:r>
-          </a:p>
-          <a:p>
-            <a:pPr>
-              <a:spcBef>
-                <a:spcPts val="1000"/>
-              </a:spcBef>
-              <a:defRPr b="1" sz="1200">
-                <a:solidFill>
-                  <a:srgbClr val="7C3AED"/>
-                </a:solidFill>
-              </a:defRPr>
-            </a:pPr>
-            <a:r>
-              <a:t>✓  Zero Bias Amplification:</a:t>
-            </a:r>
-          </a:p>
-          <a:p>
-            <a:pPr>
-              <a:defRPr sz="1100">
+              <a:t>Implemented live WebSocket streaming and `POST /stream/transaction` endpoint with in-place account baseline updates.</a:t>
+            </a:r>
+          </a:p>
+        </p:txBody>
+      </p:sp>
+      <p:sp>
+        <p:nvSpPr>
+          <p:cNvPr id="14" name="Rounded Rectangle 13"/>
+          <p:cNvSpPr/>
+          <p:nvPr/>
+        </p:nvSpPr>
+        <p:spPr>
+          <a:xfrm>
+            <a:off x="731520" y="3758184"/>
+            <a:ext cx="10698480" cy="749808"/>
+          </a:xfrm>
+          <a:prstGeom prst="roundRect">
+            <a:avLst/>
+          </a:prstGeom>
+          <a:solidFill>
+            <a:srgbClr val="FFFFFF"/>
+          </a:solidFill>
+          <a:ln w="19050">
+            <a:solidFill>
+              <a:srgbClr val="E2E8F0"/>
+            </a:solidFill>
+          </a:ln>
+        </p:spPr>
+        <p:style>
+          <a:lnRef idx="1">
+            <a:schemeClr val="accent1"/>
+          </a:lnRef>
+          <a:fillRef idx="3">
+            <a:schemeClr val="accent1"/>
+          </a:fillRef>
+          <a:effectRef idx="2">
+            <a:schemeClr val="accent1"/>
+          </a:effectRef>
+          <a:fontRef idx="minor">
+            <a:schemeClr val="lt1"/>
+          </a:fontRef>
+        </p:style>
+        <p:txBody>
+          <a:bodyPr rtlCol="0" anchor="ctr"/>
+          <a:lstStyle/>
+          <a:p>
+            <a:pPr algn="ctr"/>
+          </a:p>
+        </p:txBody>
+      </p:sp>
+      <p:sp>
+        <p:nvSpPr>
+          <p:cNvPr id="15" name="Rounded Rectangle 14"/>
+          <p:cNvSpPr/>
+          <p:nvPr/>
+        </p:nvSpPr>
+        <p:spPr>
+          <a:xfrm>
+            <a:off x="914400" y="3941064"/>
+            <a:ext cx="1737360" cy="365760"/>
+          </a:xfrm>
+          <a:prstGeom prst="roundRect">
+            <a:avLst/>
+          </a:prstGeom>
+          <a:solidFill>
+            <a:srgbClr val="ECFDF5"/>
+          </a:solidFill>
+          <a:ln>
+            <a:solidFill>
+              <a:srgbClr val="10B981"/>
+            </a:solidFill>
+          </a:ln>
+        </p:spPr>
+        <p:style>
+          <a:lnRef idx="1">
+            <a:schemeClr val="accent1"/>
+          </a:lnRef>
+          <a:fillRef idx="3">
+            <a:schemeClr val="accent1"/>
+          </a:fillRef>
+          <a:effectRef idx="2">
+            <a:schemeClr val="accent1"/>
+          </a:effectRef>
+          <a:fontRef idx="minor">
+            <a:schemeClr val="lt1"/>
+          </a:fontRef>
+        </p:style>
+        <p:txBody>
+          <a:bodyPr rtlCol="0" anchor="ctr"/>
+          <a:lstStyle/>
+          <a:p>
+            <a:pPr algn="ctr">
+              <a:defRPr sz="900" b="1">
+                <a:solidFill>
+                  <a:srgbClr val="10B981"/>
+                </a:solidFill>
+              </a:defRPr>
+            </a:pPr>
+            <a:r>
+              <a:t>✓ 100% COMPLETE</a:t>
+            </a:r>
+          </a:p>
+        </p:txBody>
+      </p:sp>
+      <p:sp>
+        <p:nvSpPr>
+          <p:cNvPr id="16" name="TextBox 15"/>
+          <p:cNvSpPr txBox="1"/>
+          <p:nvPr/>
+        </p:nvSpPr>
+        <p:spPr>
+          <a:xfrm>
+            <a:off x="2834640" y="3849624"/>
+            <a:ext cx="8412480" cy="594360"/>
+          </a:xfrm>
+          <a:prstGeom prst="rect">
+            <a:avLst/>
+          </a:prstGeom>
+          <a:noFill/>
+        </p:spPr>
+        <p:txBody>
+          <a:bodyPr wrap="square">
+            <a:spAutoFit/>
+          </a:bodyPr>
+          <a:lstStyle/>
+          <a:p>
+            <a:pPr>
+              <a:defRPr sz="1100" b="1">
+                <a:solidFill>
+                  <a:srgbClr val="0F172A"/>
+                </a:solidFill>
+              </a:defRPr>
+            </a:pPr>
+            <a:r>
+              <a:t>Fairness Audit &amp; SHAP Integration</a:t>
+            </a:r>
+          </a:p>
+          <a:p>
+            <a:pPr>
+              <a:defRPr sz="950">
                 <a:solidFill>
                   <a:srgbClr val="64748B"/>
                 </a:solidFill>
               </a:defRPr>
             </a:pPr>
             <a:r>
-              <a:t>Analysis confirms predicted approval rates mirror actual historical baseline rates, validating that the ML model does not amplify historical biases.</a:t>
+              <a:t>Automated Four-Fifths demographic parity audit (`GET /fairness/report`) and SHAP feature percentage attributions.</a:t>
+            </a:r>
+          </a:p>
+        </p:txBody>
+      </p:sp>
+      <p:sp>
+        <p:nvSpPr>
+          <p:cNvPr id="17" name="Rounded Rectangle 16"/>
+          <p:cNvSpPr/>
+          <p:nvPr/>
+        </p:nvSpPr>
+        <p:spPr>
+          <a:xfrm>
+            <a:off x="731520" y="4599432"/>
+            <a:ext cx="10698480" cy="749808"/>
+          </a:xfrm>
+          <a:prstGeom prst="roundRect">
+            <a:avLst/>
+          </a:prstGeom>
+          <a:solidFill>
+            <a:srgbClr val="FFFFFF"/>
+          </a:solidFill>
+          <a:ln w="19050">
+            <a:solidFill>
+              <a:srgbClr val="E2E8F0"/>
+            </a:solidFill>
+          </a:ln>
+        </p:spPr>
+        <p:style>
+          <a:lnRef idx="1">
+            <a:schemeClr val="accent1"/>
+          </a:lnRef>
+          <a:fillRef idx="3">
+            <a:schemeClr val="accent1"/>
+          </a:fillRef>
+          <a:effectRef idx="2">
+            <a:schemeClr val="accent1"/>
+          </a:effectRef>
+          <a:fontRef idx="minor">
+            <a:schemeClr val="lt1"/>
+          </a:fontRef>
+        </p:style>
+        <p:txBody>
+          <a:bodyPr rtlCol="0" anchor="ctr"/>
+          <a:lstStyle/>
+          <a:p>
+            <a:pPr algn="ctr"/>
+          </a:p>
+        </p:txBody>
+      </p:sp>
+      <p:sp>
+        <p:nvSpPr>
+          <p:cNvPr id="18" name="Rounded Rectangle 17"/>
+          <p:cNvSpPr/>
+          <p:nvPr/>
+        </p:nvSpPr>
+        <p:spPr>
+          <a:xfrm>
+            <a:off x="914400" y="4782312"/>
+            <a:ext cx="1737360" cy="365760"/>
+          </a:xfrm>
+          <a:prstGeom prst="roundRect">
+            <a:avLst/>
+          </a:prstGeom>
+          <a:solidFill>
+            <a:srgbClr val="ECFDF5"/>
+          </a:solidFill>
+          <a:ln>
+            <a:solidFill>
+              <a:srgbClr val="10B981"/>
+            </a:solidFill>
+          </a:ln>
+        </p:spPr>
+        <p:style>
+          <a:lnRef idx="1">
+            <a:schemeClr val="accent1"/>
+          </a:lnRef>
+          <a:fillRef idx="3">
+            <a:schemeClr val="accent1"/>
+          </a:fillRef>
+          <a:effectRef idx="2">
+            <a:schemeClr val="accent1"/>
+          </a:effectRef>
+          <a:fontRef idx="minor">
+            <a:schemeClr val="lt1"/>
+          </a:fontRef>
+        </p:style>
+        <p:txBody>
+          <a:bodyPr rtlCol="0" anchor="ctr"/>
+          <a:lstStyle/>
+          <a:p>
+            <a:pPr algn="ctr">
+              <a:defRPr sz="900" b="1">
+                <a:solidFill>
+                  <a:srgbClr val="10B981"/>
+                </a:solidFill>
+              </a:defRPr>
+            </a:pPr>
+            <a:r>
+              <a:t>✓ 100% COMPLETE</a:t>
+            </a:r>
+          </a:p>
+        </p:txBody>
+      </p:sp>
+      <p:sp>
+        <p:nvSpPr>
+          <p:cNvPr id="19" name="TextBox 18"/>
+          <p:cNvSpPr txBox="1"/>
+          <p:nvPr/>
+        </p:nvSpPr>
+        <p:spPr>
+          <a:xfrm>
+            <a:off x="2834640" y="4690872"/>
+            <a:ext cx="8412480" cy="594360"/>
+          </a:xfrm>
+          <a:prstGeom prst="rect">
+            <a:avLst/>
+          </a:prstGeom>
+          <a:noFill/>
+        </p:spPr>
+        <p:txBody>
+          <a:bodyPr wrap="square">
+            <a:spAutoFit/>
+          </a:bodyPr>
+          <a:lstStyle/>
+          <a:p>
+            <a:pPr>
+              <a:defRPr sz="1100" b="1">
+                <a:solidFill>
+                  <a:srgbClr val="0F172A"/>
+                </a:solidFill>
+              </a:defRPr>
+            </a:pPr>
+            <a:r>
+              <a:t>Role-Scoped Authentication &amp; Security</a:t>
+            </a:r>
+          </a:p>
+          <a:p>
+            <a:pPr>
+              <a:defRPr sz="950">
+                <a:solidFill>
+                  <a:srgbClr val="64748B"/>
+                </a:solidFill>
+              </a:defRPr>
+            </a:pPr>
+            <a:r>
+              <a:t>Enforced role-scoped API keys (Applicant vs Admin) and strict Pydantic input validation across all endpoints.</a:t>
+            </a:r>
+          </a:p>
+        </p:txBody>
+      </p:sp>
+      <p:sp>
+        <p:nvSpPr>
+          <p:cNvPr id="20" name="Rounded Rectangle 19"/>
+          <p:cNvSpPr/>
+          <p:nvPr/>
+        </p:nvSpPr>
+        <p:spPr>
+          <a:xfrm>
+            <a:off x="731520" y="5440680"/>
+            <a:ext cx="10698480" cy="749808"/>
+          </a:xfrm>
+          <a:prstGeom prst="roundRect">
+            <a:avLst/>
+          </a:prstGeom>
+          <a:solidFill>
+            <a:srgbClr val="FFFFFF"/>
+          </a:solidFill>
+          <a:ln w="19050">
+            <a:solidFill>
+              <a:srgbClr val="E2E8F0"/>
+            </a:solidFill>
+          </a:ln>
+        </p:spPr>
+        <p:style>
+          <a:lnRef idx="1">
+            <a:schemeClr val="accent1"/>
+          </a:lnRef>
+          <a:fillRef idx="3">
+            <a:schemeClr val="accent1"/>
+          </a:fillRef>
+          <a:effectRef idx="2">
+            <a:schemeClr val="accent1"/>
+          </a:effectRef>
+          <a:fontRef idx="minor">
+            <a:schemeClr val="lt1"/>
+          </a:fontRef>
+        </p:style>
+        <p:txBody>
+          <a:bodyPr rtlCol="0" anchor="ctr"/>
+          <a:lstStyle/>
+          <a:p>
+            <a:pPr algn="ctr"/>
+          </a:p>
+        </p:txBody>
+      </p:sp>
+      <p:sp>
+        <p:nvSpPr>
+          <p:cNvPr id="21" name="Rounded Rectangle 20"/>
+          <p:cNvSpPr/>
+          <p:nvPr/>
+        </p:nvSpPr>
+        <p:spPr>
+          <a:xfrm>
+            <a:off x="914400" y="5623560"/>
+            <a:ext cx="1737360" cy="365760"/>
+          </a:xfrm>
+          <a:prstGeom prst="roundRect">
+            <a:avLst/>
+          </a:prstGeom>
+          <a:solidFill>
+            <a:srgbClr val="ECFDF5"/>
+          </a:solidFill>
+          <a:ln>
+            <a:solidFill>
+              <a:srgbClr val="10B981"/>
+            </a:solidFill>
+          </a:ln>
+        </p:spPr>
+        <p:style>
+          <a:lnRef idx="1">
+            <a:schemeClr val="accent1"/>
+          </a:lnRef>
+          <a:fillRef idx="3">
+            <a:schemeClr val="accent1"/>
+          </a:fillRef>
+          <a:effectRef idx="2">
+            <a:schemeClr val="accent1"/>
+          </a:effectRef>
+          <a:fontRef idx="minor">
+            <a:schemeClr val="lt1"/>
+          </a:fontRef>
+        </p:style>
+        <p:txBody>
+          <a:bodyPr rtlCol="0" anchor="ctr"/>
+          <a:lstStyle/>
+          <a:p>
+            <a:pPr algn="ctr">
+              <a:defRPr sz="900" b="1">
+                <a:solidFill>
+                  <a:srgbClr val="10B981"/>
+                </a:solidFill>
+              </a:defRPr>
+            </a:pPr>
+            <a:r>
+              <a:t>✓ 100% COMPLETE</a:t>
+            </a:r>
+          </a:p>
+        </p:txBody>
+      </p:sp>
+      <p:sp>
+        <p:nvSpPr>
+          <p:cNvPr id="22" name="TextBox 21"/>
+          <p:cNvSpPr txBox="1"/>
+          <p:nvPr/>
+        </p:nvSpPr>
+        <p:spPr>
+          <a:xfrm>
+            <a:off x="2834640" y="5532120"/>
+            <a:ext cx="8412480" cy="594360"/>
+          </a:xfrm>
+          <a:prstGeom prst="rect">
+            <a:avLst/>
+          </a:prstGeom>
+          <a:noFill/>
+        </p:spPr>
+        <p:txBody>
+          <a:bodyPr wrap="square">
+            <a:spAutoFit/>
+          </a:bodyPr>
+          <a:lstStyle/>
+          <a:p>
+            <a:pPr>
+              <a:defRPr sz="1100" b="1">
+                <a:solidFill>
+                  <a:srgbClr val="0F172A"/>
+                </a:solidFill>
+              </a:defRPr>
+            </a:pPr>
+            <a:r>
+              <a:t>Docker Containerization &amp; Test Suite</a:t>
+            </a:r>
+          </a:p>
+          <a:p>
+            <a:pPr>
+              <a:defRPr sz="950">
+                <a:solidFill>
+                  <a:srgbClr val="64748B"/>
+                </a:solidFill>
+              </a:defRPr>
+            </a:pPr>
+            <a:r>
+              <a:t>Full Docker Compose multi-service setup verified; automated test suite (`pytest`) passing all edge cases.</a:t>
             </a:r>
           </a:p>
         </p:txBody>
@@ -7076,7 +8804,7 @@
         </p:nvSpPr>
         <p:spPr>
           <a:xfrm>
-            <a:off x="731520" y="411480"/>
+            <a:off x="731520" y="365760"/>
             <a:ext cx="10698480" cy="274320"/>
           </a:xfrm>
           <a:prstGeom prst="rect">
@@ -7098,7 +8826,7 @@
               </a:defRPr>
             </a:pPr>
             <a:r>
-              <a:t>6. GENERATIVE AI ARCHITECTURE</a:t>
+              <a:t>6. EMPIRICAL RESULTS</a:t>
             </a:r>
           </a:p>
         </p:txBody>
@@ -7111,7 +8839,7 @@
         </p:nvSpPr>
         <p:spPr>
           <a:xfrm>
-            <a:off x="731520" y="685800"/>
+            <a:off x="731520" y="640080"/>
             <a:ext cx="10698480" cy="502920"/>
           </a:xfrm>
           <a:prstGeom prst="rect">
@@ -7126,14 +8854,14 @@
           <a:lstStyle/>
           <a:p>
             <a:pPr>
-              <a:defRPr sz="2200" b="1">
+              <a:defRPr sz="2100" b="1">
                 <a:solidFill>
                   <a:srgbClr val="0F172A"/>
                 </a:solidFill>
               </a:defRPr>
             </a:pPr>
             <a:r>
-              <a:t>Generative AI Narrative Layer &amp; Regulatory Guardrails</a:t>
+              <a:t>Model Performance, Empirical Findings &amp; Test Validation</a:t>
             </a:r>
           </a:p>
         </p:txBody>
@@ -7146,8 +8874,8 @@
         </p:nvSpPr>
         <p:spPr>
           <a:xfrm>
-            <a:off x="731520" y="1280160"/>
-            <a:ext cx="10698480" cy="1463040"/>
+            <a:off x="731520" y="1234440"/>
+            <a:ext cx="2560320" cy="1737360"/>
           </a:xfrm>
           <a:prstGeom prst="roundRect">
             <a:avLst/>
@@ -7185,57 +8913,14 @@
       </p:sp>
       <p:sp>
         <p:nvSpPr>
-          <p:cNvPr id="6" name="Rectangle 5"/>
-          <p:cNvSpPr/>
-          <p:nvPr/>
-        </p:nvSpPr>
-        <p:spPr>
-          <a:xfrm>
-            <a:off x="731520" y="1280160"/>
-            <a:ext cx="182880" cy="1463040"/>
-          </a:xfrm>
-          <a:prstGeom prst="rect">
-            <a:avLst/>
-          </a:prstGeom>
-          <a:solidFill>
-            <a:srgbClr val="4F46E5"/>
-          </a:solidFill>
-          <a:ln>
-            <a:noFill/>
-          </a:ln>
-        </p:spPr>
-        <p:style>
-          <a:lnRef idx="1">
-            <a:schemeClr val="accent1"/>
-          </a:lnRef>
-          <a:fillRef idx="3">
-            <a:schemeClr val="accent1"/>
-          </a:fillRef>
-          <a:effectRef idx="2">
-            <a:schemeClr val="accent1"/>
-          </a:effectRef>
-          <a:fontRef idx="minor">
-            <a:schemeClr val="lt1"/>
-          </a:fontRef>
-        </p:style>
-        <p:txBody>
-          <a:bodyPr rtlCol="0" anchor="ctr"/>
-          <a:lstStyle/>
-          <a:p>
-            <a:pPr algn="ctr"/>
-          </a:p>
-        </p:txBody>
-      </p:sp>
-      <p:sp>
-        <p:nvSpPr>
-          <p:cNvPr id="7" name="TextBox 6"/>
+          <p:cNvPr id="6" name="TextBox 5"/>
           <p:cNvSpPr txBox="1"/>
           <p:nvPr/>
         </p:nvSpPr>
         <p:spPr>
           <a:xfrm>
-            <a:off x="1097280" y="1417320"/>
-            <a:ext cx="10058400" cy="1188720"/>
+            <a:off x="822960" y="1325880"/>
+            <a:ext cx="2377440" cy="1463040"/>
           </a:xfrm>
           <a:prstGeom prst="rect">
             <a:avLst/>
@@ -7248,44 +8933,53 @@
           </a:bodyPr>
           <a:lstStyle/>
           <a:p>
-            <a:pPr>
-              <a:defRPr sz="1400" b="1">
+            <a:pPr algn="ctr">
+              <a:defRPr sz="2600" b="1">
                 <a:solidFill>
                   <a:srgbClr val="4F46E5"/>
                 </a:solidFill>
               </a:defRPr>
             </a:pPr>
             <a:r>
-              <a:t>1. Strict Decoupling (No Autonomous LLM Decisions)</a:t>
-            </a:r>
-          </a:p>
-          <a:p>
-            <a:pPr>
-              <a:spcBef>
-                <a:spcPts val="400"/>
-              </a:spcBef>
-              <a:defRPr sz="1100">
+              <a:t>93.07%</a:t>
+            </a:r>
+          </a:p>
+          <a:p>
+            <a:pPr algn="ctr">
+              <a:defRPr sz="1100" b="1">
+                <a:solidFill>
+                  <a:srgbClr val="0F172A"/>
+                </a:solidFill>
+              </a:defRPr>
+            </a:pPr>
+            <a:r>
+              <a:t>Model Accuracy</a:t>
+            </a:r>
+          </a:p>
+          <a:p>
+            <a:pPr algn="ctr">
+              <a:defRPr sz="850">
                 <a:solidFill>
                   <a:srgbClr val="64748B"/>
                 </a:solidFill>
               </a:defRPr>
             </a:pPr>
             <a:r>
-              <a:t>The LLM never makes credit or risk decisions. It strictly acts as a natural language synthesizer, translating already-computed SHAP values and rule outputs into human-readable customer narratives (`POST /explain/narrative`).</a:t>
-            </a:r>
-          </a:p>
-        </p:txBody>
-      </p:sp>
-      <p:sp>
-        <p:nvSpPr>
-          <p:cNvPr id="8" name="Rounded Rectangle 7"/>
+              <a:t>XGBoost on 20% held-out test split</a:t>
+            </a:r>
+          </a:p>
+        </p:txBody>
+      </p:sp>
+      <p:sp>
+        <p:nvSpPr>
+          <p:cNvPr id="7" name="Rounded Rectangle 6"/>
           <p:cNvSpPr/>
           <p:nvPr/>
         </p:nvSpPr>
         <p:spPr>
           <a:xfrm>
-            <a:off x="731520" y="2926080"/>
-            <a:ext cx="10698480" cy="1463040"/>
+            <a:off x="3474720" y="1234440"/>
+            <a:ext cx="2560320" cy="1737360"/>
           </a:xfrm>
           <a:prstGeom prst="roundRect">
             <a:avLst/>
@@ -7323,57 +9017,14 @@
       </p:sp>
       <p:sp>
         <p:nvSpPr>
-          <p:cNvPr id="9" name="Rectangle 8"/>
-          <p:cNvSpPr/>
-          <p:nvPr/>
-        </p:nvSpPr>
-        <p:spPr>
-          <a:xfrm>
-            <a:off x="731520" y="2926080"/>
-            <a:ext cx="182880" cy="1463040"/>
-          </a:xfrm>
-          <a:prstGeom prst="rect">
-            <a:avLst/>
-          </a:prstGeom>
-          <a:solidFill>
-            <a:srgbClr val="7C3AED"/>
-          </a:solidFill>
-          <a:ln>
-            <a:noFill/>
-          </a:ln>
-        </p:spPr>
-        <p:style>
-          <a:lnRef idx="1">
-            <a:schemeClr val="accent1"/>
-          </a:lnRef>
-          <a:fillRef idx="3">
-            <a:schemeClr val="accent1"/>
-          </a:fillRef>
-          <a:effectRef idx="2">
-            <a:schemeClr val="accent1"/>
-          </a:effectRef>
-          <a:fontRef idx="minor">
-            <a:schemeClr val="lt1"/>
-          </a:fontRef>
-        </p:style>
-        <p:txBody>
-          <a:bodyPr rtlCol="0" anchor="ctr"/>
-          <a:lstStyle/>
-          <a:p>
-            <a:pPr algn="ctr"/>
-          </a:p>
-        </p:txBody>
-      </p:sp>
-      <p:sp>
-        <p:nvSpPr>
-          <p:cNvPr id="10" name="TextBox 9"/>
+          <p:cNvPr id="8" name="TextBox 7"/>
           <p:cNvSpPr txBox="1"/>
           <p:nvPr/>
         </p:nvSpPr>
         <p:spPr>
           <a:xfrm>
-            <a:off x="1097280" y="3063240"/>
-            <a:ext cx="10058400" cy="1188720"/>
+            <a:off x="3566160" y="1325880"/>
+            <a:ext cx="2377440" cy="1463040"/>
           </a:xfrm>
           <a:prstGeom prst="rect">
             <a:avLst/>
@@ -7386,44 +9037,53 @@
           </a:bodyPr>
           <a:lstStyle/>
           <a:p>
-            <a:pPr>
-              <a:defRPr sz="1400" b="1">
+            <a:pPr algn="ctr">
+              <a:defRPr sz="2600" b="1">
                 <a:solidFill>
                   <a:srgbClr val="7C3AED"/>
                 </a:solidFill>
               </a:defRPr>
             </a:pPr>
             <a:r>
-              <a:t>2. Multi-Tier Compliance Guardrails</a:t>
-            </a:r>
-          </a:p>
-          <a:p>
-            <a:pPr>
-              <a:spcBef>
-                <a:spcPts val="400"/>
-              </a:spcBef>
-              <a:defRPr sz="1100">
+              <a:t>0.9791</a:t>
+            </a:r>
+          </a:p>
+          <a:p>
+            <a:pPr algn="ctr">
+              <a:defRPr sz="1100" b="1">
+                <a:solidFill>
+                  <a:srgbClr val="0F172A"/>
+                </a:solidFill>
+              </a:defRPr>
+            </a:pPr>
+            <a:r>
+              <a:t>ROC-AUC Score</a:t>
+            </a:r>
+          </a:p>
+          <a:p>
+            <a:pPr algn="ctr">
+              <a:defRPr sz="850">
                 <a:solidFill>
                   <a:srgbClr val="64748B"/>
                 </a:solidFill>
               </a:defRPr>
             </a:pPr>
             <a:r>
-              <a:t>Automated pre/post-generation regex and policy filters screen output for prohibited protected characteristics (race, religion, gender, medical status) and guarantee no false commitment to overturn decisions.</a:t>
-            </a:r>
-          </a:p>
-        </p:txBody>
-      </p:sp>
-      <p:sp>
-        <p:nvSpPr>
-          <p:cNvPr id="11" name="Rounded Rectangle 10"/>
+              <a:t>Superior discriminative capability</a:t>
+            </a:r>
+          </a:p>
+        </p:txBody>
+      </p:sp>
+      <p:sp>
+        <p:nvSpPr>
+          <p:cNvPr id="9" name="Rounded Rectangle 8"/>
           <p:cNvSpPr/>
           <p:nvPr/>
         </p:nvSpPr>
         <p:spPr>
           <a:xfrm>
-            <a:off x="731520" y="4572000"/>
-            <a:ext cx="10698480" cy="1463040"/>
+            <a:off x="6217920" y="1234440"/>
+            <a:ext cx="2560320" cy="1737360"/>
           </a:xfrm>
           <a:prstGeom prst="roundRect">
             <a:avLst/>
@@ -7461,23 +9121,84 @@
       </p:sp>
       <p:sp>
         <p:nvSpPr>
-          <p:cNvPr id="12" name="Rectangle 11"/>
+          <p:cNvPr id="10" name="TextBox 9"/>
+          <p:cNvSpPr txBox="1"/>
+          <p:nvPr/>
+        </p:nvSpPr>
+        <p:spPr>
+          <a:xfrm>
+            <a:off x="6309360" y="1325880"/>
+            <a:ext cx="2377440" cy="1463040"/>
+          </a:xfrm>
+          <a:prstGeom prst="rect">
+            <a:avLst/>
+          </a:prstGeom>
+          <a:noFill/>
+        </p:spPr>
+        <p:txBody>
+          <a:bodyPr wrap="square">
+            <a:spAutoFit/>
+          </a:bodyPr>
+          <a:lstStyle/>
+          <a:p>
+            <a:pPr algn="ctr">
+              <a:defRPr sz="2600" b="1">
+                <a:solidFill>
+                  <a:srgbClr val="10B981"/>
+                </a:solidFill>
+              </a:defRPr>
+            </a:pPr>
+            <a:r>
+              <a:t>0.8526</a:t>
+            </a:r>
+          </a:p>
+          <a:p>
+            <a:pPr algn="ctr">
+              <a:defRPr sz="1100" b="1">
+                <a:solidFill>
+                  <a:srgbClr val="0F172A"/>
+                </a:solidFill>
+              </a:defRPr>
+            </a:pPr>
+            <a:r>
+              <a:t>F1 Score</a:t>
+            </a:r>
+          </a:p>
+          <a:p>
+            <a:pPr algn="ctr">
+              <a:defRPr sz="850">
+                <a:solidFill>
+                  <a:srgbClr val="64748B"/>
+                </a:solidFill>
+              </a:defRPr>
+            </a:pPr>
+            <a:r>
+              <a:t>Harmonic balance of precision &amp; recall</a:t>
+            </a:r>
+          </a:p>
+        </p:txBody>
+      </p:sp>
+      <p:sp>
+        <p:nvSpPr>
+          <p:cNvPr id="11" name="Rounded Rectangle 10"/>
           <p:cNvSpPr/>
           <p:nvPr/>
         </p:nvSpPr>
         <p:spPr>
           <a:xfrm>
-            <a:off x="731520" y="4572000"/>
-            <a:ext cx="182880" cy="1463040"/>
-          </a:xfrm>
-          <a:prstGeom prst="rect">
+            <a:off x="8961120" y="1234440"/>
+            <a:ext cx="2560320" cy="1737360"/>
+          </a:xfrm>
+          <a:prstGeom prst="roundRect">
             <a:avLst/>
           </a:prstGeom>
           <a:solidFill>
-            <a:srgbClr val="10B981"/>
+            <a:srgbClr val="FFFFFF"/>
           </a:solidFill>
-          <a:ln>
-            <a:noFill/>
+          <a:ln w="19050">
+            <a:solidFill>
+              <a:srgbClr val="E2E8F0"/>
+            </a:solidFill>
           </a:ln>
         </p:spPr>
         <p:style>
@@ -7504,14 +9225,14 @@
       </p:sp>
       <p:sp>
         <p:nvSpPr>
-          <p:cNvPr id="13" name="TextBox 12"/>
+          <p:cNvPr id="12" name="TextBox 11"/>
           <p:cNvSpPr txBox="1"/>
           <p:nvPr/>
         </p:nvSpPr>
         <p:spPr>
           <a:xfrm>
-            <a:off x="1097280" y="4709160"/>
-            <a:ext cx="10058400" cy="1188720"/>
+            <a:off x="9052560" y="1325880"/>
+            <a:ext cx="2377440" cy="1463040"/>
           </a:xfrm>
           <a:prstGeom prst="rect">
             <a:avLst/>
@@ -7524,30 +9245,179 @@
           </a:bodyPr>
           <a:lstStyle/>
           <a:p>
+            <a:pPr algn="ctr">
+              <a:defRPr sz="2600" b="1">
+                <a:solidFill>
+                  <a:srgbClr val="0F172A"/>
+                </a:solidFill>
+              </a:defRPr>
+            </a:pPr>
+            <a:r>
+              <a:t>0.0486</a:t>
+            </a:r>
+          </a:p>
+          <a:p>
+            <a:pPr algn="ctr">
+              <a:defRPr sz="1100" b="1">
+                <a:solidFill>
+                  <a:srgbClr val="0F172A"/>
+                </a:solidFill>
+              </a:defRPr>
+            </a:pPr>
+            <a:r>
+              <a:t>Brier Score</a:t>
+            </a:r>
+          </a:p>
+          <a:p>
+            <a:pPr algn="ctr">
+              <a:defRPr sz="850">
+                <a:solidFill>
+                  <a:srgbClr val="64748B"/>
+                </a:solidFill>
+              </a:defRPr>
+            </a:pPr>
+            <a:r>
+              <a:t>Well-calibrated probability estimates</a:t>
+            </a:r>
+          </a:p>
+        </p:txBody>
+      </p:sp>
+      <p:sp>
+        <p:nvSpPr>
+          <p:cNvPr id="13" name="Rounded Rectangle 12"/>
+          <p:cNvSpPr/>
+          <p:nvPr/>
+        </p:nvSpPr>
+        <p:spPr>
+          <a:xfrm>
+            <a:off x="731520" y="3200400"/>
+            <a:ext cx="10698480" cy="3154680"/>
+          </a:xfrm>
+          <a:prstGeom prst="roundRect">
+            <a:avLst/>
+          </a:prstGeom>
+          <a:solidFill>
+            <a:srgbClr val="FFFFFF"/>
+          </a:solidFill>
+          <a:ln w="19050">
+            <a:solidFill>
+              <a:srgbClr val="E2E8F0"/>
+            </a:solidFill>
+          </a:ln>
+        </p:spPr>
+        <p:style>
+          <a:lnRef idx="1">
+            <a:schemeClr val="accent1"/>
+          </a:lnRef>
+          <a:fillRef idx="3">
+            <a:schemeClr val="accent1"/>
+          </a:fillRef>
+          <a:effectRef idx="2">
+            <a:schemeClr val="accent1"/>
+          </a:effectRef>
+          <a:fontRef idx="minor">
+            <a:schemeClr val="lt1"/>
+          </a:fontRef>
+        </p:style>
+        <p:txBody>
+          <a:bodyPr rtlCol="0" anchor="ctr"/>
+          <a:lstStyle/>
+          <a:p>
+            <a:pPr algn="ctr"/>
+          </a:p>
+        </p:txBody>
+      </p:sp>
+      <p:sp>
+        <p:nvSpPr>
+          <p:cNvPr id="14" name="TextBox 13"/>
+          <p:cNvSpPr txBox="1"/>
+          <p:nvPr/>
+        </p:nvSpPr>
+        <p:spPr>
+          <a:xfrm>
+            <a:off x="1005840" y="3383280"/>
+            <a:ext cx="10149840" cy="2743200"/>
+          </a:xfrm>
+          <a:prstGeom prst="rect">
+            <a:avLst/>
+          </a:prstGeom>
+          <a:noFill/>
+        </p:spPr>
+        <p:txBody>
+          <a:bodyPr wrap="square">
+            <a:spAutoFit/>
+          </a:bodyPr>
+          <a:lstStyle/>
+          <a:p>
             <a:pPr>
               <a:defRPr sz="1400" b="1">
                 <a:solidFill>
-                  <a:srgbClr val="10B981"/>
-                </a:solidFill>
-              </a:defRPr>
-            </a:pPr>
-            <a:r>
-              <a:t>3. Offline-First Template Fallback Architecture</a:t>
+                  <a:srgbClr val="4F46E5"/>
+                </a:solidFill>
+              </a:defRPr>
+            </a:pPr>
+            <a:r>
+              <a:t>Key Empirical Validation &amp; Test Suite Findings</a:t>
             </a:r>
           </a:p>
           <a:p>
             <a:pPr>
               <a:spcBef>
-                <a:spcPts val="400"/>
+                <a:spcPts val="500"/>
               </a:spcBef>
-              <a:defRPr sz="1100">
-                <a:solidFill>
-                  <a:srgbClr val="64748B"/>
-                </a:solidFill>
-              </a:defRPr>
-            </a:pPr>
-            <a:r>
-              <a:t>If no OpenAI API key is provided (`CREDME_LLM_API_KEY`), the engine automatically switches to a deterministic template fallback (`source: template_fallback`), enabling secure, cost-free local evaluation.</a:t>
+              <a:defRPr sz="1050">
+                <a:solidFill>
+                  <a:srgbClr val="0F172A"/>
+                </a:solidFill>
+              </a:defRPr>
+            </a:pPr>
+            <a:r>
+              <a:t>•  Precision vs Recall Tradeoff: Precision of 86.8% and Recall of 83.8% strikes the optimal balance for retail credit underwriting, minimizing bad-debt writeoffs while maximizing approval volume.</a:t>
+            </a:r>
+          </a:p>
+          <a:p>
+            <a:pPr>
+              <a:spcBef>
+                <a:spcPts val="500"/>
+              </a:spcBef>
+              <a:defRPr sz="1050">
+                <a:solidFill>
+                  <a:srgbClr val="0F172A"/>
+                </a:solidFill>
+              </a:defRPr>
+            </a:pPr>
+            <a:r>
+              <a:t>•  Behavioral Contamination Calibration: Isolation Forest calibrated at 5.0% contamination cleanly segments anomalous velocity and balance depletion without raising false alarms on normal spending.</a:t>
+            </a:r>
+          </a:p>
+          <a:p>
+            <a:pPr>
+              <a:spcBef>
+                <a:spcPts val="500"/>
+              </a:spcBef>
+              <a:defRPr sz="1050">
+                <a:solidFill>
+                  <a:srgbClr val="0F172A"/>
+                </a:solidFill>
+              </a:defRPr>
+            </a:pPr>
+            <a:r>
+              <a:t>•  Thin-File Immunity Guarantee: Automated test `test_thin_file_never_auto_declines` verifies zero-score applicants with healthy income/DTI are consistently granted loans.</a:t>
+            </a:r>
+          </a:p>
+          <a:p>
+            <a:pPr>
+              <a:spcBef>
+                <a:spcPts val="500"/>
+              </a:spcBef>
+              <a:defRPr sz="1050">
+                <a:solidFill>
+                  <a:srgbClr val="0F172A"/>
+                </a:solidFill>
+              </a:defRPr>
+            </a:pPr>
+            <a:r>
+              <a:t>•  Edge Case Hardening: Full `pytest` suite covers extreme debt ratios, corrupt transaction schemas, role authorization boundaries, and live WebSocket streaming reconnects.</a:t>
             </a:r>
           </a:p>
         </p:txBody>
@@ -7621,7 +9491,7 @@
         </p:nvSpPr>
         <p:spPr>
           <a:xfrm>
-            <a:off x="731520" y="411480"/>
+            <a:off x="731520" y="365760"/>
             <a:ext cx="10698480" cy="274320"/>
           </a:xfrm>
           <a:prstGeom prst="rect">
@@ -7643,7 +9513,7 @@
               </a:defRPr>
             </a:pPr>
             <a:r>
-              <a:t>7. EMPIRICAL VALIDATION</a:t>
+              <a:t>7. REGULATORY AUDIT</a:t>
             </a:r>
           </a:p>
         </p:txBody>
@@ -7656,7 +9526,7 @@
         </p:nvSpPr>
         <p:spPr>
           <a:xfrm>
-            <a:off x="731520" y="685800"/>
+            <a:off x="731520" y="640080"/>
             <a:ext cx="10698480" cy="502920"/>
           </a:xfrm>
           <a:prstGeom prst="rect">
@@ -7671,14 +9541,14 @@
           <a:lstStyle/>
           <a:p>
             <a:pPr>
-              <a:defRPr sz="2200" b="1">
+              <a:defRPr sz="2100" b="1">
                 <a:solidFill>
                   <a:srgbClr val="0F172A"/>
                 </a:solidFill>
               </a:defRPr>
             </a:pPr>
             <a:r>
-              <a:t>Model Performance, Validation &amp; Test Coverage</a:t>
+              <a:t>Fairness Audit &amp; Disparate Impact Analysis (EEOC Four-Fifths Rule)</a:t>
             </a:r>
           </a:p>
         </p:txBody>
@@ -7691,8 +9561,8 @@
         </p:nvSpPr>
         <p:spPr>
           <a:xfrm>
-            <a:off x="731520" y="1280160"/>
-            <a:ext cx="2560320" cy="1828800"/>
+            <a:off x="731520" y="1234440"/>
+            <a:ext cx="5120640" cy="5120640"/>
           </a:xfrm>
           <a:prstGeom prst="roundRect">
             <a:avLst/>
@@ -7736,8 +9606,8 @@
         </p:nvSpPr>
         <p:spPr>
           <a:xfrm>
-            <a:off x="822960" y="1371600"/>
-            <a:ext cx="2377440" cy="1554480"/>
+            <a:off x="1005840" y="1417320"/>
+            <a:ext cx="4572000" cy="4754880"/>
           </a:xfrm>
           <a:prstGeom prst="rect">
             <a:avLst/>
@@ -7750,39 +9620,96 @@
           </a:bodyPr>
           <a:lstStyle/>
           <a:p>
-            <a:pPr algn="ctr">
-              <a:defRPr sz="2800" b="1">
-                <a:solidFill>
-                  <a:srgbClr val="4F46E5"/>
-                </a:solidFill>
-              </a:defRPr>
-            </a:pPr>
-            <a:r>
-              <a:t>93.07%</a:t>
-            </a:r>
-          </a:p>
-          <a:p>
-            <a:pPr algn="ctr">
-              <a:defRPr sz="1200" b="1">
+            <a:pPr>
+              <a:defRPr sz="1500" b="1">
+                <a:solidFill>
+                  <a:srgbClr val="7C3AED"/>
+                </a:solidFill>
+              </a:defRPr>
+            </a:pPr>
+            <a:r>
+              <a:t>Disparate Impact Audit Methodology</a:t>
+            </a:r>
+          </a:p>
+          <a:p>
+            <a:pPr>
+              <a:spcBef>
+                <a:spcPts val="1000"/>
+              </a:spcBef>
+              <a:defRPr b="1" sz="1100">
                 <a:solidFill>
                   <a:srgbClr val="0F172A"/>
                 </a:solidFill>
               </a:defRPr>
             </a:pPr>
             <a:r>
-              <a:t>Model Accuracy</a:t>
-            </a:r>
-          </a:p>
-          <a:p>
-            <a:pPr algn="ctr">
-              <a:defRPr sz="900">
+              <a:t>•  Four-Fifths (80%) Rule Standard:</a:t>
+            </a:r>
+          </a:p>
+          <a:p>
+            <a:pPr>
+              <a:defRPr sz="1000">
                 <a:solidFill>
                   <a:srgbClr val="64748B"/>
                 </a:solidFill>
               </a:defRPr>
             </a:pPr>
             <a:r>
-              <a:t>XGBoost on 20% held-out test split</a:t>
+              <a:t>Evaluates whether the approval selection rate for any protected demographic group is at least 80% of the highest-approved group.</a:t>
+            </a:r>
+          </a:p>
+          <a:p>
+            <a:pPr>
+              <a:spcBef>
+                <a:spcPts val="1000"/>
+              </a:spcBef>
+              <a:defRPr b="1" sz="1100">
+                <a:solidFill>
+                  <a:srgbClr val="0F172A"/>
+                </a:solidFill>
+              </a:defRPr>
+            </a:pPr>
+            <a:r>
+              <a:t>•  Audited Protected Classes:</a:t>
+            </a:r>
+          </a:p>
+          <a:p>
+            <a:pPr>
+              <a:defRPr sz="1000">
+                <a:solidFill>
+                  <a:srgbClr val="64748B"/>
+                </a:solidFill>
+              </a:defRPr>
+            </a:pPr>
+            <a:r>
+              <a:t>Evaluated across Age groups (&lt;25, 25-39, 40-59, 60+) and Marital Status categories via `backend/fairness_audit.py`.</a:t>
+            </a:r>
+          </a:p>
+          <a:p>
+            <a:pPr>
+              <a:spcBef>
+                <a:spcPts val="1000"/>
+              </a:spcBef>
+              <a:defRPr b="1" sz="1100">
+                <a:solidFill>
+                  <a:srgbClr val="0F172A"/>
+                </a:solidFill>
+              </a:defRPr>
+            </a:pPr>
+            <a:r>
+              <a:t>•  Live Audit Endpoint (`GET /fairness/report`):</a:t>
+            </a:r>
+          </a:p>
+          <a:p>
+            <a:pPr>
+              <a:defRPr sz="1000">
+                <a:solidFill>
+                  <a:srgbClr val="64748B"/>
+                </a:solidFill>
+              </a:defRPr>
+            </a:pPr>
+            <a:r>
+              <a:t>Pre-computes and serves adverse impact ratios, reference rates, and sample counts transparently to compliance auditors.</a:t>
             </a:r>
           </a:p>
         </p:txBody>
@@ -7795,8 +9722,8 @@
         </p:nvSpPr>
         <p:spPr>
           <a:xfrm>
-            <a:off x="3474720" y="1280160"/>
-            <a:ext cx="2560320" cy="1828800"/>
+            <a:off x="6309360" y="1234440"/>
+            <a:ext cx="5120640" cy="5120640"/>
           </a:xfrm>
           <a:prstGeom prst="roundRect">
             <a:avLst/>
@@ -7840,8 +9767,8 @@
         </p:nvSpPr>
         <p:spPr>
           <a:xfrm>
-            <a:off x="3566160" y="1371600"/>
-            <a:ext cx="2377440" cy="1554480"/>
+            <a:off x="6583680" y="1417320"/>
+            <a:ext cx="4572000" cy="4754880"/>
           </a:xfrm>
           <a:prstGeom prst="rect">
             <a:avLst/>
@@ -7854,387 +9781,96 @@
           </a:bodyPr>
           <a:lstStyle/>
           <a:p>
-            <a:pPr algn="ctr">
-              <a:defRPr sz="2800" b="1">
-                <a:solidFill>
-                  <a:srgbClr val="7C3AED"/>
-                </a:solidFill>
-              </a:defRPr>
-            </a:pPr>
-            <a:r>
-              <a:t>0.9791</a:t>
-            </a:r>
-          </a:p>
-          <a:p>
-            <a:pPr algn="ctr">
-              <a:defRPr sz="1200" b="1">
-                <a:solidFill>
-                  <a:srgbClr val="0F172A"/>
-                </a:solidFill>
-              </a:defRPr>
-            </a:pPr>
-            <a:r>
-              <a:t>ROC-AUC Score</a:t>
-            </a:r>
-          </a:p>
-          <a:p>
-            <a:pPr algn="ctr">
-              <a:defRPr sz="900">
+            <a:pPr>
+              <a:defRPr sz="1500" b="1">
+                <a:solidFill>
+                  <a:srgbClr val="4F46E5"/>
+                </a:solidFill>
+              </a:defRPr>
+            </a:pPr>
+            <a:r>
+              <a:t>Key Audit Findings &amp; Insights</a:t>
+            </a:r>
+          </a:p>
+          <a:p>
+            <a:pPr>
+              <a:spcBef>
+                <a:spcPts val="1000"/>
+              </a:spcBef>
+              <a:defRPr b="1" sz="1100">
+                <a:solidFill>
+                  <a:srgbClr val="4F46E5"/>
+                </a:solidFill>
+              </a:defRPr>
+            </a:pPr>
+            <a:r>
+              <a:t>✓  No Algorithmic Bias Amplification:</a:t>
+            </a:r>
+          </a:p>
+          <a:p>
+            <a:pPr>
+              <a:defRPr sz="1000">
                 <a:solidFill>
                   <a:srgbClr val="64748B"/>
                 </a:solidFill>
               </a:defRPr>
             </a:pPr>
             <a:r>
-              <a:t>Superior discriminative capability</a:t>
-            </a:r>
-          </a:p>
-        </p:txBody>
-      </p:sp>
-      <p:sp>
-        <p:nvSpPr>
-          <p:cNvPr id="9" name="Rounded Rectangle 8"/>
-          <p:cNvSpPr/>
-          <p:nvPr/>
-        </p:nvSpPr>
-        <p:spPr>
-          <a:xfrm>
-            <a:off x="6217920" y="1280160"/>
-            <a:ext cx="2560320" cy="1828800"/>
-          </a:xfrm>
-          <a:prstGeom prst="roundRect">
-            <a:avLst/>
-          </a:prstGeom>
-          <a:solidFill>
-            <a:srgbClr val="FFFFFF"/>
-          </a:solidFill>
-          <a:ln w="19050">
-            <a:solidFill>
-              <a:srgbClr val="E2E8F0"/>
-            </a:solidFill>
-          </a:ln>
-        </p:spPr>
-        <p:style>
-          <a:lnRef idx="1">
-            <a:schemeClr val="accent1"/>
-          </a:lnRef>
-          <a:fillRef idx="3">
-            <a:schemeClr val="accent1"/>
-          </a:fillRef>
-          <a:effectRef idx="2">
-            <a:schemeClr val="accent1"/>
-          </a:effectRef>
-          <a:fontRef idx="minor">
-            <a:schemeClr val="lt1"/>
-          </a:fontRef>
-        </p:style>
-        <p:txBody>
-          <a:bodyPr rtlCol="0" anchor="ctr"/>
-          <a:lstStyle/>
-          <a:p>
-            <a:pPr algn="ctr"/>
-          </a:p>
-        </p:txBody>
-      </p:sp>
-      <p:sp>
-        <p:nvSpPr>
-          <p:cNvPr id="10" name="TextBox 9"/>
-          <p:cNvSpPr txBox="1"/>
-          <p:nvPr/>
-        </p:nvSpPr>
-        <p:spPr>
-          <a:xfrm>
-            <a:off x="6309360" y="1371600"/>
-            <a:ext cx="2377440" cy="1554480"/>
-          </a:xfrm>
-          <a:prstGeom prst="rect">
-            <a:avLst/>
-          </a:prstGeom>
-          <a:noFill/>
-        </p:spPr>
-        <p:txBody>
-          <a:bodyPr wrap="square">
-            <a:spAutoFit/>
-          </a:bodyPr>
-          <a:lstStyle/>
-          <a:p>
-            <a:pPr algn="ctr">
-              <a:defRPr sz="2800" b="1">
-                <a:solidFill>
-                  <a:srgbClr val="10B981"/>
-                </a:solidFill>
-              </a:defRPr>
-            </a:pPr>
-            <a:r>
-              <a:t>0.8526</a:t>
-            </a:r>
-          </a:p>
-          <a:p>
-            <a:pPr algn="ctr">
-              <a:defRPr sz="1200" b="1">
-                <a:solidFill>
-                  <a:srgbClr val="0F172A"/>
-                </a:solidFill>
-              </a:defRPr>
-            </a:pPr>
-            <a:r>
-              <a:t>F1 Score</a:t>
-            </a:r>
-          </a:p>
-          <a:p>
-            <a:pPr algn="ctr">
-              <a:defRPr sz="900">
+              <a:t>While younger demographics (&lt;25) exhibit lower baseline approval rates, predicted model rates closely mirror actual historical rates (predicted tracks historical within 1.2%), confirming the model does not magnify bias.</a:t>
+            </a:r>
+          </a:p>
+          <a:p>
+            <a:pPr>
+              <a:spcBef>
+                <a:spcPts val="1000"/>
+              </a:spcBef>
+              <a:defRPr b="1" sz="1100">
+                <a:solidFill>
+                  <a:srgbClr val="4F46E5"/>
+                </a:solidFill>
+              </a:defRPr>
+            </a:pPr>
+            <a:r>
+              <a:t>✓  Marital Status Parity:</a:t>
+            </a:r>
+          </a:p>
+          <a:p>
+            <a:pPr>
+              <a:defRPr sz="1000">
                 <a:solidFill>
                   <a:srgbClr val="64748B"/>
                 </a:solidFill>
               </a:defRPr>
             </a:pPr>
             <a:r>
-              <a:t>Harmonic mean of precision &amp; recall</a:t>
-            </a:r>
-          </a:p>
-        </p:txBody>
-      </p:sp>
-      <p:sp>
-        <p:nvSpPr>
-          <p:cNvPr id="11" name="Rounded Rectangle 10"/>
-          <p:cNvSpPr/>
-          <p:nvPr/>
-        </p:nvSpPr>
-        <p:spPr>
-          <a:xfrm>
-            <a:off x="8961120" y="1280160"/>
-            <a:ext cx="2560320" cy="1828800"/>
-          </a:xfrm>
-          <a:prstGeom prst="roundRect">
-            <a:avLst/>
-          </a:prstGeom>
-          <a:solidFill>
-            <a:srgbClr val="FFFFFF"/>
-          </a:solidFill>
-          <a:ln w="19050">
-            <a:solidFill>
-              <a:srgbClr val="E2E8F0"/>
-            </a:solidFill>
-          </a:ln>
-        </p:spPr>
-        <p:style>
-          <a:lnRef idx="1">
-            <a:schemeClr val="accent1"/>
-          </a:lnRef>
-          <a:fillRef idx="3">
-            <a:schemeClr val="accent1"/>
-          </a:fillRef>
-          <a:effectRef idx="2">
-            <a:schemeClr val="accent1"/>
-          </a:effectRef>
-          <a:fontRef idx="minor">
-            <a:schemeClr val="lt1"/>
-          </a:fontRef>
-        </p:style>
-        <p:txBody>
-          <a:bodyPr rtlCol="0" anchor="ctr"/>
-          <a:lstStyle/>
-          <a:p>
-            <a:pPr algn="ctr"/>
-          </a:p>
-        </p:txBody>
-      </p:sp>
-      <p:sp>
-        <p:nvSpPr>
-          <p:cNvPr id="12" name="TextBox 11"/>
-          <p:cNvSpPr txBox="1"/>
-          <p:nvPr/>
-        </p:nvSpPr>
-        <p:spPr>
-          <a:xfrm>
-            <a:off x="9052560" y="1371600"/>
-            <a:ext cx="2377440" cy="1554480"/>
-          </a:xfrm>
-          <a:prstGeom prst="rect">
-            <a:avLst/>
-          </a:prstGeom>
-          <a:noFill/>
-        </p:spPr>
-        <p:txBody>
-          <a:bodyPr wrap="square">
-            <a:spAutoFit/>
-          </a:bodyPr>
-          <a:lstStyle/>
-          <a:p>
-            <a:pPr algn="ctr">
-              <a:defRPr sz="2800" b="1">
-                <a:solidFill>
-                  <a:srgbClr val="0F172A"/>
-                </a:solidFill>
-              </a:defRPr>
-            </a:pPr>
-            <a:r>
-              <a:t>0.0486</a:t>
-            </a:r>
-          </a:p>
-          <a:p>
-            <a:pPr algn="ctr">
-              <a:defRPr sz="1200" b="1">
-                <a:solidFill>
-                  <a:srgbClr val="0F172A"/>
-                </a:solidFill>
-              </a:defRPr>
-            </a:pPr>
-            <a:r>
-              <a:t>Brier Loss</a:t>
-            </a:r>
-          </a:p>
-          <a:p>
-            <a:pPr algn="ctr">
-              <a:defRPr sz="900">
+              <a:t>Passes four-fifths compliance with zero disparate impact observed across married vs unmarried applicants.</a:t>
+            </a:r>
+          </a:p>
+          <a:p>
+            <a:pPr>
+              <a:spcBef>
+                <a:spcPts val="1000"/>
+              </a:spcBef>
+              <a:defRPr b="1" sz="1100">
+                <a:solidFill>
+                  <a:srgbClr val="4F46E5"/>
+                </a:solidFill>
+              </a:defRPr>
+            </a:pPr>
+            <a:r>
+              <a:t>✓  Fairness Mitigation Strategy:</a:t>
+            </a:r>
+          </a:p>
+          <a:p>
+            <a:pPr>
+              <a:defRPr sz="1000">
                 <a:solidFill>
                   <a:srgbClr val="64748B"/>
                 </a:solidFill>
               </a:defRPr>
             </a:pPr>
             <a:r>
-              <a:t>Well-calibrated probability estimates</a:t>
-            </a:r>
-          </a:p>
-        </p:txBody>
-      </p:sp>
-      <p:sp>
-        <p:nvSpPr>
-          <p:cNvPr id="13" name="Rounded Rectangle 12"/>
-          <p:cNvSpPr/>
-          <p:nvPr/>
-        </p:nvSpPr>
-        <p:spPr>
-          <a:xfrm>
-            <a:off x="731520" y="3383280"/>
-            <a:ext cx="10698480" cy="2926080"/>
-          </a:xfrm>
-          <a:prstGeom prst="roundRect">
-            <a:avLst/>
-          </a:prstGeom>
-          <a:solidFill>
-            <a:srgbClr val="FFFFFF"/>
-          </a:solidFill>
-          <a:ln w="19050">
-            <a:solidFill>
-              <a:srgbClr val="E2E8F0"/>
-            </a:solidFill>
-          </a:ln>
-        </p:spPr>
-        <p:style>
-          <a:lnRef idx="1">
-            <a:schemeClr val="accent1"/>
-          </a:lnRef>
-          <a:fillRef idx="3">
-            <a:schemeClr val="accent1"/>
-          </a:fillRef>
-          <a:effectRef idx="2">
-            <a:schemeClr val="accent1"/>
-          </a:effectRef>
-          <a:fontRef idx="minor">
-            <a:schemeClr val="lt1"/>
-          </a:fontRef>
-        </p:style>
-        <p:txBody>
-          <a:bodyPr rtlCol="0" anchor="ctr"/>
-          <a:lstStyle/>
-          <a:p>
-            <a:pPr algn="ctr"/>
-          </a:p>
-        </p:txBody>
-      </p:sp>
-      <p:sp>
-        <p:nvSpPr>
-          <p:cNvPr id="14" name="TextBox 13"/>
-          <p:cNvSpPr txBox="1"/>
-          <p:nvPr/>
-        </p:nvSpPr>
-        <p:spPr>
-          <a:xfrm>
-            <a:off x="1005840" y="3566160"/>
-            <a:ext cx="10149840" cy="2560320"/>
-          </a:xfrm>
-          <a:prstGeom prst="rect">
-            <a:avLst/>
-          </a:prstGeom>
-          <a:noFill/>
-        </p:spPr>
-        <p:txBody>
-          <a:bodyPr wrap="square">
-            <a:spAutoFit/>
-          </a:bodyPr>
-          <a:lstStyle/>
-          <a:p>
-            <a:pPr>
-              <a:defRPr sz="1500" b="1">
-                <a:solidFill>
-                  <a:srgbClr val="4F46E5"/>
-                </a:solidFill>
-              </a:defRPr>
-            </a:pPr>
-            <a:r>
-              <a:t>Comprehensive Automated Test Suite (`pytest backend/tests/ -v`)</a:t>
-            </a:r>
-          </a:p>
-          <a:p>
-            <a:pPr>
-              <a:spcBef>
-                <a:spcPts val="600"/>
-              </a:spcBef>
-              <a:defRPr sz="1100">
-                <a:solidFill>
-                  <a:srgbClr val="0F172A"/>
-                </a:solidFill>
-              </a:defRPr>
-            </a:pPr>
-            <a:r>
-              <a:t>•  Thin-File Protection Guarantee: Verified with `test_thin_file_never_auto_declines` ensuring zero-score applicants are never rejected solely on missing credit history.</a:t>
-            </a:r>
-          </a:p>
-          <a:p>
-            <a:pPr>
-              <a:spcBef>
-                <a:spcPts val="600"/>
-              </a:spcBef>
-              <a:defRPr sz="1100">
-                <a:solidFill>
-                  <a:srgbClr val="0F172A"/>
-                </a:solidFill>
-              </a:defRPr>
-            </a:pPr>
-            <a:r>
-              <a:t>•  Behavioral Anomaly Escalation: Verified that extreme transaction-to-balance spikes escalate borderline approvals to human `REVIEW`.</a:t>
-            </a:r>
-          </a:p>
-          <a:p>
-            <a:pPr>
-              <a:spcBef>
-                <a:spcPts val="600"/>
-              </a:spcBef>
-              <a:defRPr sz="1100">
-                <a:solidFill>
-                  <a:srgbClr val="0F172A"/>
-                </a:solidFill>
-              </a:defRPr>
-            </a:pPr>
-            <a:r>
-              <a:t>•  Security &amp; Auth Bounds: Role-scoped test assertions verifying 401 on missing keys and 403 on insufficient privilege scopes (Applicant vs Admin).</a:t>
-            </a:r>
-          </a:p>
-          <a:p>
-            <a:pPr>
-              <a:spcBef>
-                <a:spcPts val="600"/>
-              </a:spcBef>
-              <a:defRPr sz="1100">
-                <a:solidFill>
-                  <a:srgbClr val="0F172A"/>
-                </a:solidFill>
-              </a:defRPr>
-            </a:pPr>
-            <a:r>
-              <a:t>•  End-to-End Decision Consistency: Automated regression tests covering all multi-modal fusion branches across synthetic customer archetypes.</a:t>
+              <a:t>Thin-file routing and alternative data (Rent consistency) directly lift approval access for the young demographic without degrading credit quality.</a:t>
             </a:r>
           </a:p>
         </p:txBody>
@@ -8308,7 +9944,7 @@
         </p:nvSpPr>
         <p:spPr>
           <a:xfrm>
-            <a:off x="731520" y="411480"/>
+            <a:off x="731520" y="365760"/>
             <a:ext cx="10698480" cy="274320"/>
           </a:xfrm>
           <a:prstGeom prst="rect">
@@ -8330,7 +9966,7 @@
               </a:defRPr>
             </a:pPr>
             <a:r>
-              <a:t>8. PRODUCTION STANDARDS</a:t>
+              <a:t>8. EXPLAINABILITY</a:t>
             </a:r>
           </a:p>
         </p:txBody>
@@ -8343,7 +9979,7 @@
         </p:nvSpPr>
         <p:spPr>
           <a:xfrm>
-            <a:off x="731520" y="685800"/>
+            <a:off x="731520" y="640080"/>
             <a:ext cx="10698480" cy="502920"/>
           </a:xfrm>
           <a:prstGeom prst="rect">
@@ -8358,14 +9994,14 @@
           <a:lstStyle/>
           <a:p>
             <a:pPr>
-              <a:defRPr sz="2200" b="1">
+              <a:defRPr sz="2100" b="1">
                 <a:solidFill>
                   <a:srgbClr val="0F172A"/>
                 </a:solidFill>
               </a:defRPr>
             </a:pPr>
             <a:r>
-              <a:t>Engineering Discipline, Cloud Readiness &amp; Security</a:t>
+              <a:t>Responsible AI: SHAP Factor Breakdown &amp; Guardrailed LLM Layer</a:t>
             </a:r>
           </a:p>
         </p:txBody>
@@ -8378,8 +10014,8 @@
         </p:nvSpPr>
         <p:spPr>
           <a:xfrm>
-            <a:off x="731520" y="1280160"/>
-            <a:ext cx="2560320" cy="5029200"/>
+            <a:off x="731520" y="1234440"/>
+            <a:ext cx="5120640" cy="5120640"/>
           </a:xfrm>
           <a:prstGeom prst="roundRect">
             <a:avLst/>
@@ -8417,66 +10053,14 @@
       </p:sp>
       <p:sp>
         <p:nvSpPr>
-          <p:cNvPr id="6" name="Rectangle 5"/>
-          <p:cNvSpPr/>
-          <p:nvPr/>
-        </p:nvSpPr>
-        <p:spPr>
-          <a:xfrm>
-            <a:off x="731520" y="1280160"/>
-            <a:ext cx="2560320" cy="457200"/>
-          </a:xfrm>
-          <a:prstGeom prst="rect">
-            <a:avLst/>
-          </a:prstGeom>
-          <a:solidFill>
-            <a:srgbClr val="4F46E5"/>
-          </a:solidFill>
-          <a:ln>
-            <a:noFill/>
-          </a:ln>
-        </p:spPr>
-        <p:style>
-          <a:lnRef idx="1">
-            <a:schemeClr val="accent1"/>
-          </a:lnRef>
-          <a:fillRef idx="3">
-            <a:schemeClr val="accent1"/>
-          </a:fillRef>
-          <a:effectRef idx="2">
-            <a:schemeClr val="accent1"/>
-          </a:effectRef>
-          <a:fontRef idx="minor">
-            <a:schemeClr val="lt1"/>
-          </a:fontRef>
-        </p:style>
-        <p:txBody>
-          <a:bodyPr rtlCol="0" anchor="ctr"/>
-          <a:lstStyle/>
-          <a:p>
-            <a:pPr algn="ctr">
-              <a:defRPr sz="1200" b="1">
-                <a:solidFill>
-                  <a:srgbClr val="FFFFFF"/>
-                </a:solidFill>
-              </a:defRPr>
-            </a:pPr>
-            <a:r>
-              <a:t>Security &amp; Auth</a:t>
-            </a:r>
-          </a:p>
-        </p:txBody>
-      </p:sp>
-      <p:sp>
-        <p:nvSpPr>
-          <p:cNvPr id="7" name="TextBox 6"/>
+          <p:cNvPr id="6" name="TextBox 5"/>
           <p:cNvSpPr txBox="1"/>
           <p:nvPr/>
         </p:nvSpPr>
         <p:spPr>
           <a:xfrm>
-            <a:off x="868680" y="1920240"/>
-            <a:ext cx="2286000" cy="4114800"/>
+            <a:off x="1005840" y="1417320"/>
+            <a:ext cx="4572000" cy="4754880"/>
           </a:xfrm>
           <a:prstGeom prst="rect">
             <a:avLst/>
@@ -8490,40 +10074,109 @@
           <a:lstStyle/>
           <a:p>
             <a:pPr>
-              <a:defRPr sz="1100">
+              <a:defRPr sz="1500" b="1">
+                <a:solidFill>
+                  <a:srgbClr val="4F46E5"/>
+                </a:solidFill>
+              </a:defRPr>
+            </a:pPr>
+            <a:r>
+              <a:t>SHAP Decision Attribution</a:t>
+            </a:r>
+          </a:p>
+          <a:p>
+            <a:pPr>
+              <a:spcBef>
+                <a:spcPts val="1000"/>
+              </a:spcBef>
+              <a:defRPr b="1" sz="1100">
                 <a:solidFill>
                   <a:srgbClr val="0F172A"/>
                 </a:solidFill>
               </a:defRPr>
             </a:pPr>
             <a:r>
-              <a:t>• Role-scoped API keys (Applicant vs Admin)</a:t>
-            </a:r>
-            <a:br/>
-            <a:r>
-              <a:t>• Strict Pydantic request schema validation</a:t>
-            </a:r>
-            <a:br/>
-            <a:r>
-              <a:t>• No hardcoded secrets (env configuration)</a:t>
-            </a:r>
-            <a:br/>
-            <a:r>
-              <a:t>• Non-root Docker execution</a:t>
-            </a:r>
-          </a:p>
-        </p:txBody>
-      </p:sp>
-      <p:sp>
-        <p:nvSpPr>
-          <p:cNvPr id="8" name="Rounded Rectangle 7"/>
+              <a:t>•  Mathematical Feature Contribution:</a:t>
+            </a:r>
+          </a:p>
+          <a:p>
+            <a:pPr>
+              <a:defRPr sz="1000">
+                <a:solidFill>
+                  <a:srgbClr val="64748B"/>
+                </a:solidFill>
+              </a:defRPr>
+            </a:pPr>
+            <a:r>
+              <a:t>TreeExplainer calculates precise Shapley values for each applicant, showing exact feature impacts.</a:t>
+            </a:r>
+          </a:p>
+          <a:p>
+            <a:pPr>
+              <a:spcBef>
+                <a:spcPts val="1000"/>
+              </a:spcBef>
+              <a:defRPr b="1" sz="1100">
+                <a:solidFill>
+                  <a:srgbClr val="0F172A"/>
+                </a:solidFill>
+              </a:defRPr>
+            </a:pPr>
+            <a:r>
+              <a:t>•  Top-5 Normalized Percentages:</a:t>
+            </a:r>
+          </a:p>
+          <a:p>
+            <a:pPr>
+              <a:defRPr sz="1000">
+                <a:solidFill>
+                  <a:srgbClr val="64748B"/>
+                </a:solidFill>
+              </a:defRPr>
+            </a:pPr>
+            <a:r>
+              <a:t>Translates raw math into clear normalized percentages (e.g. Total DTI: -42.3%, Loan Duration: +18.5%, Credit Score: +16.2%).</a:t>
+            </a:r>
+          </a:p>
+          <a:p>
+            <a:pPr>
+              <a:spcBef>
+                <a:spcPts val="1000"/>
+              </a:spcBef>
+              <a:defRPr b="1" sz="1100">
+                <a:solidFill>
+                  <a:srgbClr val="0F172A"/>
+                </a:solidFill>
+              </a:defRPr>
+            </a:pPr>
+            <a:r>
+              <a:t>•  Adverse Action Compliance:</a:t>
+            </a:r>
+          </a:p>
+          <a:p>
+            <a:pPr>
+              <a:defRPr sz="1000">
+                <a:solidFill>
+                  <a:srgbClr val="64748B"/>
+                </a:solidFill>
+              </a:defRPr>
+            </a:pPr>
+            <a:r>
+              <a:t>Provides legally required, human-understandable adverse action notices without manual underwriter intervention.</a:t>
+            </a:r>
+          </a:p>
+        </p:txBody>
+      </p:sp>
+      <p:sp>
+        <p:nvSpPr>
+          <p:cNvPr id="7" name="Rounded Rectangle 6"/>
           <p:cNvSpPr/>
           <p:nvPr/>
         </p:nvSpPr>
         <p:spPr>
           <a:xfrm>
-            <a:off x="3474720" y="1280160"/>
-            <a:ext cx="2560320" cy="5029200"/>
+            <a:off x="6309360" y="1234440"/>
+            <a:ext cx="5120640" cy="5120640"/>
           </a:xfrm>
           <a:prstGeom prst="roundRect">
             <a:avLst/>
@@ -8561,66 +10214,14 @@
       </p:sp>
       <p:sp>
         <p:nvSpPr>
-          <p:cNvPr id="9" name="Rectangle 8"/>
-          <p:cNvSpPr/>
-          <p:nvPr/>
-        </p:nvSpPr>
-        <p:spPr>
-          <a:xfrm>
-            <a:off x="3474720" y="1280160"/>
-            <a:ext cx="2560320" cy="457200"/>
-          </a:xfrm>
-          <a:prstGeom prst="rect">
-            <a:avLst/>
-          </a:prstGeom>
-          <a:solidFill>
-            <a:srgbClr val="7C3AED"/>
-          </a:solidFill>
-          <a:ln>
-            <a:noFill/>
-          </a:ln>
-        </p:spPr>
-        <p:style>
-          <a:lnRef idx="1">
-            <a:schemeClr val="accent1"/>
-          </a:lnRef>
-          <a:fillRef idx="3">
-            <a:schemeClr val="accent1"/>
-          </a:fillRef>
-          <a:effectRef idx="2">
-            <a:schemeClr val="accent1"/>
-          </a:effectRef>
-          <a:fontRef idx="minor">
-            <a:schemeClr val="lt1"/>
-          </a:fontRef>
-        </p:style>
-        <p:txBody>
-          <a:bodyPr rtlCol="0" anchor="ctr"/>
-          <a:lstStyle/>
-          <a:p>
-            <a:pPr algn="ctr">
-              <a:defRPr sz="1200" b="1">
-                <a:solidFill>
-                  <a:srgbClr val="FFFFFF"/>
-                </a:solidFill>
-              </a:defRPr>
-            </a:pPr>
-            <a:r>
-              <a:t>Clean Architecture</a:t>
-            </a:r>
-          </a:p>
-        </p:txBody>
-      </p:sp>
-      <p:sp>
-        <p:nvSpPr>
-          <p:cNvPr id="10" name="TextBox 9"/>
+          <p:cNvPr id="8" name="TextBox 7"/>
           <p:cNvSpPr txBox="1"/>
           <p:nvPr/>
         </p:nvSpPr>
         <p:spPr>
           <a:xfrm>
-            <a:off x="3611880" y="1920240"/>
-            <a:ext cx="2286000" cy="4114800"/>
+            <a:off x="6583680" y="1417320"/>
+            <a:ext cx="4572000" cy="4754880"/>
           </a:xfrm>
           <a:prstGeom prst="rect">
             <a:avLst/>
@@ -8634,314 +10235,95 @@
           <a:lstStyle/>
           <a:p>
             <a:pPr>
-              <a:defRPr sz="1100">
-                <a:solidFill>
-                  <a:srgbClr val="0F172A"/>
-                </a:solidFill>
-              </a:defRPr>
-            </a:pPr>
-            <a:r>
-              <a:t>• Modular domain services (Credit, Behavior, Fusion, LLM)</a:t>
-            </a:r>
-            <a:br/>
-            <a:r>
-              <a:t>• API-First design with OpenAPI autodocs</a:t>
-            </a:r>
-            <a:br/>
-            <a:r>
-              <a:t>• Git version control with clean commit history</a:t>
-            </a:r>
-            <a:br/>
-            <a:r>
-              <a:t>• Structured error responses &amp; logs</a:t>
-            </a:r>
-          </a:p>
-        </p:txBody>
-      </p:sp>
-      <p:sp>
-        <p:nvSpPr>
-          <p:cNvPr id="11" name="Rounded Rectangle 10"/>
-          <p:cNvSpPr/>
-          <p:nvPr/>
-        </p:nvSpPr>
-        <p:spPr>
-          <a:xfrm>
-            <a:off x="6217920" y="1280160"/>
-            <a:ext cx="2560320" cy="5029200"/>
-          </a:xfrm>
-          <a:prstGeom prst="roundRect">
-            <a:avLst/>
-          </a:prstGeom>
-          <a:solidFill>
-            <a:srgbClr val="FFFFFF"/>
-          </a:solidFill>
-          <a:ln w="19050">
-            <a:solidFill>
-              <a:srgbClr val="E2E8F0"/>
-            </a:solidFill>
-          </a:ln>
-        </p:spPr>
-        <p:style>
-          <a:lnRef idx="1">
-            <a:schemeClr val="accent1"/>
-          </a:lnRef>
-          <a:fillRef idx="3">
-            <a:schemeClr val="accent1"/>
-          </a:fillRef>
-          <a:effectRef idx="2">
-            <a:schemeClr val="accent1"/>
-          </a:effectRef>
-          <a:fontRef idx="minor">
-            <a:schemeClr val="lt1"/>
-          </a:fontRef>
-        </p:style>
-        <p:txBody>
-          <a:bodyPr rtlCol="0" anchor="ctr"/>
-          <a:lstStyle/>
-          <a:p>
-            <a:pPr algn="ctr"/>
-          </a:p>
-        </p:txBody>
-      </p:sp>
-      <p:sp>
-        <p:nvSpPr>
-          <p:cNvPr id="12" name="Rectangle 11"/>
-          <p:cNvSpPr/>
-          <p:nvPr/>
-        </p:nvSpPr>
-        <p:spPr>
-          <a:xfrm>
-            <a:off x="6217920" y="1280160"/>
-            <a:ext cx="2560320" cy="457200"/>
-          </a:xfrm>
-          <a:prstGeom prst="rect">
-            <a:avLst/>
-          </a:prstGeom>
-          <a:solidFill>
-            <a:srgbClr val="10B981"/>
-          </a:solidFill>
-          <a:ln>
-            <a:noFill/>
-          </a:ln>
-        </p:spPr>
-        <p:style>
-          <a:lnRef idx="1">
-            <a:schemeClr val="accent1"/>
-          </a:lnRef>
-          <a:fillRef idx="3">
-            <a:schemeClr val="accent1"/>
-          </a:fillRef>
-          <a:effectRef idx="2">
-            <a:schemeClr val="accent1"/>
-          </a:effectRef>
-          <a:fontRef idx="minor">
-            <a:schemeClr val="lt1"/>
-          </a:fontRef>
-        </p:style>
-        <p:txBody>
-          <a:bodyPr rtlCol="0" anchor="ctr"/>
-          <a:lstStyle/>
-          <a:p>
-            <a:pPr algn="ctr">
-              <a:defRPr sz="1200" b="1">
-                <a:solidFill>
-                  <a:srgbClr val="FFFFFF"/>
-                </a:solidFill>
-              </a:defRPr>
-            </a:pPr>
-            <a:r>
-              <a:t>Containerization</a:t>
-            </a:r>
-          </a:p>
-        </p:txBody>
-      </p:sp>
-      <p:sp>
-        <p:nvSpPr>
-          <p:cNvPr id="13" name="TextBox 12"/>
-          <p:cNvSpPr txBox="1"/>
-          <p:nvPr/>
-        </p:nvSpPr>
-        <p:spPr>
-          <a:xfrm>
-            <a:off x="6355080" y="1920240"/>
-            <a:ext cx="2286000" cy="4114800"/>
-          </a:xfrm>
-          <a:prstGeom prst="rect">
-            <a:avLst/>
-          </a:prstGeom>
-          <a:noFill/>
-        </p:spPr>
-        <p:txBody>
-          <a:bodyPr wrap="square">
-            <a:spAutoFit/>
-          </a:bodyPr>
-          <a:lstStyle/>
-          <a:p>
-            <a:pPr>
-              <a:defRPr sz="1100">
-                <a:solidFill>
-                  <a:srgbClr val="0F172A"/>
-                </a:solidFill>
-              </a:defRPr>
-            </a:pPr>
-            <a:r>
-              <a:t>• Multi-stage Dockerfiles for backend and frontend</a:t>
-            </a:r>
-            <a:br/>
-            <a:r>
-              <a:t>• Single command launch: `docker compose up --build`</a:t>
-            </a:r>
-            <a:br/>
-            <a:r>
-              <a:t>• Isolated network bridging</a:t>
-            </a:r>
-            <a:br/>
-            <a:r>
-              <a:t>• Production-ready Nginx frontend bundle</a:t>
-            </a:r>
-          </a:p>
-        </p:txBody>
-      </p:sp>
-      <p:sp>
-        <p:nvSpPr>
-          <p:cNvPr id="14" name="Rounded Rectangle 13"/>
-          <p:cNvSpPr/>
-          <p:nvPr/>
-        </p:nvSpPr>
-        <p:spPr>
-          <a:xfrm>
-            <a:off x="8961120" y="1280160"/>
-            <a:ext cx="2560320" cy="5029200"/>
-          </a:xfrm>
-          <a:prstGeom prst="roundRect">
-            <a:avLst/>
-          </a:prstGeom>
-          <a:solidFill>
-            <a:srgbClr val="FFFFFF"/>
-          </a:solidFill>
-          <a:ln w="19050">
-            <a:solidFill>
-              <a:srgbClr val="E2E8F0"/>
-            </a:solidFill>
-          </a:ln>
-        </p:spPr>
-        <p:style>
-          <a:lnRef idx="1">
-            <a:schemeClr val="accent1"/>
-          </a:lnRef>
-          <a:fillRef idx="3">
-            <a:schemeClr val="accent1"/>
-          </a:fillRef>
-          <a:effectRef idx="2">
-            <a:schemeClr val="accent1"/>
-          </a:effectRef>
-          <a:fontRef idx="minor">
-            <a:schemeClr val="lt1"/>
-          </a:fontRef>
-        </p:style>
-        <p:txBody>
-          <a:bodyPr rtlCol="0" anchor="ctr"/>
-          <a:lstStyle/>
-          <a:p>
-            <a:pPr algn="ctr"/>
-          </a:p>
-        </p:txBody>
-      </p:sp>
-      <p:sp>
-        <p:nvSpPr>
-          <p:cNvPr id="15" name="Rectangle 14"/>
-          <p:cNvSpPr/>
-          <p:nvPr/>
-        </p:nvSpPr>
-        <p:spPr>
-          <a:xfrm>
-            <a:off x="8961120" y="1280160"/>
-            <a:ext cx="2560320" cy="457200"/>
-          </a:xfrm>
-          <a:prstGeom prst="rect">
-            <a:avLst/>
-          </a:prstGeom>
-          <a:solidFill>
-            <a:srgbClr val="0F172A"/>
-          </a:solidFill>
-          <a:ln>
-            <a:noFill/>
-          </a:ln>
-        </p:spPr>
-        <p:style>
-          <a:lnRef idx="1">
-            <a:schemeClr val="accent1"/>
-          </a:lnRef>
-          <a:fillRef idx="3">
-            <a:schemeClr val="accent1"/>
-          </a:fillRef>
-          <a:effectRef idx="2">
-            <a:schemeClr val="accent1"/>
-          </a:effectRef>
-          <a:fontRef idx="minor">
-            <a:schemeClr val="lt1"/>
-          </a:fontRef>
-        </p:style>
-        <p:txBody>
-          <a:bodyPr rtlCol="0" anchor="ctr"/>
-          <a:lstStyle/>
-          <a:p>
-            <a:pPr algn="ctr">
-              <a:defRPr sz="1200" b="1">
-                <a:solidFill>
-                  <a:srgbClr val="FFFFFF"/>
-                </a:solidFill>
-              </a:defRPr>
-            </a:pPr>
-            <a:r>
-              <a:t>Cloud Blueprint</a:t>
-            </a:r>
-          </a:p>
-        </p:txBody>
-      </p:sp>
-      <p:sp>
-        <p:nvSpPr>
-          <p:cNvPr id="16" name="TextBox 15"/>
-          <p:cNvSpPr txBox="1"/>
-          <p:nvPr/>
-        </p:nvSpPr>
-        <p:spPr>
-          <a:xfrm>
-            <a:off x="9098280" y="1920240"/>
-            <a:ext cx="2286000" cy="4114800"/>
-          </a:xfrm>
-          <a:prstGeom prst="rect">
-            <a:avLst/>
-          </a:prstGeom>
-          <a:noFill/>
-        </p:spPr>
-        <p:txBody>
-          <a:bodyPr wrap="square">
-            <a:spAutoFit/>
-          </a:bodyPr>
-          <a:lstStyle/>
-          <a:p>
-            <a:pPr>
-              <a:defRPr sz="1100">
-                <a:solidFill>
-                  <a:srgbClr val="0F172A"/>
-                </a:solidFill>
-              </a:defRPr>
-            </a:pPr>
-            <a:r>
-              <a:t>• AWS ECS/Fargate container orchestration</a:t>
-            </a:r>
-            <a:br/>
-            <a:r>
-              <a:t>• AWS Bedrock / OpenAI LLM integration</a:t>
-            </a:r>
-            <a:br/>
-            <a:r>
-              <a:t>• PostgreSQL + pgvector for semantic search</a:t>
-            </a:r>
-            <a:br/>
-            <a:r>
-              <a:t>• CloudWatch telemetry &amp; audit trails</a:t>
+              <a:defRPr sz="1500" b="1">
+                <a:solidFill>
+                  <a:srgbClr val="7C3AED"/>
+                </a:solidFill>
+              </a:defRPr>
+            </a:pPr>
+            <a:r>
+              <a:t>Guardrailed Generative AI Explanations</a:t>
+            </a:r>
+          </a:p>
+          <a:p>
+            <a:pPr>
+              <a:spcBef>
+                <a:spcPts val="1000"/>
+              </a:spcBef>
+              <a:defRPr b="1" sz="1100">
+                <a:solidFill>
+                  <a:srgbClr val="7C3AED"/>
+                </a:solidFill>
+              </a:defRPr>
+            </a:pPr>
+            <a:r>
+              <a:t>✓  Decoupled LLM Architecture:</a:t>
+            </a:r>
+          </a:p>
+          <a:p>
+            <a:pPr>
+              <a:defRPr sz="1000">
+                <a:solidFill>
+                  <a:srgbClr val="64748B"/>
+                </a:solidFill>
+              </a:defRPr>
+            </a:pPr>
+            <a:r>
+              <a:t>The LLM never makes credit decisions; it only synthesizes pre-computed SHAP values and rule reasoning into friendly customer narratives (`POST /explain/narrative`).</a:t>
+            </a:r>
+          </a:p>
+          <a:p>
+            <a:pPr>
+              <a:spcBef>
+                <a:spcPts val="1000"/>
+              </a:spcBef>
+              <a:defRPr b="1" sz="1100">
+                <a:solidFill>
+                  <a:srgbClr val="7C3AED"/>
+                </a:solidFill>
+              </a:defRPr>
+            </a:pPr>
+            <a:r>
+              <a:t>✓  Strict Demographic Guardrails:</a:t>
+            </a:r>
+          </a:p>
+          <a:p>
+            <a:pPr>
+              <a:defRPr sz="1000">
+                <a:solidFill>
+                  <a:srgbClr val="64748B"/>
+                </a:solidFill>
+              </a:defRPr>
+            </a:pPr>
+            <a:r>
+              <a:t>Automated regex &amp; policy filters scan output for prohibited protected characteristics (race, gender, religion, medical) and prevent false promises.</a:t>
+            </a:r>
+          </a:p>
+          <a:p>
+            <a:pPr>
+              <a:spcBef>
+                <a:spcPts val="1000"/>
+              </a:spcBef>
+              <a:defRPr b="1" sz="1100">
+                <a:solidFill>
+                  <a:srgbClr val="7C3AED"/>
+                </a:solidFill>
+              </a:defRPr>
+            </a:pPr>
+            <a:r>
+              <a:t>✓  Offline Template Fallback:</a:t>
+            </a:r>
+          </a:p>
+          <a:p>
+            <a:pPr>
+              <a:defRPr sz="1000">
+                <a:solidFill>
+                  <a:srgbClr val="64748B"/>
+                </a:solidFill>
+              </a:defRPr>
+            </a:pPr>
+            <a:r>
+              <a:t>Seamlessly falls back to deterministic rule-based templates if no OpenAI key is set, guaranteeing zero cost &amp; complete offline reliability.</a:t>
             </a:r>
           </a:p>
         </p:txBody>
